--- a/assets/figures-editable/c1-c2/c1-e15.pptx
+++ b/assets/figures-editable/c1-c2/c1-e15.pptx
@@ -7,7 +7,7 @@
   <p:sldIdLst>
     <p:sldId id="256" r:id="rId7"/>
   </p:sldIdLst>
-  <p:sldSz cx="11948160" cy="8095488" type="screen4x3"/>
+  <p:sldSz cx="12191695" cy="6858000" type="screen4x3"/>
   <p:notesSz cx="6858000" cy="9144000"/>
   <p:defaultTextStyle>
     <a:defPPr>
@@ -3098,14 +3098,14 @@
       <p:grpSpPr/>
       <p:sp>
         <p:nvSpPr>
-          <p:cNvPr id="2" name="text1" descr="sci-ppt:C1-E15-001"/>
+          <p:cNvPr id="2" name="C1-E15 text 0" descr="sci-ppt:o000"/>
           <p:cNvSpPr txBox="1"/>
           <p:nvPr/>
         </p:nvSpPr>
         <p:spPr>
           <a:xfrm>
-            <a:off x="316992" y="268224"/>
-            <a:ext cx="11277600" cy="359054"/>
+            <a:off x="274320" y="118872"/>
+            <a:ext cx="11612880" cy="340105"/>
           </a:xfrm>
           <a:prstGeom prst="rect">
             <a:avLst/>
@@ -3114,7 +3114,7 @@
           <a:effectLst/>
         </p:spPr>
         <p:txBody>
-          <a:bodyPr wrap="none" lIns="27432" rIns="27432" tIns="18288" bIns="18288" anchor="ctr">
+          <a:bodyPr wrap="none" lIns="18288" rIns="18288" tIns="18288" bIns="18288" anchor="t">
             <a:spAutoFit/>
           </a:bodyPr>
           <a:lstStyle/>
@@ -3125,37 +3125,1935 @@
               </a:spcAft>
             </a:pPr>
             <a:r>
-              <a:rPr sz="1823" b="0" i="0">
+              <a:rPr sz="1900" b="1" i="0">
                 <a:solidFill>
                   <a:srgbClr val="8EDBD4"/>
                 </a:solidFill>
                 <a:latin typeface="Arial"/>
               </a:rPr>
-              <a:t>C1-E15 | Physical-variable diagram</a:t>
-            </a:r>
-          </a:p>
-        </p:txBody>
-      </p:sp>
-      <p:sp>
-        <p:nvSpPr>
-          <p:cNvPr id="3" name="ellipse2" descr="sci-ppt:C1-E15-002"/>
+              <a:t>C1-E15 · Integrated speed with initial constant and branch</a:t>
+            </a:r>
+          </a:p>
+        </p:txBody>
+      </p:sp>
+      <p:cxnSp>
+        <p:nvCxnSpPr>
+          <p:cNvPr id="3" name="C1-E15 line 1" descr="sci-ppt:o001"/>
+          <p:cNvCxnSpPr/>
+          <p:nvPr/>
+        </p:nvCxnSpPr>
+        <p:spPr>
+          <a:xfrm>
+            <a:off x="1005840" y="5120640"/>
+            <a:ext cx="5852160" cy="0"/>
+          </a:xfrm>
+          <a:prstGeom prst="line">
+            <a:avLst/>
+          </a:prstGeom>
+          <a:ln w="19050">
+            <a:solidFill>
+              <a:srgbClr val="B4C7D2"/>
+            </a:solidFill>
+          </a:ln>
+          <a:effectLst/>
+        </p:spPr>
+      </p:cxnSp>
+      <p:cxnSp>
+        <p:nvCxnSpPr>
+          <p:cNvPr id="4" name="C1-E15 line 2" descr="sci-ppt:o002"/>
+          <p:cNvCxnSpPr/>
+          <p:nvPr/>
+        </p:nvCxnSpPr>
+        <p:spPr>
+          <a:xfrm>
+            <a:off x="1005840" y="1371600"/>
+            <a:ext cx="0" cy="3749040"/>
+          </a:xfrm>
+          <a:prstGeom prst="line">
+            <a:avLst/>
+          </a:prstGeom>
+          <a:ln w="19050">
+            <a:solidFill>
+              <a:srgbClr val="B4C7D2"/>
+            </a:solidFill>
+          </a:ln>
+          <a:effectLst/>
+        </p:spPr>
+      </p:cxnSp>
+      <p:cxnSp>
+        <p:nvCxnSpPr>
+          <p:cNvPr id="5" name="C1-E15 line 3" descr="sci-ppt:o003"/>
+          <p:cNvCxnSpPr/>
+          <p:nvPr/>
+        </p:nvCxnSpPr>
+        <p:spPr>
+          <a:xfrm>
+            <a:off x="1005840" y="5120640"/>
+            <a:ext cx="0" cy="64008"/>
+          </a:xfrm>
+          <a:prstGeom prst="line">
+            <a:avLst/>
+          </a:prstGeom>
+          <a:ln w="12700">
+            <a:solidFill>
+              <a:srgbClr val="B4C7D2"/>
+            </a:solidFill>
+          </a:ln>
+          <a:effectLst/>
+        </p:spPr>
+      </p:cxnSp>
+      <p:cxnSp>
+        <p:nvCxnSpPr>
+          <p:cNvPr id="6" name="C1-E15 line 4" descr="sci-ppt:o004"/>
+          <p:cNvCxnSpPr/>
+          <p:nvPr/>
+        </p:nvCxnSpPr>
+        <p:spPr>
+          <a:xfrm>
+            <a:off x="1005840" y="1371600"/>
+            <a:ext cx="0" cy="3749040"/>
+          </a:xfrm>
+          <a:prstGeom prst="line">
+            <a:avLst/>
+          </a:prstGeom>
+          <a:ln w="7620">
+            <a:solidFill>
+              <a:srgbClr val="2E4756"/>
+            </a:solidFill>
+          </a:ln>
+          <a:effectLst/>
+        </p:spPr>
+      </p:cxnSp>
+      <p:sp>
+        <p:nvSpPr>
+          <p:cNvPr id="7" name="C1-E15 text 5" descr="sci-ppt:o005"/>
+          <p:cNvSpPr txBox="1"/>
+          <p:nvPr/>
+        </p:nvSpPr>
+        <p:spPr>
+          <a:xfrm>
+            <a:off x="548640" y="5202936"/>
+            <a:ext cx="914400" cy="208407"/>
+          </a:xfrm>
+          <a:prstGeom prst="rect">
+            <a:avLst/>
+          </a:prstGeom>
+          <a:noFill/>
+          <a:effectLst/>
+        </p:spPr>
+        <p:txBody>
+          <a:bodyPr wrap="none" lIns="18288" rIns="18288" tIns="18288" bIns="18288" anchor="t">
+            <a:spAutoFit/>
+          </a:bodyPr>
+          <a:lstStyle/>
+          <a:p>
+            <a:pPr algn="ctr">
+              <a:spcAft>
+                <a:spcPts val="0"/>
+              </a:spcAft>
+            </a:pPr>
+            <a:r>
+              <a:rPr sz="1050" b="0" i="0">
+                <a:solidFill>
+                  <a:srgbClr val="B4C7D2"/>
+                </a:solidFill>
+                <a:latin typeface="Arial"/>
+              </a:rPr>
+              <a:t>0.02</a:t>
+            </a:r>
+          </a:p>
+        </p:txBody>
+      </p:sp>
+      <p:cxnSp>
+        <p:nvCxnSpPr>
+          <p:cNvPr id="8" name="C1-E15 line 6" descr="sci-ppt:o006"/>
+          <p:cNvCxnSpPr/>
+          <p:nvPr/>
+        </p:nvCxnSpPr>
+        <p:spPr>
+          <a:xfrm>
+            <a:off x="2376557" y="5120640"/>
+            <a:ext cx="0" cy="64008"/>
+          </a:xfrm>
+          <a:prstGeom prst="line">
+            <a:avLst/>
+          </a:prstGeom>
+          <a:ln w="12700">
+            <a:solidFill>
+              <a:srgbClr val="B4C7D2"/>
+            </a:solidFill>
+          </a:ln>
+          <a:effectLst/>
+        </p:spPr>
+      </p:cxnSp>
+      <p:cxnSp>
+        <p:nvCxnSpPr>
+          <p:cNvPr id="9" name="C1-E15 line 7" descr="sci-ppt:o007"/>
+          <p:cNvCxnSpPr/>
+          <p:nvPr/>
+        </p:nvCxnSpPr>
+        <p:spPr>
+          <a:xfrm>
+            <a:off x="2376557" y="1371600"/>
+            <a:ext cx="0" cy="3749040"/>
+          </a:xfrm>
+          <a:prstGeom prst="line">
+            <a:avLst/>
+          </a:prstGeom>
+          <a:ln w="7620">
+            <a:solidFill>
+              <a:srgbClr val="2E4756"/>
+            </a:solidFill>
+          </a:ln>
+          <a:effectLst/>
+        </p:spPr>
+      </p:cxnSp>
+      <p:sp>
+        <p:nvSpPr>
+          <p:cNvPr id="10" name="C1-E15 text 8" descr="sci-ppt:o008"/>
+          <p:cNvSpPr txBox="1"/>
+          <p:nvPr/>
+        </p:nvSpPr>
+        <p:spPr>
+          <a:xfrm>
+            <a:off x="1919357" y="5202936"/>
+            <a:ext cx="914400" cy="208407"/>
+          </a:xfrm>
+          <a:prstGeom prst="rect">
+            <a:avLst/>
+          </a:prstGeom>
+          <a:noFill/>
+          <a:effectLst/>
+        </p:spPr>
+        <p:txBody>
+          <a:bodyPr wrap="none" lIns="18288" rIns="18288" tIns="18288" bIns="18288" anchor="t">
+            <a:spAutoFit/>
+          </a:bodyPr>
+          <a:lstStyle/>
+          <a:p>
+            <a:pPr algn="ctr">
+              <a:spcAft>
+                <a:spcPts val="0"/>
+              </a:spcAft>
+            </a:pPr>
+            <a:r>
+              <a:rPr sz="1050" b="0" i="0">
+                <a:solidFill>
+                  <a:srgbClr val="B4C7D2"/>
+                </a:solidFill>
+                <a:latin typeface="Arial"/>
+              </a:rPr>
+              <a:t>0.05</a:t>
+            </a:r>
+          </a:p>
+        </p:txBody>
+      </p:sp>
+      <p:cxnSp>
+        <p:nvCxnSpPr>
+          <p:cNvPr id="11" name="C1-E15 line 9" descr="sci-ppt:o009"/>
+          <p:cNvCxnSpPr/>
+          <p:nvPr/>
+        </p:nvCxnSpPr>
+        <p:spPr>
+          <a:xfrm>
+            <a:off x="3413465" y="5120640"/>
+            <a:ext cx="0" cy="64008"/>
+          </a:xfrm>
+          <a:prstGeom prst="line">
+            <a:avLst/>
+          </a:prstGeom>
+          <a:ln w="12700">
+            <a:solidFill>
+              <a:srgbClr val="B4C7D2"/>
+            </a:solidFill>
+          </a:ln>
+          <a:effectLst/>
+        </p:spPr>
+      </p:cxnSp>
+      <p:cxnSp>
+        <p:nvCxnSpPr>
+          <p:cNvPr id="12" name="C1-E15 line 10" descr="sci-ppt:o010"/>
+          <p:cNvCxnSpPr/>
+          <p:nvPr/>
+        </p:nvCxnSpPr>
+        <p:spPr>
+          <a:xfrm>
+            <a:off x="3413465" y="1371600"/>
+            <a:ext cx="0" cy="3749040"/>
+          </a:xfrm>
+          <a:prstGeom prst="line">
+            <a:avLst/>
+          </a:prstGeom>
+          <a:ln w="7620">
+            <a:solidFill>
+              <a:srgbClr val="2E4756"/>
+            </a:solidFill>
+          </a:ln>
+          <a:effectLst/>
+        </p:spPr>
+      </p:cxnSp>
+      <p:sp>
+        <p:nvSpPr>
+          <p:cNvPr id="13" name="C1-E15 text 11" descr="sci-ppt:o011"/>
+          <p:cNvSpPr txBox="1"/>
+          <p:nvPr/>
+        </p:nvSpPr>
+        <p:spPr>
+          <a:xfrm>
+            <a:off x="2956265" y="5202936"/>
+            <a:ext cx="914400" cy="208407"/>
+          </a:xfrm>
+          <a:prstGeom prst="rect">
+            <a:avLst/>
+          </a:prstGeom>
+          <a:noFill/>
+          <a:effectLst/>
+        </p:spPr>
+        <p:txBody>
+          <a:bodyPr wrap="none" lIns="18288" rIns="18288" tIns="18288" bIns="18288" anchor="t">
+            <a:spAutoFit/>
+          </a:bodyPr>
+          <a:lstStyle/>
+          <a:p>
+            <a:pPr algn="ctr">
+              <a:spcAft>
+                <a:spcPts val="0"/>
+              </a:spcAft>
+            </a:pPr>
+            <a:r>
+              <a:rPr sz="1050" b="0" i="0">
+                <a:solidFill>
+                  <a:srgbClr val="B4C7D2"/>
+                </a:solidFill>
+                <a:latin typeface="Arial"/>
+              </a:rPr>
+              <a:t>0.1</a:t>
+            </a:r>
+          </a:p>
+        </p:txBody>
+      </p:sp>
+      <p:cxnSp>
+        <p:nvCxnSpPr>
+          <p:cNvPr id="14" name="C1-E15 line 12" descr="sci-ppt:o012"/>
+          <p:cNvCxnSpPr/>
+          <p:nvPr/>
+        </p:nvCxnSpPr>
+        <p:spPr>
+          <a:xfrm>
+            <a:off x="4450374" y="5120640"/>
+            <a:ext cx="0" cy="64008"/>
+          </a:xfrm>
+          <a:prstGeom prst="line">
+            <a:avLst/>
+          </a:prstGeom>
+          <a:ln w="12700">
+            <a:solidFill>
+              <a:srgbClr val="B4C7D2"/>
+            </a:solidFill>
+          </a:ln>
+          <a:effectLst/>
+        </p:spPr>
+      </p:cxnSp>
+      <p:cxnSp>
+        <p:nvCxnSpPr>
+          <p:cNvPr id="15" name="C1-E15 line 13" descr="sci-ppt:o013"/>
+          <p:cNvCxnSpPr/>
+          <p:nvPr/>
+        </p:nvCxnSpPr>
+        <p:spPr>
+          <a:xfrm>
+            <a:off x="4450374" y="1371600"/>
+            <a:ext cx="0" cy="3749040"/>
+          </a:xfrm>
+          <a:prstGeom prst="line">
+            <a:avLst/>
+          </a:prstGeom>
+          <a:ln w="7620">
+            <a:solidFill>
+              <a:srgbClr val="2E4756"/>
+            </a:solidFill>
+          </a:ln>
+          <a:effectLst/>
+        </p:spPr>
+      </p:cxnSp>
+      <p:sp>
+        <p:nvSpPr>
+          <p:cNvPr id="16" name="C1-E15 text 14" descr="sci-ppt:o014"/>
+          <p:cNvSpPr txBox="1"/>
+          <p:nvPr/>
+        </p:nvSpPr>
+        <p:spPr>
+          <a:xfrm>
+            <a:off x="3993174" y="5202936"/>
+            <a:ext cx="914400" cy="208407"/>
+          </a:xfrm>
+          <a:prstGeom prst="rect">
+            <a:avLst/>
+          </a:prstGeom>
+          <a:noFill/>
+          <a:effectLst/>
+        </p:spPr>
+        <p:txBody>
+          <a:bodyPr wrap="none" lIns="18288" rIns="18288" tIns="18288" bIns="18288" anchor="t">
+            <a:spAutoFit/>
+          </a:bodyPr>
+          <a:lstStyle/>
+          <a:p>
+            <a:pPr algn="ctr">
+              <a:spcAft>
+                <a:spcPts val="0"/>
+              </a:spcAft>
+            </a:pPr>
+            <a:r>
+              <a:rPr sz="1050" b="0" i="0">
+                <a:solidFill>
+                  <a:srgbClr val="B4C7D2"/>
+                </a:solidFill>
+                <a:latin typeface="Arial"/>
+              </a:rPr>
+              <a:t>0.2</a:t>
+            </a:r>
+          </a:p>
+        </p:txBody>
+      </p:sp>
+      <p:cxnSp>
+        <p:nvCxnSpPr>
+          <p:cNvPr id="17" name="C1-E15 line 15" descr="sci-ppt:o015"/>
+          <p:cNvCxnSpPr/>
+          <p:nvPr/>
+        </p:nvCxnSpPr>
+        <p:spPr>
+          <a:xfrm>
+            <a:off x="5821091" y="5120640"/>
+            <a:ext cx="0" cy="64008"/>
+          </a:xfrm>
+          <a:prstGeom prst="line">
+            <a:avLst/>
+          </a:prstGeom>
+          <a:ln w="12700">
+            <a:solidFill>
+              <a:srgbClr val="B4C7D2"/>
+            </a:solidFill>
+          </a:ln>
+          <a:effectLst/>
+        </p:spPr>
+      </p:cxnSp>
+      <p:cxnSp>
+        <p:nvCxnSpPr>
+          <p:cNvPr id="18" name="C1-E15 line 16" descr="sci-ppt:o016"/>
+          <p:cNvCxnSpPr/>
+          <p:nvPr/>
+        </p:nvCxnSpPr>
+        <p:spPr>
+          <a:xfrm>
+            <a:off x="5821091" y="1371600"/>
+            <a:ext cx="0" cy="3749040"/>
+          </a:xfrm>
+          <a:prstGeom prst="line">
+            <a:avLst/>
+          </a:prstGeom>
+          <a:ln w="7620">
+            <a:solidFill>
+              <a:srgbClr val="2E4756"/>
+            </a:solidFill>
+          </a:ln>
+          <a:effectLst/>
+        </p:spPr>
+      </p:cxnSp>
+      <p:sp>
+        <p:nvSpPr>
+          <p:cNvPr id="19" name="C1-E15 text 17" descr="sci-ppt:o017"/>
+          <p:cNvSpPr txBox="1"/>
+          <p:nvPr/>
+        </p:nvSpPr>
+        <p:spPr>
+          <a:xfrm>
+            <a:off x="5363891" y="5202936"/>
+            <a:ext cx="914400" cy="208407"/>
+          </a:xfrm>
+          <a:prstGeom prst="rect">
+            <a:avLst/>
+          </a:prstGeom>
+          <a:noFill/>
+          <a:effectLst/>
+        </p:spPr>
+        <p:txBody>
+          <a:bodyPr wrap="none" lIns="18288" rIns="18288" tIns="18288" bIns="18288" anchor="t">
+            <a:spAutoFit/>
+          </a:bodyPr>
+          <a:lstStyle/>
+          <a:p>
+            <a:pPr algn="ctr">
+              <a:spcAft>
+                <a:spcPts val="0"/>
+              </a:spcAft>
+            </a:pPr>
+            <a:r>
+              <a:rPr sz="1050" b="0" i="0">
+                <a:solidFill>
+                  <a:srgbClr val="B4C7D2"/>
+                </a:solidFill>
+                <a:latin typeface="Arial"/>
+              </a:rPr>
+              <a:t>0.5</a:t>
+            </a:r>
+          </a:p>
+        </p:txBody>
+      </p:sp>
+      <p:cxnSp>
+        <p:nvCxnSpPr>
+          <p:cNvPr id="20" name="C1-E15 line 18" descr="sci-ppt:o018"/>
+          <p:cNvCxnSpPr/>
+          <p:nvPr/>
+        </p:nvCxnSpPr>
+        <p:spPr>
+          <a:xfrm>
+            <a:off x="6858000" y="5120640"/>
+            <a:ext cx="0" cy="64008"/>
+          </a:xfrm>
+          <a:prstGeom prst="line">
+            <a:avLst/>
+          </a:prstGeom>
+          <a:ln w="12700">
+            <a:solidFill>
+              <a:srgbClr val="B4C7D2"/>
+            </a:solidFill>
+          </a:ln>
+          <a:effectLst/>
+        </p:spPr>
+      </p:cxnSp>
+      <p:cxnSp>
+        <p:nvCxnSpPr>
+          <p:cNvPr id="21" name="C1-E15 line 19" descr="sci-ppt:o019"/>
+          <p:cNvCxnSpPr/>
+          <p:nvPr/>
+        </p:nvCxnSpPr>
+        <p:spPr>
+          <a:xfrm>
+            <a:off x="6858000" y="1371600"/>
+            <a:ext cx="0" cy="3749040"/>
+          </a:xfrm>
+          <a:prstGeom prst="line">
+            <a:avLst/>
+          </a:prstGeom>
+          <a:ln w="7620">
+            <a:solidFill>
+              <a:srgbClr val="2E4756"/>
+            </a:solidFill>
+          </a:ln>
+          <a:effectLst/>
+        </p:spPr>
+      </p:cxnSp>
+      <p:sp>
+        <p:nvSpPr>
+          <p:cNvPr id="22" name="C1-E15 text 20" descr="sci-ppt:o020"/>
+          <p:cNvSpPr txBox="1"/>
+          <p:nvPr/>
+        </p:nvSpPr>
+        <p:spPr>
+          <a:xfrm>
+            <a:off x="6400800" y="5202936"/>
+            <a:ext cx="914400" cy="208407"/>
+          </a:xfrm>
+          <a:prstGeom prst="rect">
+            <a:avLst/>
+          </a:prstGeom>
+          <a:noFill/>
+          <a:effectLst/>
+        </p:spPr>
+        <p:txBody>
+          <a:bodyPr wrap="none" lIns="18288" rIns="18288" tIns="18288" bIns="18288" anchor="t">
+            <a:spAutoFit/>
+          </a:bodyPr>
+          <a:lstStyle/>
+          <a:p>
+            <a:pPr algn="ctr">
+              <a:spcAft>
+                <a:spcPts val="0"/>
+              </a:spcAft>
+            </a:pPr>
+            <a:r>
+              <a:rPr sz="1050" b="0" i="0">
+                <a:solidFill>
+                  <a:srgbClr val="B4C7D2"/>
+                </a:solidFill>
+                <a:latin typeface="Arial"/>
+              </a:rPr>
+              <a:t>1</a:t>
+            </a:r>
+          </a:p>
+        </p:txBody>
+      </p:sp>
+      <p:cxnSp>
+        <p:nvCxnSpPr>
+          <p:cNvPr id="23" name="C1-E15 line 21" descr="sci-ppt:o021"/>
+          <p:cNvCxnSpPr/>
+          <p:nvPr/>
+        </p:nvCxnSpPr>
+        <p:spPr>
+          <a:xfrm>
+            <a:off x="941832" y="5120640"/>
+            <a:ext cx="64008" cy="0"/>
+          </a:xfrm>
+          <a:prstGeom prst="line">
+            <a:avLst/>
+          </a:prstGeom>
+          <a:ln w="12700">
+            <a:solidFill>
+              <a:srgbClr val="B4C7D2"/>
+            </a:solidFill>
+          </a:ln>
+          <a:effectLst/>
+        </p:spPr>
+      </p:cxnSp>
+      <p:cxnSp>
+        <p:nvCxnSpPr>
+          <p:cNvPr id="24" name="C1-E15 line 22" descr="sci-ppt:o022"/>
+          <p:cNvCxnSpPr/>
+          <p:nvPr/>
+        </p:nvCxnSpPr>
+        <p:spPr>
+          <a:xfrm>
+            <a:off x="941832" y="3870960"/>
+            <a:ext cx="64008" cy="0"/>
+          </a:xfrm>
+          <a:prstGeom prst="line">
+            <a:avLst/>
+          </a:prstGeom>
+          <a:ln w="12700">
+            <a:solidFill>
+              <a:srgbClr val="B4C7D2"/>
+            </a:solidFill>
+          </a:ln>
+          <a:effectLst/>
+        </p:spPr>
+      </p:cxnSp>
+      <p:cxnSp>
+        <p:nvCxnSpPr>
+          <p:cNvPr id="25" name="C1-E15 line 23" descr="sci-ppt:o023"/>
+          <p:cNvCxnSpPr/>
+          <p:nvPr/>
+        </p:nvCxnSpPr>
+        <p:spPr>
+          <a:xfrm>
+            <a:off x="1005840" y="3870960"/>
+            <a:ext cx="5852160" cy="0"/>
+          </a:xfrm>
+          <a:prstGeom prst="line">
+            <a:avLst/>
+          </a:prstGeom>
+          <a:ln w="7620">
+            <a:solidFill>
+              <a:srgbClr val="2E4756"/>
+            </a:solidFill>
+          </a:ln>
+          <a:effectLst/>
+        </p:spPr>
+      </p:cxnSp>
+      <p:sp>
+        <p:nvSpPr>
+          <p:cNvPr id="26" name="C1-E15 text 24" descr="sci-ppt:o024"/>
+          <p:cNvSpPr txBox="1"/>
+          <p:nvPr/>
+        </p:nvSpPr>
+        <p:spPr>
+          <a:xfrm>
+            <a:off x="137160" y="3788664"/>
+            <a:ext cx="777240" cy="208407"/>
+          </a:xfrm>
+          <a:prstGeom prst="rect">
+            <a:avLst/>
+          </a:prstGeom>
+          <a:noFill/>
+          <a:effectLst/>
+        </p:spPr>
+        <p:txBody>
+          <a:bodyPr wrap="none" lIns="18288" rIns="18288" tIns="18288" bIns="18288" anchor="t">
+            <a:spAutoFit/>
+          </a:bodyPr>
+          <a:lstStyle/>
+          <a:p>
+            <a:pPr algn="r">
+              <a:spcAft>
+                <a:spcPts val="0"/>
+              </a:spcAft>
+            </a:pPr>
+            <a:r>
+              <a:rPr sz="1050" b="0" i="0">
+                <a:solidFill>
+                  <a:srgbClr val="B4C7D2"/>
+                </a:solidFill>
+                <a:latin typeface="Arial"/>
+              </a:rPr>
+              <a:t>10</a:t>
+            </a:r>
+          </a:p>
+        </p:txBody>
+      </p:sp>
+      <p:cxnSp>
+        <p:nvCxnSpPr>
+          <p:cNvPr id="27" name="C1-E15 line 25" descr="sci-ppt:o025"/>
+          <p:cNvCxnSpPr/>
+          <p:nvPr/>
+        </p:nvCxnSpPr>
+        <p:spPr>
+          <a:xfrm>
+            <a:off x="941832" y="2621280"/>
+            <a:ext cx="64008" cy="0"/>
+          </a:xfrm>
+          <a:prstGeom prst="line">
+            <a:avLst/>
+          </a:prstGeom>
+          <a:ln w="12700">
+            <a:solidFill>
+              <a:srgbClr val="B4C7D2"/>
+            </a:solidFill>
+          </a:ln>
+          <a:effectLst/>
+        </p:spPr>
+      </p:cxnSp>
+      <p:cxnSp>
+        <p:nvCxnSpPr>
+          <p:cNvPr id="28" name="C1-E15 line 26" descr="sci-ppt:o026"/>
+          <p:cNvCxnSpPr/>
+          <p:nvPr/>
+        </p:nvCxnSpPr>
+        <p:spPr>
+          <a:xfrm>
+            <a:off x="1005840" y="2621280"/>
+            <a:ext cx="5852160" cy="0"/>
+          </a:xfrm>
+          <a:prstGeom prst="line">
+            <a:avLst/>
+          </a:prstGeom>
+          <a:ln w="7620">
+            <a:solidFill>
+              <a:srgbClr val="2E4756"/>
+            </a:solidFill>
+          </a:ln>
+          <a:effectLst/>
+        </p:spPr>
+      </p:cxnSp>
+      <p:sp>
+        <p:nvSpPr>
+          <p:cNvPr id="29" name="C1-E15 text 27" descr="sci-ppt:o027"/>
+          <p:cNvSpPr txBox="1"/>
+          <p:nvPr/>
+        </p:nvSpPr>
+        <p:spPr>
+          <a:xfrm>
+            <a:off x="137160" y="2538984"/>
+            <a:ext cx="777240" cy="208407"/>
+          </a:xfrm>
+          <a:prstGeom prst="rect">
+            <a:avLst/>
+          </a:prstGeom>
+          <a:noFill/>
+          <a:effectLst/>
+        </p:spPr>
+        <p:txBody>
+          <a:bodyPr wrap="none" lIns="18288" rIns="18288" tIns="18288" bIns="18288" anchor="t">
+            <a:spAutoFit/>
+          </a:bodyPr>
+          <a:lstStyle/>
+          <a:p>
+            <a:pPr algn="r">
+              <a:spcAft>
+                <a:spcPts val="0"/>
+              </a:spcAft>
+            </a:pPr>
+            <a:r>
+              <a:rPr sz="1050" b="0" i="0">
+                <a:solidFill>
+                  <a:srgbClr val="B4C7D2"/>
+                </a:solidFill>
+                <a:latin typeface="Arial"/>
+              </a:rPr>
+              <a:t>100</a:t>
+            </a:r>
+          </a:p>
+        </p:txBody>
+      </p:sp>
+      <p:cxnSp>
+        <p:nvCxnSpPr>
+          <p:cNvPr id="30" name="C1-E15 line 28" descr="sci-ppt:o028"/>
+          <p:cNvCxnSpPr/>
+          <p:nvPr/>
+        </p:nvCxnSpPr>
+        <p:spPr>
+          <a:xfrm>
+            <a:off x="941832" y="1371600"/>
+            <a:ext cx="64008" cy="0"/>
+          </a:xfrm>
+          <a:prstGeom prst="line">
+            <a:avLst/>
+          </a:prstGeom>
+          <a:ln w="12700">
+            <a:solidFill>
+              <a:srgbClr val="B4C7D2"/>
+            </a:solidFill>
+          </a:ln>
+          <a:effectLst/>
+        </p:spPr>
+      </p:cxnSp>
+      <p:cxnSp>
+        <p:nvCxnSpPr>
+          <p:cNvPr id="31" name="C1-E15 line 29" descr="sci-ppt:o029"/>
+          <p:cNvCxnSpPr/>
+          <p:nvPr/>
+        </p:nvCxnSpPr>
+        <p:spPr>
+          <a:xfrm>
+            <a:off x="1005840" y="1371600"/>
+            <a:ext cx="5852160" cy="0"/>
+          </a:xfrm>
+          <a:prstGeom prst="line">
+            <a:avLst/>
+          </a:prstGeom>
+          <a:ln w="7620">
+            <a:solidFill>
+              <a:srgbClr val="2E4756"/>
+            </a:solidFill>
+          </a:ln>
+          <a:effectLst/>
+        </p:spPr>
+      </p:cxnSp>
+      <p:sp>
+        <p:nvSpPr>
+          <p:cNvPr id="32" name="C1-E15 text 30" descr="sci-ppt:o030"/>
+          <p:cNvSpPr txBox="1"/>
+          <p:nvPr/>
+        </p:nvSpPr>
+        <p:spPr>
+          <a:xfrm>
+            <a:off x="137160" y="1289304"/>
+            <a:ext cx="777240" cy="208407"/>
+          </a:xfrm>
+          <a:prstGeom prst="rect">
+            <a:avLst/>
+          </a:prstGeom>
+          <a:noFill/>
+          <a:effectLst/>
+        </p:spPr>
+        <p:txBody>
+          <a:bodyPr wrap="none" lIns="18288" rIns="18288" tIns="18288" bIns="18288" anchor="t">
+            <a:spAutoFit/>
+          </a:bodyPr>
+          <a:lstStyle/>
+          <a:p>
+            <a:pPr algn="r">
+              <a:spcAft>
+                <a:spcPts val="0"/>
+              </a:spcAft>
+            </a:pPr>
+            <a:r>
+              <a:rPr sz="1050" b="0" i="0">
+                <a:solidFill>
+                  <a:srgbClr val="B4C7D2"/>
+                </a:solidFill>
+                <a:latin typeface="Arial"/>
+              </a:rPr>
+              <a:t>1000</a:t>
+            </a:r>
+          </a:p>
+        </p:txBody>
+      </p:sp>
+      <p:sp>
+        <p:nvSpPr>
+          <p:cNvPr id="33" name="C1-E15 text 31" descr="sci-ppt:o031"/>
+          <p:cNvSpPr txBox="1"/>
+          <p:nvPr/>
+        </p:nvSpPr>
+        <p:spPr>
+          <a:xfrm>
+            <a:off x="1005840" y="5404103"/>
+            <a:ext cx="5852160" cy="231648"/>
+          </a:xfrm>
+          <a:prstGeom prst="rect">
+            <a:avLst/>
+          </a:prstGeom>
+          <a:noFill/>
+          <a:effectLst/>
+        </p:spPr>
+        <p:txBody>
+          <a:bodyPr wrap="none" lIns="18288" rIns="18288" tIns="18288" bIns="18288" anchor="t">
+            <a:spAutoFit/>
+          </a:bodyPr>
+          <a:lstStyle/>
+          <a:p>
+            <a:pPr algn="ctr">
+              <a:spcAft>
+                <a:spcPts val="0"/>
+              </a:spcAft>
+            </a:pPr>
+            <a:r>
+              <a:rPr sz="1200" b="0" i="0">
+                <a:solidFill>
+                  <a:srgbClr val="E7F0F3"/>
+                </a:solidFill>
+                <a:latin typeface="Arial"/>
+              </a:rPr>
+              <a:t>R / Rₘₐₓ</a:t>
+            </a:r>
+          </a:p>
+        </p:txBody>
+      </p:sp>
+      <p:sp>
+        <p:nvSpPr>
+          <p:cNvPr id="34" name="C1-E15 text 32" descr="sci-ppt:o032"/>
+          <p:cNvSpPr txBox="1"/>
+          <p:nvPr/>
+        </p:nvSpPr>
+        <p:spPr>
+          <a:xfrm>
+            <a:off x="457200" y="1024128"/>
+            <a:ext cx="5852160" cy="231648"/>
+          </a:xfrm>
+          <a:prstGeom prst="rect">
+            <a:avLst/>
+          </a:prstGeom>
+          <a:noFill/>
+          <a:effectLst/>
+        </p:spPr>
+        <p:txBody>
+          <a:bodyPr wrap="none" lIns="18288" rIns="18288" tIns="18288" bIns="18288" anchor="t">
+            <a:spAutoFit/>
+          </a:bodyPr>
+          <a:lstStyle/>
+          <a:p>
+            <a:pPr algn="l">
+              <a:spcAft>
+                <a:spcPts val="0"/>
+              </a:spcAft>
+            </a:pPr>
+            <a:r>
+              <a:rPr sz="1200" b="0" i="0">
+                <a:solidFill>
+                  <a:srgbClr val="E7F0F3"/>
+                </a:solidFill>
+                <a:latin typeface="Arial"/>
+              </a:rPr>
+              <a:t>|Ṙ|  (m/s)</a:t>
+            </a:r>
+          </a:p>
+        </p:txBody>
+      </p:sp>
+      <p:sp>
+        <p:nvSpPr>
+          <p:cNvPr id="35" name="C1-E15 polygon 33" descr="sci-ppt:o033"/>
           <p:cNvSpPr/>
           <p:nvPr/>
         </p:nvSpPr>
         <p:spPr>
           <a:xfrm>
-            <a:off x="2072640" y="1402080"/>
-            <a:ext cx="2438400" cy="2438400"/>
+            <a:off x="2099013" y="1391161"/>
+            <a:ext cx="4739402" cy="3462934"/>
+          </a:xfrm>
+          <a:custGeom>
+            <a:avLst/>
+            <a:gdLst/>
+            <a:ahLst/>
+            <a:cxnLst/>
+            <a:rect l="l" t="t" r="r" b="b"/>
+            <a:pathLst>
+              <a:path w="4739402" h="3462934">
+                <a:moveTo>
+                  <a:pt x="0" y="0"/>
+                </a:moveTo>
+                <a:lnTo>
+                  <a:pt x="39168" y="21317"/>
+                </a:lnTo>
+                <a:lnTo>
+                  <a:pt x="78337" y="42634"/>
+                </a:lnTo>
+                <a:lnTo>
+                  <a:pt x="117506" y="63952"/>
+                </a:lnTo>
+                <a:lnTo>
+                  <a:pt x="156674" y="85270"/>
+                </a:lnTo>
+                <a:lnTo>
+                  <a:pt x="195843" y="106587"/>
+                </a:lnTo>
+                <a:lnTo>
+                  <a:pt x="235012" y="127905"/>
+                </a:lnTo>
+                <a:lnTo>
+                  <a:pt x="274180" y="149223"/>
+                </a:lnTo>
+                <a:lnTo>
+                  <a:pt x="313349" y="170542"/>
+                </a:lnTo>
+                <a:lnTo>
+                  <a:pt x="352517" y="191860"/>
+                </a:lnTo>
+                <a:lnTo>
+                  <a:pt x="391686" y="213179"/>
+                </a:lnTo>
+                <a:lnTo>
+                  <a:pt x="430855" y="234498"/>
+                </a:lnTo>
+                <a:lnTo>
+                  <a:pt x="470023" y="255818"/>
+                </a:lnTo>
+                <a:lnTo>
+                  <a:pt x="509192" y="277137"/>
+                </a:lnTo>
+                <a:lnTo>
+                  <a:pt x="548360" y="298457"/>
+                </a:lnTo>
+                <a:lnTo>
+                  <a:pt x="587529" y="319778"/>
+                </a:lnTo>
+                <a:lnTo>
+                  <a:pt x="626698" y="341099"/>
+                </a:lnTo>
+                <a:lnTo>
+                  <a:pt x="665866" y="362420"/>
+                </a:lnTo>
+                <a:lnTo>
+                  <a:pt x="705035" y="383741"/>
+                </a:lnTo>
+                <a:lnTo>
+                  <a:pt x="744204" y="405064"/>
+                </a:lnTo>
+                <a:lnTo>
+                  <a:pt x="783372" y="426386"/>
+                </a:lnTo>
+                <a:lnTo>
+                  <a:pt x="822541" y="447710"/>
+                </a:lnTo>
+                <a:lnTo>
+                  <a:pt x="861709" y="469033"/>
+                </a:lnTo>
+                <a:lnTo>
+                  <a:pt x="900878" y="490358"/>
+                </a:lnTo>
+                <a:lnTo>
+                  <a:pt x="940047" y="511683"/>
+                </a:lnTo>
+                <a:lnTo>
+                  <a:pt x="979215" y="533009"/>
+                </a:lnTo>
+                <a:lnTo>
+                  <a:pt x="1018384" y="554336"/>
+                </a:lnTo>
+                <a:lnTo>
+                  <a:pt x="1057552" y="575664"/>
+                </a:lnTo>
+                <a:lnTo>
+                  <a:pt x="1096721" y="596993"/>
+                </a:lnTo>
+                <a:lnTo>
+                  <a:pt x="1135890" y="618323"/>
+                </a:lnTo>
+                <a:lnTo>
+                  <a:pt x="1175058" y="639654"/>
+                </a:lnTo>
+                <a:lnTo>
+                  <a:pt x="1214227" y="660987"/>
+                </a:lnTo>
+                <a:lnTo>
+                  <a:pt x="1253396" y="682320"/>
+                </a:lnTo>
+                <a:lnTo>
+                  <a:pt x="1292564" y="703656"/>
+                </a:lnTo>
+                <a:lnTo>
+                  <a:pt x="1331733" y="724992"/>
+                </a:lnTo>
+                <a:lnTo>
+                  <a:pt x="1370901" y="746331"/>
+                </a:lnTo>
+                <a:lnTo>
+                  <a:pt x="1410070" y="767671"/>
+                </a:lnTo>
+                <a:lnTo>
+                  <a:pt x="1449239" y="789014"/>
+                </a:lnTo>
+                <a:lnTo>
+                  <a:pt x="1488407" y="810359"/>
+                </a:lnTo>
+                <a:lnTo>
+                  <a:pt x="1527576" y="831706"/>
+                </a:lnTo>
+                <a:lnTo>
+                  <a:pt x="1566744" y="853055"/>
+                </a:lnTo>
+                <a:lnTo>
+                  <a:pt x="1605913" y="874408"/>
+                </a:lnTo>
+                <a:lnTo>
+                  <a:pt x="1645082" y="895763"/>
+                </a:lnTo>
+                <a:lnTo>
+                  <a:pt x="1684250" y="917122"/>
+                </a:lnTo>
+                <a:lnTo>
+                  <a:pt x="1723419" y="938484"/>
+                </a:lnTo>
+                <a:lnTo>
+                  <a:pt x="1762587" y="959850"/>
+                </a:lnTo>
+                <a:lnTo>
+                  <a:pt x="1801756" y="981221"/>
+                </a:lnTo>
+                <a:lnTo>
+                  <a:pt x="1840925" y="1002595"/>
+                </a:lnTo>
+                <a:lnTo>
+                  <a:pt x="1880093" y="1023975"/>
+                </a:lnTo>
+                <a:lnTo>
+                  <a:pt x="1919262" y="1045360"/>
+                </a:lnTo>
+                <a:lnTo>
+                  <a:pt x="1958431" y="1066750"/>
+                </a:lnTo>
+                <a:lnTo>
+                  <a:pt x="1997599" y="1088147"/>
+                </a:lnTo>
+                <a:lnTo>
+                  <a:pt x="2036768" y="1109550"/>
+                </a:lnTo>
+                <a:lnTo>
+                  <a:pt x="2075936" y="1130960"/>
+                </a:lnTo>
+                <a:lnTo>
+                  <a:pt x="2115105" y="1152379"/>
+                </a:lnTo>
+                <a:lnTo>
+                  <a:pt x="2154274" y="1173805"/>
+                </a:lnTo>
+                <a:lnTo>
+                  <a:pt x="2193442" y="1195241"/>
+                </a:lnTo>
+                <a:lnTo>
+                  <a:pt x="2232611" y="1216687"/>
+                </a:lnTo>
+                <a:lnTo>
+                  <a:pt x="2271779" y="1238143"/>
+                </a:lnTo>
+                <a:lnTo>
+                  <a:pt x="2310948" y="1259611"/>
+                </a:lnTo>
+                <a:lnTo>
+                  <a:pt x="2350117" y="1281091"/>
+                </a:lnTo>
+                <a:lnTo>
+                  <a:pt x="2389285" y="1302585"/>
+                </a:lnTo>
+                <a:lnTo>
+                  <a:pt x="2428454" y="1324094"/>
+                </a:lnTo>
+                <a:lnTo>
+                  <a:pt x="2467623" y="1345619"/>
+                </a:lnTo>
+                <a:lnTo>
+                  <a:pt x="2506791" y="1367161"/>
+                </a:lnTo>
+                <a:lnTo>
+                  <a:pt x="2545960" y="1388722"/>
+                </a:lnTo>
+                <a:lnTo>
+                  <a:pt x="2585128" y="1410303"/>
+                </a:lnTo>
+                <a:lnTo>
+                  <a:pt x="2624297" y="1431906"/>
+                </a:lnTo>
+                <a:lnTo>
+                  <a:pt x="2663466" y="1453532"/>
+                </a:lnTo>
+                <a:lnTo>
+                  <a:pt x="2702634" y="1475185"/>
+                </a:lnTo>
+                <a:lnTo>
+                  <a:pt x="2741803" y="1496865"/>
+                </a:lnTo>
+                <a:lnTo>
+                  <a:pt x="2780971" y="1518576"/>
+                </a:lnTo>
+                <a:lnTo>
+                  <a:pt x="2820140" y="1540320"/>
+                </a:lnTo>
+                <a:lnTo>
+                  <a:pt x="2859309" y="1562100"/>
+                </a:lnTo>
+                <a:lnTo>
+                  <a:pt x="2898477" y="1583919"/>
+                </a:lnTo>
+                <a:lnTo>
+                  <a:pt x="2937646" y="1605779"/>
+                </a:lnTo>
+                <a:lnTo>
+                  <a:pt x="2976815" y="1627686"/>
+                </a:lnTo>
+                <a:lnTo>
+                  <a:pt x="3015983" y="1649642"/>
+                </a:lnTo>
+                <a:lnTo>
+                  <a:pt x="3055152" y="1671652"/>
+                </a:lnTo>
+                <a:lnTo>
+                  <a:pt x="3094320" y="1693721"/>
+                </a:lnTo>
+                <a:lnTo>
+                  <a:pt x="3133489" y="1715854"/>
+                </a:lnTo>
+                <a:lnTo>
+                  <a:pt x="3172658" y="1738056"/>
+                </a:lnTo>
+                <a:lnTo>
+                  <a:pt x="3211826" y="1760335"/>
+                </a:lnTo>
+                <a:lnTo>
+                  <a:pt x="3250995" y="1782695"/>
+                </a:lnTo>
+                <a:lnTo>
+                  <a:pt x="3290163" y="1805146"/>
+                </a:lnTo>
+                <a:lnTo>
+                  <a:pt x="3329332" y="1827695"/>
+                </a:lnTo>
+                <a:lnTo>
+                  <a:pt x="3368501" y="1850351"/>
+                </a:lnTo>
+                <a:lnTo>
+                  <a:pt x="3407669" y="1873124"/>
+                </a:lnTo>
+                <a:lnTo>
+                  <a:pt x="3446838" y="1896025"/>
+                </a:lnTo>
+                <a:lnTo>
+                  <a:pt x="3486007" y="1919066"/>
+                </a:lnTo>
+                <a:lnTo>
+                  <a:pt x="3525175" y="1942260"/>
+                </a:lnTo>
+                <a:lnTo>
+                  <a:pt x="3564344" y="1965623"/>
+                </a:lnTo>
+                <a:lnTo>
+                  <a:pt x="3603512" y="1989170"/>
+                </a:lnTo>
+                <a:lnTo>
+                  <a:pt x="3642681" y="2012921"/>
+                </a:lnTo>
+                <a:lnTo>
+                  <a:pt x="3681850" y="2036896"/>
+                </a:lnTo>
+                <a:lnTo>
+                  <a:pt x="3721018" y="2061117"/>
+                </a:lnTo>
+                <a:lnTo>
+                  <a:pt x="3760187" y="2085611"/>
+                </a:lnTo>
+                <a:lnTo>
+                  <a:pt x="3799355" y="2110408"/>
+                </a:lnTo>
+                <a:lnTo>
+                  <a:pt x="3838524" y="2135540"/>
+                </a:lnTo>
+                <a:lnTo>
+                  <a:pt x="3877693" y="2161045"/>
+                </a:lnTo>
+                <a:lnTo>
+                  <a:pt x="3916861" y="2186967"/>
+                </a:lnTo>
+                <a:lnTo>
+                  <a:pt x="3956030" y="2213354"/>
+                </a:lnTo>
+                <a:lnTo>
+                  <a:pt x="3995199" y="2240265"/>
+                </a:lnTo>
+                <a:lnTo>
+                  <a:pt x="4034367" y="2267766"/>
+                </a:lnTo>
+                <a:lnTo>
+                  <a:pt x="4073536" y="2295935"/>
+                </a:lnTo>
+                <a:lnTo>
+                  <a:pt x="4112704" y="2324864"/>
+                </a:lnTo>
+                <a:lnTo>
+                  <a:pt x="4151873" y="2354664"/>
+                </a:lnTo>
+                <a:lnTo>
+                  <a:pt x="4191042" y="2385465"/>
+                </a:lnTo>
+                <a:lnTo>
+                  <a:pt x="4230210" y="2417430"/>
+                </a:lnTo>
+                <a:lnTo>
+                  <a:pt x="4269379" y="2450755"/>
+                </a:lnTo>
+                <a:lnTo>
+                  <a:pt x="4308547" y="2485690"/>
+                </a:lnTo>
+                <a:lnTo>
+                  <a:pt x="4347716" y="2522550"/>
+                </a:lnTo>
+                <a:lnTo>
+                  <a:pt x="4386885" y="2561748"/>
+                </a:lnTo>
+                <a:lnTo>
+                  <a:pt x="4426053" y="2603834"/>
+                </a:lnTo>
+                <a:lnTo>
+                  <a:pt x="4465222" y="2649565"/>
+                </a:lnTo>
+                <a:lnTo>
+                  <a:pt x="4504391" y="2700027"/>
+                </a:lnTo>
+                <a:lnTo>
+                  <a:pt x="4543559" y="2756852"/>
+                </a:lnTo>
+                <a:lnTo>
+                  <a:pt x="4582728" y="2822660"/>
+                </a:lnTo>
+                <a:lnTo>
+                  <a:pt x="4621896" y="2902073"/>
+                </a:lnTo>
+                <a:lnTo>
+                  <a:pt x="4661065" y="3004456"/>
+                </a:lnTo>
+                <a:lnTo>
+                  <a:pt x="4700234" y="3154013"/>
+                </a:lnTo>
+                <a:lnTo>
+                  <a:pt x="4739402" y="3462934"/>
+                </a:lnTo>
+              </a:path>
+            </a:pathLst>
+          </a:custGeom>
+          <a:noFill/>
+          <a:ln w="38100">
+            <a:solidFill>
+              <a:srgbClr val="8EDBD4"/>
+            </a:solidFill>
+          </a:ln>
+          <a:effectLst/>
+        </p:spPr>
+        <p:txBody>
+          <a:bodyPr rtlCol="0" anchor="ctr"/>
+          <a:lstStyle/>
+          <a:p>
+            <a:pPr algn="ctr"/>
+          </a:p>
+        </p:txBody>
+      </p:sp>
+      <p:sp>
+        <p:nvSpPr>
+          <p:cNvPr id="36" name="C1-E15 polygon 34" descr="sci-ppt:o034"/>
+          <p:cNvSpPr/>
+          <p:nvPr/>
+        </p:nvSpPr>
+        <p:spPr>
+          <a:xfrm>
+            <a:off x="2099013" y="1391141"/>
+            <a:ext cx="4758987" cy="2589847"/>
+          </a:xfrm>
+          <a:custGeom>
+            <a:avLst/>
+            <a:gdLst/>
+            <a:ahLst/>
+            <a:cxnLst/>
+            <a:rect l="l" t="t" r="r" b="b"/>
+            <a:pathLst>
+              <a:path w="4758987" h="2589847">
+                <a:moveTo>
+                  <a:pt x="0" y="0"/>
+                </a:moveTo>
+                <a:lnTo>
+                  <a:pt x="39168" y="21316"/>
+                </a:lnTo>
+                <a:lnTo>
+                  <a:pt x="78337" y="42632"/>
+                </a:lnTo>
+                <a:lnTo>
+                  <a:pt x="117506" y="63947"/>
+                </a:lnTo>
+                <a:lnTo>
+                  <a:pt x="156674" y="85263"/>
+                </a:lnTo>
+                <a:lnTo>
+                  <a:pt x="195843" y="106579"/>
+                </a:lnTo>
+                <a:lnTo>
+                  <a:pt x="235012" y="127894"/>
+                </a:lnTo>
+                <a:lnTo>
+                  <a:pt x="274180" y="149210"/>
+                </a:lnTo>
+                <a:lnTo>
+                  <a:pt x="313349" y="170525"/>
+                </a:lnTo>
+                <a:lnTo>
+                  <a:pt x="352517" y="191841"/>
+                </a:lnTo>
+                <a:lnTo>
+                  <a:pt x="391686" y="213157"/>
+                </a:lnTo>
+                <a:lnTo>
+                  <a:pt x="430855" y="234472"/>
+                </a:lnTo>
+                <a:lnTo>
+                  <a:pt x="470023" y="255788"/>
+                </a:lnTo>
+                <a:lnTo>
+                  <a:pt x="509192" y="277103"/>
+                </a:lnTo>
+                <a:lnTo>
+                  <a:pt x="548360" y="298419"/>
+                </a:lnTo>
+                <a:lnTo>
+                  <a:pt x="587529" y="319735"/>
+                </a:lnTo>
+                <a:lnTo>
+                  <a:pt x="626698" y="341050"/>
+                </a:lnTo>
+                <a:lnTo>
+                  <a:pt x="665866" y="362366"/>
+                </a:lnTo>
+                <a:lnTo>
+                  <a:pt x="705035" y="383682"/>
+                </a:lnTo>
+                <a:lnTo>
+                  <a:pt x="744204" y="404997"/>
+                </a:lnTo>
+                <a:lnTo>
+                  <a:pt x="783372" y="426313"/>
+                </a:lnTo>
+                <a:lnTo>
+                  <a:pt x="822541" y="447628"/>
+                </a:lnTo>
+                <a:lnTo>
+                  <a:pt x="861709" y="468944"/>
+                </a:lnTo>
+                <a:lnTo>
+                  <a:pt x="900878" y="490260"/>
+                </a:lnTo>
+                <a:lnTo>
+                  <a:pt x="940047" y="511575"/>
+                </a:lnTo>
+                <a:lnTo>
+                  <a:pt x="979215" y="532891"/>
+                </a:lnTo>
+                <a:lnTo>
+                  <a:pt x="1018384" y="554206"/>
+                </a:lnTo>
+                <a:lnTo>
+                  <a:pt x="1057552" y="575522"/>
+                </a:lnTo>
+                <a:lnTo>
+                  <a:pt x="1096721" y="596838"/>
+                </a:lnTo>
+                <a:lnTo>
+                  <a:pt x="1135890" y="618153"/>
+                </a:lnTo>
+                <a:lnTo>
+                  <a:pt x="1175058" y="639469"/>
+                </a:lnTo>
+                <a:lnTo>
+                  <a:pt x="1214227" y="660784"/>
+                </a:lnTo>
+                <a:lnTo>
+                  <a:pt x="1253396" y="682100"/>
+                </a:lnTo>
+                <a:lnTo>
+                  <a:pt x="1292564" y="703416"/>
+                </a:lnTo>
+                <a:lnTo>
+                  <a:pt x="1331733" y="724731"/>
+                </a:lnTo>
+                <a:lnTo>
+                  <a:pt x="1370901" y="746047"/>
+                </a:lnTo>
+                <a:lnTo>
+                  <a:pt x="1410070" y="767363"/>
+                </a:lnTo>
+                <a:lnTo>
+                  <a:pt x="1449239" y="788678"/>
+                </a:lnTo>
+                <a:lnTo>
+                  <a:pt x="1488407" y="809994"/>
+                </a:lnTo>
+                <a:lnTo>
+                  <a:pt x="1527576" y="831309"/>
+                </a:lnTo>
+                <a:lnTo>
+                  <a:pt x="1566744" y="852625"/>
+                </a:lnTo>
+                <a:lnTo>
+                  <a:pt x="1605913" y="873941"/>
+                </a:lnTo>
+                <a:lnTo>
+                  <a:pt x="1645082" y="895256"/>
+                </a:lnTo>
+                <a:lnTo>
+                  <a:pt x="1684250" y="916572"/>
+                </a:lnTo>
+                <a:lnTo>
+                  <a:pt x="1723419" y="937887"/>
+                </a:lnTo>
+                <a:lnTo>
+                  <a:pt x="1762587" y="959203"/>
+                </a:lnTo>
+                <a:lnTo>
+                  <a:pt x="1801756" y="980519"/>
+                </a:lnTo>
+                <a:lnTo>
+                  <a:pt x="1840925" y="1001834"/>
+                </a:lnTo>
+                <a:lnTo>
+                  <a:pt x="1880093" y="1023150"/>
+                </a:lnTo>
+                <a:lnTo>
+                  <a:pt x="1919262" y="1044465"/>
+                </a:lnTo>
+                <a:lnTo>
+                  <a:pt x="1958431" y="1065781"/>
+                </a:lnTo>
+                <a:lnTo>
+                  <a:pt x="1997599" y="1087097"/>
+                </a:lnTo>
+                <a:lnTo>
+                  <a:pt x="2036768" y="1108412"/>
+                </a:lnTo>
+                <a:lnTo>
+                  <a:pt x="2075936" y="1129728"/>
+                </a:lnTo>
+                <a:lnTo>
+                  <a:pt x="2115105" y="1151044"/>
+                </a:lnTo>
+                <a:lnTo>
+                  <a:pt x="2154274" y="1172359"/>
+                </a:lnTo>
+                <a:lnTo>
+                  <a:pt x="2193442" y="1193675"/>
+                </a:lnTo>
+                <a:lnTo>
+                  <a:pt x="2232611" y="1214990"/>
+                </a:lnTo>
+                <a:lnTo>
+                  <a:pt x="2271779" y="1236306"/>
+                </a:lnTo>
+                <a:lnTo>
+                  <a:pt x="2310948" y="1257622"/>
+                </a:lnTo>
+                <a:lnTo>
+                  <a:pt x="2350117" y="1278937"/>
+                </a:lnTo>
+                <a:lnTo>
+                  <a:pt x="2389285" y="1300253"/>
+                </a:lnTo>
+                <a:lnTo>
+                  <a:pt x="2428454" y="1321568"/>
+                </a:lnTo>
+                <a:lnTo>
+                  <a:pt x="2467623" y="1342884"/>
+                </a:lnTo>
+                <a:lnTo>
+                  <a:pt x="2506791" y="1364200"/>
+                </a:lnTo>
+                <a:lnTo>
+                  <a:pt x="2545960" y="1385515"/>
+                </a:lnTo>
+                <a:lnTo>
+                  <a:pt x="2585128" y="1406831"/>
+                </a:lnTo>
+                <a:lnTo>
+                  <a:pt x="2624297" y="1428147"/>
+                </a:lnTo>
+                <a:lnTo>
+                  <a:pt x="2663466" y="1449462"/>
+                </a:lnTo>
+                <a:lnTo>
+                  <a:pt x="2702634" y="1470778"/>
+                </a:lnTo>
+                <a:lnTo>
+                  <a:pt x="2741803" y="1492093"/>
+                </a:lnTo>
+                <a:lnTo>
+                  <a:pt x="2780971" y="1513409"/>
+                </a:lnTo>
+                <a:lnTo>
+                  <a:pt x="2820140" y="1534725"/>
+                </a:lnTo>
+                <a:lnTo>
+                  <a:pt x="2859309" y="1556040"/>
+                </a:lnTo>
+                <a:lnTo>
+                  <a:pt x="2898477" y="1577356"/>
+                </a:lnTo>
+                <a:lnTo>
+                  <a:pt x="2937646" y="1598671"/>
+                </a:lnTo>
+                <a:lnTo>
+                  <a:pt x="2976815" y="1619987"/>
+                </a:lnTo>
+                <a:lnTo>
+                  <a:pt x="3015983" y="1641303"/>
+                </a:lnTo>
+                <a:lnTo>
+                  <a:pt x="3055152" y="1662618"/>
+                </a:lnTo>
+                <a:lnTo>
+                  <a:pt x="3094320" y="1683934"/>
+                </a:lnTo>
+                <a:lnTo>
+                  <a:pt x="3133489" y="1705249"/>
+                </a:lnTo>
+                <a:lnTo>
+                  <a:pt x="3172658" y="1726565"/>
+                </a:lnTo>
+                <a:lnTo>
+                  <a:pt x="3211826" y="1747881"/>
+                </a:lnTo>
+                <a:lnTo>
+                  <a:pt x="3250995" y="1769196"/>
+                </a:lnTo>
+                <a:lnTo>
+                  <a:pt x="3290163" y="1790512"/>
+                </a:lnTo>
+                <a:lnTo>
+                  <a:pt x="3329332" y="1811828"/>
+                </a:lnTo>
+                <a:lnTo>
+                  <a:pt x="3368501" y="1833143"/>
+                </a:lnTo>
+                <a:lnTo>
+                  <a:pt x="3407669" y="1854459"/>
+                </a:lnTo>
+                <a:lnTo>
+                  <a:pt x="3446838" y="1875774"/>
+                </a:lnTo>
+                <a:lnTo>
+                  <a:pt x="3486007" y="1897090"/>
+                </a:lnTo>
+                <a:lnTo>
+                  <a:pt x="3525175" y="1918406"/>
+                </a:lnTo>
+                <a:lnTo>
+                  <a:pt x="3564344" y="1939721"/>
+                </a:lnTo>
+                <a:lnTo>
+                  <a:pt x="3603512" y="1961037"/>
+                </a:lnTo>
+                <a:lnTo>
+                  <a:pt x="3642681" y="1982352"/>
+                </a:lnTo>
+                <a:lnTo>
+                  <a:pt x="3681850" y="2003668"/>
+                </a:lnTo>
+                <a:lnTo>
+                  <a:pt x="3721018" y="2024984"/>
+                </a:lnTo>
+                <a:lnTo>
+                  <a:pt x="3760187" y="2046299"/>
+                </a:lnTo>
+                <a:lnTo>
+                  <a:pt x="3799355" y="2067615"/>
+                </a:lnTo>
+                <a:lnTo>
+                  <a:pt x="3838524" y="2088930"/>
+                </a:lnTo>
+                <a:lnTo>
+                  <a:pt x="3877693" y="2110246"/>
+                </a:lnTo>
+                <a:lnTo>
+                  <a:pt x="3916861" y="2131562"/>
+                </a:lnTo>
+                <a:lnTo>
+                  <a:pt x="3956030" y="2152877"/>
+                </a:lnTo>
+                <a:lnTo>
+                  <a:pt x="3995199" y="2174193"/>
+                </a:lnTo>
+                <a:lnTo>
+                  <a:pt x="4034367" y="2195509"/>
+                </a:lnTo>
+                <a:lnTo>
+                  <a:pt x="4073536" y="2216824"/>
+                </a:lnTo>
+                <a:lnTo>
+                  <a:pt x="4112704" y="2238140"/>
+                </a:lnTo>
+                <a:lnTo>
+                  <a:pt x="4151873" y="2259455"/>
+                </a:lnTo>
+                <a:lnTo>
+                  <a:pt x="4191042" y="2280771"/>
+                </a:lnTo>
+                <a:lnTo>
+                  <a:pt x="4230210" y="2302087"/>
+                </a:lnTo>
+                <a:lnTo>
+                  <a:pt x="4269379" y="2323402"/>
+                </a:lnTo>
+                <a:lnTo>
+                  <a:pt x="4308547" y="2344718"/>
+                </a:lnTo>
+                <a:lnTo>
+                  <a:pt x="4347716" y="2366033"/>
+                </a:lnTo>
+                <a:lnTo>
+                  <a:pt x="4386885" y="2387349"/>
+                </a:lnTo>
+                <a:lnTo>
+                  <a:pt x="4426053" y="2408665"/>
+                </a:lnTo>
+                <a:lnTo>
+                  <a:pt x="4465222" y="2429980"/>
+                </a:lnTo>
+                <a:lnTo>
+                  <a:pt x="4504391" y="2451296"/>
+                </a:lnTo>
+                <a:lnTo>
+                  <a:pt x="4543559" y="2472611"/>
+                </a:lnTo>
+                <a:lnTo>
+                  <a:pt x="4582728" y="2493927"/>
+                </a:lnTo>
+                <a:lnTo>
+                  <a:pt x="4621896" y="2515243"/>
+                </a:lnTo>
+                <a:lnTo>
+                  <a:pt x="4661065" y="2536558"/>
+                </a:lnTo>
+                <a:lnTo>
+                  <a:pt x="4700234" y="2557874"/>
+                </a:lnTo>
+                <a:lnTo>
+                  <a:pt x="4739402" y="2579190"/>
+                </a:lnTo>
+                <a:lnTo>
+                  <a:pt x="4758987" y="2589847"/>
+                </a:lnTo>
+              </a:path>
+            </a:pathLst>
+          </a:custGeom>
+          <a:noFill/>
+          <a:ln w="22860">
+            <a:solidFill>
+              <a:srgbClr val="F2B880"/>
+            </a:solidFill>
+            <a:prstDash val="dash"/>
+          </a:ln>
+          <a:effectLst/>
+        </p:spPr>
+        <p:txBody>
+          <a:bodyPr rtlCol="0" anchor="ctr"/>
+          <a:lstStyle/>
+          <a:p>
+            <a:pPr algn="ctr"/>
+          </a:p>
+        </p:txBody>
+      </p:sp>
+      <p:sp>
+        <p:nvSpPr>
+          <p:cNvPr id="37" name="C1-E15 ellipse 35" descr="sci-ppt:o035"/>
+          <p:cNvSpPr/>
+          <p:nvPr/>
+        </p:nvSpPr>
+        <p:spPr>
+          <a:xfrm>
+            <a:off x="5747939" y="3379785"/>
+            <a:ext cx="146304" cy="146304"/>
           </a:xfrm>
           <a:prstGeom prst="ellipse">
+            <a:avLst/>
+          </a:prstGeom>
+          <a:solidFill>
+            <a:srgbClr val="F2B880"/>
+          </a:solidFill>
+          <a:ln w="12700">
+            <a:solidFill>
+              <a:srgbClr val="F2B880"/>
+            </a:solidFill>
+          </a:ln>
+          <a:effectLst/>
+        </p:spPr>
+        <p:txBody>
+          <a:bodyPr rtlCol="0" anchor="ctr"/>
+          <a:lstStyle/>
+          <a:p>
+            <a:pPr algn="ctr"/>
+          </a:p>
+        </p:txBody>
+      </p:sp>
+      <p:sp>
+        <p:nvSpPr>
+          <p:cNvPr id="38" name="C1-E15 text 36" descr="sci-ppt:o036"/>
+          <p:cNvSpPr txBox="1"/>
+          <p:nvPr/>
+        </p:nvSpPr>
+        <p:spPr>
+          <a:xfrm>
+            <a:off x="3489371" y="3452999"/>
+            <a:ext cx="2194560" cy="231648"/>
+          </a:xfrm>
+          <a:prstGeom prst="rect">
+            <a:avLst/>
+          </a:prstGeom>
+          <a:noFill/>
+          <a:effectLst/>
+        </p:spPr>
+        <p:txBody>
+          <a:bodyPr wrap="none" lIns="18288" rIns="18288" tIns="18288" bIns="18288" anchor="t">
+            <a:spAutoFit/>
+          </a:bodyPr>
+          <a:lstStyle/>
+          <a:p>
+            <a:pPr algn="l">
+              <a:spcAft>
+                <a:spcPts val="0"/>
+              </a:spcAft>
+            </a:pPr>
+            <a:r>
+              <a:rPr sz="1200" b="0" i="0">
+                <a:solidFill>
+                  <a:srgbClr val="F2B880"/>
+                </a:solidFill>
+                <a:latin typeface="Arial"/>
+              </a:rPr>
+              <a:t>21.6 m/s at R = Rₘₐₓ/2</a:t>
+            </a:r>
+          </a:p>
+        </p:txBody>
+      </p:sp>
+      <p:sp>
+        <p:nvSpPr>
+          <p:cNvPr id="39" name="C1-E15 ellipse 37" descr="sci-ppt:o037"/>
+          <p:cNvSpPr/>
+          <p:nvPr/>
+        </p:nvSpPr>
+        <p:spPr>
+          <a:xfrm>
+            <a:off x="3340313" y="2033588"/>
+            <a:ext cx="146304" cy="146304"/>
+          </a:xfrm>
+          <a:prstGeom prst="ellipse">
+            <a:avLst/>
+          </a:prstGeom>
+          <a:solidFill>
+            <a:srgbClr val="F28BA0"/>
+          </a:solidFill>
+          <a:ln w="12700">
+            <a:solidFill>
+              <a:srgbClr val="F28BA0"/>
+            </a:solidFill>
+          </a:ln>
+          <a:effectLst/>
+        </p:spPr>
+        <p:txBody>
+          <a:bodyPr rtlCol="0" anchor="ctr"/>
+          <a:lstStyle/>
+          <a:p>
+            <a:pPr algn="ctr"/>
+          </a:p>
+        </p:txBody>
+      </p:sp>
+      <p:sp>
+        <p:nvSpPr>
+          <p:cNvPr id="40" name="C1-E15 text 38" descr="sci-ppt:o038"/>
+          <p:cNvSpPr txBox="1"/>
+          <p:nvPr/>
+        </p:nvSpPr>
+        <p:spPr>
+          <a:xfrm>
+            <a:off x="3550625" y="2015447"/>
+            <a:ext cx="2377440" cy="231648"/>
+          </a:xfrm>
+          <a:prstGeom prst="rect">
+            <a:avLst/>
+          </a:prstGeom>
+          <a:noFill/>
+          <a:effectLst/>
+        </p:spPr>
+        <p:txBody>
+          <a:bodyPr wrap="none" lIns="18288" rIns="18288" tIns="18288" bIns="18288" anchor="t">
+            <a:spAutoFit/>
+          </a:bodyPr>
+          <a:lstStyle/>
+          <a:p>
+            <a:pPr algn="l">
+              <a:spcAft>
+                <a:spcPts val="0"/>
+              </a:spcAft>
+            </a:pPr>
+            <a:r>
+              <a:rPr sz="1200" b="0" i="0">
+                <a:solidFill>
+                  <a:srgbClr val="F28BA0"/>
+                </a:solidFill>
+                <a:latin typeface="Arial"/>
+              </a:rPr>
+              <a:t>258 m/s at R = Rₘₐₓ/10</a:t>
+            </a:r>
+          </a:p>
+        </p:txBody>
+      </p:sp>
+      <p:sp>
+        <p:nvSpPr>
+          <p:cNvPr id="41" name="C1-E15 text 39" descr="sci-ppt:o039"/>
+          <p:cNvSpPr txBox="1"/>
+          <p:nvPr/>
+        </p:nvSpPr>
+        <p:spPr>
+          <a:xfrm>
+            <a:off x="1221570" y="3779520"/>
+            <a:ext cx="3108960" cy="223900"/>
+          </a:xfrm>
+          <a:prstGeom prst="rect">
+            <a:avLst/>
+          </a:prstGeom>
+          <a:noFill/>
+          <a:effectLst/>
+        </p:spPr>
+        <p:txBody>
+          <a:bodyPr wrap="none" lIns="18288" rIns="18288" tIns="18288" bIns="18288" anchor="t">
+            <a:spAutoFit/>
+          </a:bodyPr>
+          <a:lstStyle/>
+          <a:p>
+            <a:pPr algn="l">
+              <a:spcAft>
+                <a:spcPts val="0"/>
+              </a:spcAft>
+            </a:pPr>
+            <a:r>
+              <a:rPr sz="1150" b="0" i="0">
+                <a:solidFill>
+                  <a:srgbClr val="F2B880"/>
+                </a:solidFill>
+                <a:latin typeface="Arial"/>
+              </a:rPr>
+              <a:t>dashed: ∝ R^(−3/2) as R → 0</a:t>
+            </a:r>
+          </a:p>
+        </p:txBody>
+      </p:sp>
+      <p:sp>
+        <p:nvSpPr>
+          <p:cNvPr id="42" name="C1-E15 round_rect 40" descr="sci-ppt:o040"/>
+          <p:cNvSpPr/>
+          <p:nvPr/>
+        </p:nvSpPr>
+        <p:spPr>
+          <a:xfrm>
+            <a:off x="7223760" y="1371600"/>
+            <a:ext cx="4617720" cy="3749039"/>
+          </a:xfrm>
+          <a:prstGeom prst="roundRect">
             <a:avLst/>
           </a:prstGeom>
           <a:solidFill>
             <a:srgbClr val="213E4B"/>
           </a:solidFill>
-          <a:ln w="21590">
+          <a:ln w="20320">
             <a:solidFill>
-              <a:srgbClr val="B4C7D2"/>
+              <a:srgbClr val="8EDBD4"/>
             </a:solidFill>
           </a:ln>
           <a:effectLst/>
@@ -3168,40 +5066,16 @@
           </a:p>
         </p:txBody>
       </p:sp>
-      <p:cxnSp>
-        <p:nvCxnSpPr>
-          <p:cNvPr id="4" name="arrow3" descr="sci-ppt:C1-E15-003"/>
-          <p:cNvCxnSpPr/>
-          <p:nvPr/>
-        </p:nvCxnSpPr>
-        <p:spPr>
-          <a:xfrm>
-            <a:off x="3291840" y="2621280"/>
-            <a:ext cx="1219200" cy="0"/>
-          </a:xfrm>
-          <a:prstGeom prst="line">
-            <a:avLst/>
-          </a:prstGeom>
-          <a:ln w="25400">
-            <a:solidFill>
-              <a:srgbClr val="8EDBD4"/>
-            </a:solidFill>
-            <a:headEnd type="none" w="med" len="med"/>
-            <a:tailEnd type="triangle" w="med" len="med"/>
-          </a:ln>
-          <a:effectLst/>
-        </p:spPr>
-      </p:cxnSp>
-      <p:sp>
-        <p:nvSpPr>
-          <p:cNvPr id="5" name="text4" descr="sci-ppt:C1-E15-004"/>
+      <p:sp>
+        <p:nvSpPr>
+          <p:cNvPr id="43" name="C1-E15 text 41" descr="sci-ppt:o041"/>
           <p:cNvSpPr txBox="1"/>
           <p:nvPr/>
         </p:nvSpPr>
         <p:spPr>
           <a:xfrm>
-            <a:off x="3474720" y="2133600"/>
-            <a:ext cx="1584960" cy="396849"/>
+            <a:off x="7333488" y="1426464"/>
+            <a:ext cx="4398264" cy="254889"/>
           </a:xfrm>
           <a:prstGeom prst="rect">
             <a:avLst/>
@@ -3210,7 +5084,7 @@
           <a:effectLst/>
         </p:spPr>
         <p:txBody>
-          <a:bodyPr wrap="none" lIns="27432" rIns="27432" tIns="18288" bIns="18288" anchor="ctr">
+          <a:bodyPr wrap="none" lIns="18288" rIns="18288" tIns="18288" bIns="18288" anchor="t">
             <a:spAutoFit/>
           </a:bodyPr>
           <a:lstStyle/>
@@ -3221,27 +5095,67 @@
               </a:spcAft>
             </a:pPr>
             <a:r>
-              <a:rPr sz="2016" b="0" i="0">
+              <a:rPr sz="1350" b="1" i="0">
+                <a:solidFill>
+                  <a:srgbClr val="8EDBD4"/>
+                </a:solidFill>
+                <a:latin typeface="Arial"/>
+              </a:rPr>
+              <a:t>Reading the solution</a:t>
+            </a:r>
+          </a:p>
+        </p:txBody>
+      </p:sp>
+      <p:sp>
+        <p:nvSpPr>
+          <p:cNvPr id="44" name="C1-E15 text 42" descr="sci-ppt:o042"/>
+          <p:cNvSpPr txBox="1"/>
+          <p:nvPr/>
+        </p:nvSpPr>
+        <p:spPr>
+          <a:xfrm>
+            <a:off x="7360920" y="1828800"/>
+            <a:ext cx="4389120" cy="247142"/>
+          </a:xfrm>
+          <a:prstGeom prst="rect">
+            <a:avLst/>
+          </a:prstGeom>
+          <a:noFill/>
+          <a:effectLst/>
+        </p:spPr>
+        <p:txBody>
+          <a:bodyPr wrap="none" lIns="18288" rIns="18288" tIns="18288" bIns="18288" anchor="t">
+            <a:spAutoFit/>
+          </a:bodyPr>
+          <a:lstStyle/>
+          <a:p>
+            <a:pPr algn="l">
+              <a:spcAft>
+                <a:spcPts val="0"/>
+              </a:spcAft>
+            </a:pPr>
+            <a:r>
+              <a:rPr sz="1300" b="1" i="0">
                 <a:solidFill>
                   <a:srgbClr val="E7F0F3"/>
                 </a:solidFill>
                 <a:latin typeface="Arial"/>
               </a:rPr>
-              <a:t>R(t)</a:t>
-            </a:r>
-          </a:p>
-        </p:txBody>
-      </p:sp>
-      <p:sp>
-        <p:nvSpPr>
-          <p:cNvPr id="6" name="text5" descr="sci-ppt:C1-E15-005"/>
+              <a:t>Ṙ = −√{ (2Δp_c/3ρ) [ (Rₘₐₓ/R)³ − 1 ] }</a:t>
+            </a:r>
+          </a:p>
+        </p:txBody>
+      </p:sp>
+      <p:sp>
+        <p:nvSpPr>
+          <p:cNvPr id="45" name="C1-E15 text 43" descr="sci-ppt:o043"/>
           <p:cNvSpPr txBox="1"/>
           <p:nvPr/>
         </p:nvSpPr>
         <p:spPr>
           <a:xfrm>
-            <a:off x="2682240" y="2804160"/>
-            <a:ext cx="2194560" cy="377952"/>
+            <a:off x="7562088" y="2514600"/>
+            <a:ext cx="4187952" cy="433070"/>
           </a:xfrm>
           <a:prstGeom prst="rect">
             <a:avLst/>
@@ -3250,7 +5164,7 @@
           <a:effectLst/>
         </p:spPr>
         <p:txBody>
-          <a:bodyPr wrap="none" lIns="27432" rIns="27432" tIns="18288" bIns="18288" anchor="ctr">
+          <a:bodyPr wrap="none" lIns="18288" rIns="18288" tIns="18288" bIns="18288" anchor="t">
             <a:spAutoFit/>
           </a:bodyPr>
           <a:lstStyle/>
@@ -3261,27 +5175,75 @@
               </a:spcAft>
             </a:pPr>
             <a:r>
-              <a:rPr sz="1920" b="0" i="0">
+              <a:rPr sz="1250" b="0" i="0">
                 <a:solidFill>
                   <a:srgbClr val="E7F0F3"/>
                 </a:solidFill>
                 <a:latin typeface="Arial"/>
               </a:rPr>
-              <a:t>p_b</a:t>
-            </a:r>
-          </a:p>
-        </p:txBody>
-      </p:sp>
-      <p:sp>
-        <p:nvSpPr>
-          <p:cNvPr id="7" name="text6" descr="sci-ppt:C1-E15-006"/>
+              <a:t>The start R = Rₘₐₓ at rest fixes the constant: Ṙ</a:t>
+            </a:r>
+          </a:p>
+          <a:p>
+            <a:pPr algn="l">
+              <a:spcAft>
+                <a:spcPts val="0"/>
+              </a:spcAft>
+            </a:pPr>
+            <a:r>
+              <a:rPr sz="1250" b="0" i="0">
+                <a:solidFill>
+                  <a:srgbClr val="E7F0F3"/>
+                </a:solidFill>
+                <a:latin typeface="Arial"/>
+              </a:rPr>
+              <a:t>= 0 there.</a:t>
+            </a:r>
+          </a:p>
+        </p:txBody>
+      </p:sp>
+      <p:sp>
+        <p:nvSpPr>
+          <p:cNvPr id="46" name="C1-E15 ellipse 44" descr="sci-ppt:o044"/>
+          <p:cNvSpPr/>
+          <p:nvPr/>
+        </p:nvSpPr>
+        <p:spPr>
+          <a:xfrm>
+            <a:off x="7392924" y="2571877"/>
+            <a:ext cx="82296" cy="82296"/>
+          </a:xfrm>
+          <a:prstGeom prst="ellipse">
+            <a:avLst/>
+          </a:prstGeom>
+          <a:solidFill>
+            <a:srgbClr val="8EDBD4"/>
+          </a:solidFill>
+          <a:ln w="12700">
+            <a:solidFill>
+              <a:srgbClr val="8EDBD4"/>
+            </a:solidFill>
+          </a:ln>
+          <a:effectLst/>
+        </p:spPr>
+        <p:txBody>
+          <a:bodyPr rtlCol="0" anchor="ctr"/>
+          <a:lstStyle/>
+          <a:p>
+            <a:pPr algn="ctr"/>
+          </a:p>
+        </p:txBody>
+      </p:sp>
+      <p:sp>
+        <p:nvSpPr>
+          <p:cNvPr id="47" name="C1-E15 text 45" descr="sci-ppt:o045"/>
           <p:cNvSpPr txBox="1"/>
           <p:nvPr/>
         </p:nvSpPr>
         <p:spPr>
           <a:xfrm>
-            <a:off x="5242560" y="1524000"/>
-            <a:ext cx="4876800" cy="415747"/>
+            <a:off x="7562088" y="2993389"/>
+            <a:ext cx="4187952" cy="433070"/>
           </a:xfrm>
           <a:prstGeom prst="rect">
             <a:avLst/>
@@ -3290,7 +5252,7 @@
           <a:effectLst/>
         </p:spPr>
         <p:txBody>
-          <a:bodyPr wrap="none" lIns="27432" rIns="27432" tIns="18288" bIns="18288" anchor="ctr">
+          <a:bodyPr wrap="none" lIns="18288" rIns="18288" tIns="18288" bIns="18288" anchor="t">
             <a:spAutoFit/>
           </a:bodyPr>
           <a:lstStyle/>
@@ -3301,27 +5263,75 @@
               </a:spcAft>
             </a:pPr>
             <a:r>
-              <a:rPr sz="2111" b="0" i="0">
+              <a:rPr sz="1250" b="0" i="0">
                 <a:solidFill>
                   <a:srgbClr val="E7F0F3"/>
                 </a:solidFill>
                 <a:latin typeface="Arial"/>
               </a:rPr>
-              <a:t>Surrounding liquid</a:t>
-            </a:r>
-          </a:p>
-        </p:txBody>
-      </p:sp>
-      <p:sp>
-        <p:nvSpPr>
-          <p:cNvPr id="8" name="text7" descr="sci-ppt:C1-E15-007"/>
+              <a:t>The minus sign selects the inward branch</a:t>
+            </a:r>
+          </a:p>
+          <a:p>
+            <a:pPr algn="l">
+              <a:spcAft>
+                <a:spcPts val="0"/>
+              </a:spcAft>
+            </a:pPr>
+            <a:r>
+              <a:rPr sz="1250" b="0" i="0">
+                <a:solidFill>
+                  <a:srgbClr val="E7F0F3"/>
+                </a:solidFill>
+                <a:latin typeface="Arial"/>
+              </a:rPr>
+              <a:t>(collapse).</a:t>
+            </a:r>
+          </a:p>
+        </p:txBody>
+      </p:sp>
+      <p:sp>
+        <p:nvSpPr>
+          <p:cNvPr id="48" name="C1-E15 ellipse 46" descr="sci-ppt:o046"/>
+          <p:cNvSpPr/>
+          <p:nvPr/>
+        </p:nvSpPr>
+        <p:spPr>
+          <a:xfrm>
+            <a:off x="7392924" y="3050666"/>
+            <a:ext cx="82296" cy="82296"/>
+          </a:xfrm>
+          <a:prstGeom prst="ellipse">
+            <a:avLst/>
+          </a:prstGeom>
+          <a:solidFill>
+            <a:srgbClr val="8EDBD4"/>
+          </a:solidFill>
+          <a:ln w="12700">
+            <a:solidFill>
+              <a:srgbClr val="8EDBD4"/>
+            </a:solidFill>
+          </a:ln>
+          <a:effectLst/>
+        </p:spPr>
+        <p:txBody>
+          <a:bodyPr rtlCol="0" anchor="ctr"/>
+          <a:lstStyle/>
+          <a:p>
+            <a:pPr algn="ctr"/>
+          </a:p>
+        </p:txBody>
+      </p:sp>
+      <p:sp>
+        <p:nvSpPr>
+          <p:cNvPr id="49" name="C1-E15 text 47" descr="sci-ppt:o047"/>
           <p:cNvSpPr txBox="1"/>
           <p:nvPr/>
         </p:nvSpPr>
         <p:spPr>
           <a:xfrm>
-            <a:off x="5242560" y="1987296"/>
-            <a:ext cx="5852160" cy="359054"/>
+            <a:off x="7562088" y="3472179"/>
+            <a:ext cx="4187952" cy="433070"/>
           </a:xfrm>
           <a:prstGeom prst="rect">
             <a:avLst/>
@@ -3330,7 +5340,7 @@
           <a:effectLst/>
         </p:spPr>
         <p:txBody>
-          <a:bodyPr wrap="none" lIns="27432" rIns="27432" tIns="18288" bIns="18288" anchor="ctr">
+          <a:bodyPr wrap="none" lIns="18288" rIns="18288" tIns="18288" bIns="18288" anchor="t">
             <a:spAutoFit/>
           </a:bodyPr>
           <a:lstStyle/>
@@ -3341,51 +5351,75 @@
               </a:spcAft>
             </a:pPr>
             <a:r>
-              <a:rPr sz="1823" b="0" i="0">
+              <a:rPr sz="1250" b="0" i="0">
                 <a:solidFill>
                   <a:srgbClr val="E7F0F3"/>
                 </a:solidFill>
                 <a:latin typeface="Arial"/>
               </a:rPr>
-              <a:t>p∞, ρ, μ; interface: σ</a:t>
-            </a:r>
-          </a:p>
-        </p:txBody>
-      </p:sp>
-      <p:cxnSp>
-        <p:nvCxnSpPr>
-          <p:cNvPr id="9" name="arrow8" descr="sci-ppt:C1-E15-008"/>
-          <p:cNvCxnSpPr/>
+              <a:t>As R → 0, |Ṙ| grows without bound: this is the</a:t>
+            </a:r>
+          </a:p>
+          <a:p>
+            <a:pPr algn="l">
+              <a:spcAft>
+                <a:spcPts val="0"/>
+              </a:spcAft>
+            </a:pPr>
+            <a:r>
+              <a:rPr sz="1250" b="0" i="0">
+                <a:solidFill>
+                  <a:srgbClr val="E7F0F3"/>
+                </a:solidFill>
+                <a:latin typeface="Arial"/>
+              </a:rPr>
+              <a:t>model's singularity, not a physical speed limit.</a:t>
+            </a:r>
+          </a:p>
+        </p:txBody>
+      </p:sp>
+      <p:sp>
+        <p:nvSpPr>
+          <p:cNvPr id="50" name="C1-E15 ellipse 48" descr="sci-ppt:o048"/>
+          <p:cNvSpPr/>
           <p:nvPr/>
-        </p:nvCxnSpPr>
-        <p:spPr>
-          <a:xfrm>
-            <a:off x="3291840" y="2621280"/>
-            <a:ext cx="1706880" cy="1158240"/>
-          </a:xfrm>
-          <a:prstGeom prst="line">
+        </p:nvSpPr>
+        <p:spPr>
+          <a:xfrm>
+            <a:off x="7392924" y="3529456"/>
+            <a:ext cx="82296" cy="82296"/>
+          </a:xfrm>
+          <a:prstGeom prst="ellipse">
             <a:avLst/>
           </a:prstGeom>
-          <a:ln w="25400">
+          <a:solidFill>
+            <a:srgbClr val="8EDBD4"/>
+          </a:solidFill>
+          <a:ln w="12700">
             <a:solidFill>
               <a:srgbClr val="8EDBD4"/>
             </a:solidFill>
-            <a:headEnd type="none" w="med" len="med"/>
-            <a:tailEnd type="triangle" w="med" len="med"/>
           </a:ln>
           <a:effectLst/>
         </p:spPr>
-      </p:cxnSp>
-      <p:sp>
-        <p:nvSpPr>
-          <p:cNvPr id="10" name="text9" descr="sci-ppt:C1-E15-009"/>
+        <p:txBody>
+          <a:bodyPr rtlCol="0" anchor="ctr"/>
+          <a:lstStyle/>
+          <a:p>
+            <a:pPr algn="ctr"/>
+          </a:p>
+        </p:txBody>
+      </p:sp>
+      <p:sp>
+        <p:nvSpPr>
+          <p:cNvPr id="51" name="C1-E15 text 49" descr="sci-ppt:o049"/>
           <p:cNvSpPr txBox="1"/>
           <p:nvPr/>
         </p:nvSpPr>
         <p:spPr>
           <a:xfrm>
-            <a:off x="5364480" y="3657600"/>
-            <a:ext cx="1950720" cy="340156"/>
+            <a:off x="7562088" y="3950969"/>
+            <a:ext cx="4187952" cy="433070"/>
           </a:xfrm>
           <a:prstGeom prst="rect">
             <a:avLst/>
@@ -3394,7 +5428,7 @@
           <a:effectLst/>
         </p:spPr>
         <p:txBody>
-          <a:bodyPr wrap="none" lIns="27432" rIns="27432" tIns="18288" bIns="18288" anchor="ctr">
+          <a:bodyPr wrap="none" lIns="18288" rIns="18288" tIns="18288" bIns="18288" anchor="t">
             <a:spAutoFit/>
           </a:bodyPr>
           <a:lstStyle/>
@@ -3405,51 +5439,75 @@
               </a:spcAft>
             </a:pPr>
             <a:r>
-              <a:rPr sz="1728" b="0" i="0">
+              <a:rPr sz="1250" b="0" i="0">
                 <a:solidFill>
                   <a:srgbClr val="E7F0F3"/>
                 </a:solidFill>
                 <a:latin typeface="Arial"/>
               </a:rPr>
-              <a:t>r ≥ R</a:t>
-            </a:r>
-          </a:p>
-        </p:txBody>
-      </p:sp>
-      <p:cxnSp>
-        <p:nvCxnSpPr>
-          <p:cNvPr id="11" name="arrow10" descr="sci-ppt:C1-E15-010"/>
-          <p:cNvCxnSpPr/>
+              <a:t>Real collapse is stopped by gas, viscosity,</a:t>
+            </a:r>
+          </a:p>
+          <a:p>
+            <a:pPr algn="l">
+              <a:spcAft>
+                <a:spcPts val="0"/>
+              </a:spcAft>
+            </a:pPr>
+            <a:r>
+              <a:rPr sz="1250" b="0" i="0">
+                <a:solidFill>
+                  <a:srgbClr val="E7F0F3"/>
+                </a:solidFill>
+                <a:latin typeface="Arial"/>
+              </a:rPr>
+              <a:t>tension and compressibility long before.</a:t>
+            </a:r>
+          </a:p>
+        </p:txBody>
+      </p:sp>
+      <p:sp>
+        <p:nvSpPr>
+          <p:cNvPr id="52" name="C1-E15 ellipse 50" descr="sci-ppt:o050"/>
+          <p:cNvSpPr/>
           <p:nvPr/>
-        </p:nvCxnSpPr>
-        <p:spPr>
-          <a:xfrm>
-            <a:off x="4998720" y="2621280"/>
-            <a:ext cx="792480" cy="0"/>
-          </a:xfrm>
-          <a:prstGeom prst="line">
+        </p:nvSpPr>
+        <p:spPr>
+          <a:xfrm>
+            <a:off x="7392924" y="4008247"/>
+            <a:ext cx="82296" cy="82296"/>
+          </a:xfrm>
+          <a:prstGeom prst="ellipse">
             <a:avLst/>
           </a:prstGeom>
-          <a:ln w="25400">
+          <a:solidFill>
+            <a:srgbClr val="8EDBD4"/>
+          </a:solidFill>
+          <a:ln w="12700">
             <a:solidFill>
               <a:srgbClr val="8EDBD4"/>
             </a:solidFill>
-            <a:headEnd type="none" w="med" len="med"/>
-            <a:tailEnd type="triangle" w="med" len="med"/>
           </a:ln>
           <a:effectLst/>
         </p:spPr>
-      </p:cxnSp>
-      <p:sp>
-        <p:nvSpPr>
-          <p:cNvPr id="12" name="text11" descr="sci-ppt:C1-E15-011"/>
+        <p:txBody>
+          <a:bodyPr rtlCol="0" anchor="ctr"/>
+          <a:lstStyle/>
+          <a:p>
+            <a:pPr algn="ctr"/>
+          </a:p>
+        </p:txBody>
+      </p:sp>
+      <p:sp>
+        <p:nvSpPr>
+          <p:cNvPr id="53" name="C1-E15 text 51" descr="sci-ppt:o051"/>
           <p:cNvSpPr txBox="1"/>
           <p:nvPr/>
         </p:nvSpPr>
         <p:spPr>
           <a:xfrm>
-            <a:off x="5059680" y="2865120"/>
-            <a:ext cx="3291840" cy="321259"/>
+            <a:off x="1005840" y="5733288"/>
+            <a:ext cx="10972800" cy="239395"/>
           </a:xfrm>
           <a:prstGeom prst="rect">
             <a:avLst/>
@@ -3458,7 +5516,7 @@
           <a:effectLst/>
         </p:spPr>
         <p:txBody>
-          <a:bodyPr wrap="none" lIns="27432" rIns="27432" tIns="18288" bIns="18288" anchor="ctr">
+          <a:bodyPr wrap="none" lIns="18288" rIns="18288" tIns="18288" bIns="18288" anchor="t">
             <a:spAutoFit/>
           </a:bodyPr>
           <a:lstStyle/>
@@ -3469,27 +5527,27 @@
               </a:spcAft>
             </a:pPr>
             <a:r>
-              <a:rPr sz="1632" b="0" i="0">
+              <a:rPr sz="1250" b="0" i="0">
                 <a:solidFill>
-                  <a:srgbClr val="E7F0F3"/>
+                  <a:srgbClr val="B4C7D2"/>
                 </a:solidFill>
                 <a:latin typeface="Arial"/>
               </a:rPr>
-              <a:t>+e_r (coordinate)</a:t>
-            </a:r>
-          </a:p>
-        </p:txBody>
-      </p:sp>
-      <p:sp>
-        <p:nvSpPr>
-          <p:cNvPr id="13" name="text12" descr="sci-ppt:C1-E15-012"/>
+              <a:t>Teaching inputs: Rₘₐₓ = 30 µm, ρ = 1000 kg/m³, Δp_c = 100 kPa.</a:t>
+            </a:r>
+          </a:p>
+        </p:txBody>
+      </p:sp>
+      <p:sp>
+        <p:nvSpPr>
+          <p:cNvPr id="54" name="C1-E15 text 52" descr="sci-ppt:o052"/>
           <p:cNvSpPr txBox="1"/>
           <p:nvPr/>
         </p:nvSpPr>
         <p:spPr>
           <a:xfrm>
-            <a:off x="1219200" y="4206240"/>
-            <a:ext cx="9753600" cy="340156"/>
+            <a:off x="320040" y="6510528"/>
+            <a:ext cx="11521440" cy="200660"/>
           </a:xfrm>
           <a:prstGeom prst="rect">
             <a:avLst/>
@@ -3498,7 +5556,7 @@
           <a:effectLst/>
         </p:spPr>
         <p:txBody>
-          <a:bodyPr wrap="none" lIns="27432" rIns="27432" tIns="18288" bIns="18288" anchor="ctr">
+          <a:bodyPr wrap="none" lIns="18288" rIns="18288" tIns="18288" bIns="18288" anchor="t">
             <a:spAutoFit/>
           </a:bodyPr>
           <a:lstStyle/>
@@ -3509,437 +5567,13 @@
               </a:spcAft>
             </a:pPr>
             <a:r>
-              <a:rPr sz="1728" b="0" i="0">
-                <a:solidFill>
-                  <a:srgbClr val="E7F0F3"/>
-                </a:solidFill>
-                <a:latin typeface="Arial"/>
-              </a:rPr>
-              <a:t>Signed wall speed: Ṙ; acceleration: R̈</a:t>
-            </a:r>
-          </a:p>
-        </p:txBody>
-      </p:sp>
-      <p:cxnSp>
-        <p:nvCxnSpPr>
-          <p:cNvPr id="14" name="arrow13" descr="sci-ppt:C1-E15-013"/>
-          <p:cNvCxnSpPr/>
-          <p:nvPr/>
-        </p:nvCxnSpPr>
-        <p:spPr>
-          <a:xfrm>
-            <a:off x="1950720" y="2621280"/>
-            <a:ext cx="548640" cy="0"/>
-          </a:xfrm>
-          <a:prstGeom prst="line">
-            <a:avLst/>
-          </a:prstGeom>
-          <a:ln w="25400">
-            <a:solidFill>
-              <a:srgbClr val="F6BC77"/>
-            </a:solidFill>
-            <a:headEnd type="none" w="med" len="med"/>
-            <a:tailEnd type="triangle" w="med" len="med"/>
-          </a:ln>
-          <a:effectLst/>
-        </p:spPr>
-      </p:cxnSp>
-      <p:sp>
-        <p:nvSpPr>
-          <p:cNvPr id="15" name="text14" descr="sci-ppt:C1-E15-014"/>
-          <p:cNvSpPr txBox="1"/>
-          <p:nvPr/>
-        </p:nvSpPr>
-        <p:spPr>
-          <a:xfrm>
-            <a:off x="1097280" y="975360"/>
-            <a:ext cx="4267200" cy="340156"/>
-          </a:xfrm>
-          <a:prstGeom prst="rect">
-            <a:avLst/>
-          </a:prstGeom>
-          <a:noFill/>
-          <a:effectLst/>
-        </p:spPr>
-        <p:txBody>
-          <a:bodyPr wrap="none" lIns="27432" rIns="27432" tIns="18288" bIns="18288" anchor="ctr">
-            <a:spAutoFit/>
-          </a:bodyPr>
-          <a:lstStyle/>
-          <a:p>
-            <a:pPr algn="l">
-              <a:spcAft>
-                <a:spcPts val="0"/>
-              </a:spcAft>
-            </a:pPr>
-            <a:r>
-              <a:rPr sz="1728" b="0" i="0">
-                <a:solidFill>
-                  <a:srgbClr val="F6BC77"/>
-                </a:solidFill>
-                <a:latin typeface="Arial"/>
-              </a:rPr>
-              <a:t>Collapse: Ṙ &lt; 0</a:t>
-            </a:r>
-          </a:p>
-        </p:txBody>
-      </p:sp>
-      <p:sp>
-        <p:nvSpPr>
-          <p:cNvPr id="16" name="text15" descr="sci-ppt:C1-E15-015"/>
-          <p:cNvSpPr txBox="1"/>
-          <p:nvPr/>
-        </p:nvSpPr>
-        <p:spPr>
-          <a:xfrm>
-            <a:off x="365760" y="4974336"/>
-            <a:ext cx="5547360" cy="321259"/>
-          </a:xfrm>
-          <a:prstGeom prst="rect">
-            <a:avLst/>
-          </a:prstGeom>
-          <a:noFill/>
-          <a:effectLst/>
-        </p:spPr>
-        <p:txBody>
-          <a:bodyPr wrap="none" lIns="27432" rIns="27432" tIns="18288" bIns="18288" anchor="ctr">
-            <a:spAutoFit/>
-          </a:bodyPr>
-          <a:lstStyle/>
-          <a:p>
-            <a:pPr algn="l">
-              <a:spcAft>
-                <a:spcPts val="0"/>
-              </a:spcAft>
-            </a:pPr>
-            <a:r>
-              <a:rPr sz="1632" b="0" i="0">
-                <a:solidFill>
-                  <a:srgbClr val="E7F0F3"/>
-                </a:solidFill>
-                <a:latin typeface="Arial"/>
-              </a:rPr>
-              <a:t>Rmax</a:t>
-            </a:r>
-          </a:p>
-        </p:txBody>
-      </p:sp>
-      <p:sp>
-        <p:nvSpPr>
-          <p:cNvPr id="17" name="text16" descr="sci-ppt:C1-E15-016"/>
-          <p:cNvSpPr txBox="1"/>
-          <p:nvPr/>
-        </p:nvSpPr>
-        <p:spPr>
-          <a:xfrm>
-            <a:off x="365760" y="5266944"/>
-            <a:ext cx="5547360" cy="321259"/>
-          </a:xfrm>
-          <a:prstGeom prst="rect">
-            <a:avLst/>
-          </a:prstGeom>
-          <a:noFill/>
-          <a:effectLst/>
-        </p:spPr>
-        <p:txBody>
-          <a:bodyPr wrap="none" lIns="27432" rIns="27432" tIns="18288" bIns="18288" anchor="ctr">
-            <a:spAutoFit/>
-          </a:bodyPr>
-          <a:lstStyle/>
-          <a:p>
-            <a:pPr algn="l">
-              <a:spcAft>
-                <a:spcPts val="0"/>
-              </a:spcAft>
-            </a:pPr>
-            <a:r>
-              <a:rPr sz="1632" b="0" i="0">
-                <a:solidFill>
-                  <a:srgbClr val="E7F0F3"/>
-                </a:solidFill>
-                <a:latin typeface="Arial"/>
-              </a:rPr>
-              <a:t>s: integration radius</a:t>
-            </a:r>
-          </a:p>
-        </p:txBody>
-      </p:sp>
-      <p:sp>
-        <p:nvSpPr>
-          <p:cNvPr id="18" name="text17" descr="sci-ppt:C1-E15-017"/>
-          <p:cNvSpPr txBox="1"/>
-          <p:nvPr/>
-        </p:nvSpPr>
-        <p:spPr>
-          <a:xfrm>
-            <a:off x="365760" y="5559552"/>
-            <a:ext cx="5547360" cy="321259"/>
-          </a:xfrm>
-          <a:prstGeom prst="rect">
-            <a:avLst/>
-          </a:prstGeom>
-          <a:noFill/>
-          <a:effectLst/>
-        </p:spPr>
-        <p:txBody>
-          <a:bodyPr wrap="none" lIns="27432" rIns="27432" tIns="18288" bIns="18288" anchor="ctr">
-            <a:spAutoFit/>
-          </a:bodyPr>
-          <a:lstStyle/>
-          <a:p>
-            <a:pPr algn="l">
-              <a:spcAft>
-                <a:spcPts val="0"/>
-              </a:spcAft>
-            </a:pPr>
-            <a:r>
-              <a:rPr sz="1632" b="0" i="0">
-                <a:solidFill>
-                  <a:srgbClr val="E7F0F3"/>
-                </a:solidFill>
-                <a:latin typeface="Arial"/>
-              </a:rPr>
-              <a:t>Ṙ &lt; 0</a:t>
-            </a:r>
-          </a:p>
-        </p:txBody>
-      </p:sp>
-      <p:sp>
-        <p:nvSpPr>
-          <p:cNvPr id="19" name="text18" descr="sci-ppt:C1-E15-018"/>
-          <p:cNvSpPr txBox="1"/>
-          <p:nvPr/>
-        </p:nvSpPr>
-        <p:spPr>
-          <a:xfrm>
-            <a:off x="365760" y="5852160"/>
-            <a:ext cx="5547360" cy="321259"/>
-          </a:xfrm>
-          <a:prstGeom prst="rect">
-            <a:avLst/>
-          </a:prstGeom>
-          <a:noFill/>
-          <a:effectLst/>
-        </p:spPr>
-        <p:txBody>
-          <a:bodyPr wrap="none" lIns="27432" rIns="27432" tIns="18288" bIns="18288" anchor="ctr">
-            <a:spAutoFit/>
-          </a:bodyPr>
-          <a:lstStyle/>
-          <a:p>
-            <a:pPr algn="l">
-              <a:spcAft>
-                <a:spcPts val="0"/>
-              </a:spcAft>
-            </a:pPr>
-            <a:r>
-              <a:rPr sz="1632" b="0" i="0">
-                <a:solidFill>
-                  <a:srgbClr val="E7F0F3"/>
-                </a:solidFill>
-                <a:latin typeface="Arial"/>
-              </a:rPr>
-              <a:t>ρ</a:t>
-            </a:r>
-          </a:p>
-        </p:txBody>
-      </p:sp>
-      <p:sp>
-        <p:nvSpPr>
-          <p:cNvPr id="20" name="text19" descr="sci-ppt:C1-E15-019"/>
-          <p:cNvSpPr txBox="1"/>
-          <p:nvPr/>
-        </p:nvSpPr>
-        <p:spPr>
-          <a:xfrm>
-            <a:off x="6156960" y="4974336"/>
-            <a:ext cx="5547360" cy="321259"/>
-          </a:xfrm>
-          <a:prstGeom prst="rect">
-            <a:avLst/>
-          </a:prstGeom>
-          <a:noFill/>
-          <a:effectLst/>
-        </p:spPr>
-        <p:txBody>
-          <a:bodyPr wrap="none" lIns="27432" rIns="27432" tIns="18288" bIns="18288" anchor="ctr">
-            <a:spAutoFit/>
-          </a:bodyPr>
-          <a:lstStyle/>
-          <a:p>
-            <a:pPr algn="l">
-              <a:spcAft>
-                <a:spcPts val="0"/>
-              </a:spcAft>
-            </a:pPr>
-            <a:r>
-              <a:rPr sz="1632" b="0" i="0">
-                <a:solidFill>
-                  <a:srgbClr val="E7F0F3"/>
-                </a:solidFill>
-                <a:latin typeface="Arial"/>
-              </a:rPr>
-              <a:t>R</a:t>
-            </a:r>
-          </a:p>
-        </p:txBody>
-      </p:sp>
-      <p:sp>
-        <p:nvSpPr>
-          <p:cNvPr id="21" name="text20" descr="sci-ppt:C1-E15-020"/>
-          <p:cNvSpPr txBox="1"/>
-          <p:nvPr/>
-        </p:nvSpPr>
-        <p:spPr>
-          <a:xfrm>
-            <a:off x="6156960" y="5266944"/>
-            <a:ext cx="5547360" cy="321259"/>
-          </a:xfrm>
-          <a:prstGeom prst="rect">
-            <a:avLst/>
-          </a:prstGeom>
-          <a:noFill/>
-          <a:effectLst/>
-        </p:spPr>
-        <p:txBody>
-          <a:bodyPr wrap="none" lIns="27432" rIns="27432" tIns="18288" bIns="18288" anchor="ctr">
-            <a:spAutoFit/>
-          </a:bodyPr>
-          <a:lstStyle/>
-          <a:p>
-            <a:pPr algn="l">
-              <a:spcAft>
-                <a:spcPts val="0"/>
-              </a:spcAft>
-            </a:pPr>
-            <a:r>
-              <a:rPr sz="1632" b="0" i="0">
-                <a:solidFill>
-                  <a:srgbClr val="E7F0F3"/>
-                </a:solidFill>
-                <a:latin typeface="Arial"/>
-              </a:rPr>
-              <a:t>y = Ṙ²</a:t>
-            </a:r>
-          </a:p>
-        </p:txBody>
-      </p:sp>
-      <p:sp>
-        <p:nvSpPr>
-          <p:cNvPr id="22" name="text21" descr="sci-ppt:C1-E15-021"/>
-          <p:cNvSpPr txBox="1"/>
-          <p:nvPr/>
-        </p:nvSpPr>
-        <p:spPr>
-          <a:xfrm>
-            <a:off x="6156960" y="5559552"/>
-            <a:ext cx="5547360" cy="321259"/>
-          </a:xfrm>
-          <a:prstGeom prst="rect">
-            <a:avLst/>
-          </a:prstGeom>
-          <a:noFill/>
-          <a:effectLst/>
-        </p:spPr>
-        <p:txBody>
-          <a:bodyPr wrap="none" lIns="27432" rIns="27432" tIns="18288" bIns="18288" anchor="ctr">
-            <a:spAutoFit/>
-          </a:bodyPr>
-          <a:lstStyle/>
-          <a:p>
-            <a:pPr algn="l">
-              <a:spcAft>
-                <a:spcPts val="0"/>
-              </a:spcAft>
-            </a:pPr>
-            <a:r>
-              <a:rPr sz="1632" b="0" i="0">
-                <a:solidFill>
-                  <a:srgbClr val="E7F0F3"/>
-                </a:solidFill>
-                <a:latin typeface="Arial"/>
-              </a:rPr>
-              <a:t>Δpc</a:t>
-            </a:r>
-          </a:p>
-        </p:txBody>
-      </p:sp>
-      <p:sp>
-        <p:nvSpPr>
-          <p:cNvPr id="23" name="text22" descr="sci-ppt:C1-E15-022"/>
-          <p:cNvSpPr txBox="1"/>
-          <p:nvPr/>
-        </p:nvSpPr>
-        <p:spPr>
-          <a:xfrm>
-            <a:off x="365760" y="6339840"/>
-            <a:ext cx="11277600" cy="302361"/>
-          </a:xfrm>
-          <a:prstGeom prst="rect">
-            <a:avLst/>
-          </a:prstGeom>
-          <a:noFill/>
-          <a:effectLst/>
-        </p:spPr>
-        <p:txBody>
-          <a:bodyPr wrap="none" lIns="27432" rIns="27432" tIns="18288" bIns="18288" anchor="ctr">
-            <a:spAutoFit/>
-          </a:bodyPr>
-          <a:lstStyle/>
-          <a:p>
-            <a:pPr algn="l">
-              <a:spcAft>
-                <a:spcPts val="0"/>
-              </a:spcAft>
-            </a:pPr>
-            <a:r>
-              <a:rPr sz="1536" b="0" i="0">
+              <a:rPr sz="1000" b="0" i="0">
                 <a:solidFill>
                   <a:srgbClr val="B4C7D2"/>
                 </a:solidFill>
                 <a:latin typeface="Arial"/>
               </a:rPr>
-              <a:t>Speed is zero at R = Rmax</a:t>
-            </a:r>
-          </a:p>
-        </p:txBody>
-      </p:sp>
-      <p:sp>
-        <p:nvSpPr>
-          <p:cNvPr id="24" name="text23" descr="sci-ppt:C1-E15-023"/>
-          <p:cNvSpPr txBox="1"/>
-          <p:nvPr/>
-        </p:nvSpPr>
-        <p:spPr>
-          <a:xfrm>
-            <a:off x="365760" y="6632448"/>
-            <a:ext cx="11277600" cy="302361"/>
-          </a:xfrm>
-          <a:prstGeom prst="rect">
-            <a:avLst/>
-          </a:prstGeom>
-          <a:noFill/>
-          <a:effectLst/>
-        </p:spPr>
-        <p:txBody>
-          <a:bodyPr wrap="none" lIns="27432" rIns="27432" tIns="18288" bIns="18288" anchor="ctr">
-            <a:spAutoFit/>
-          </a:bodyPr>
-          <a:lstStyle/>
-          <a:p>
-            <a:pPr algn="l">
-              <a:spcAft>
-                <a:spcPts val="0"/>
-              </a:spcAft>
-            </a:pPr>
-            <a:r>
-              <a:rPr sz="1536" b="0" i="0">
-                <a:solidFill>
-                  <a:srgbClr val="B4C7D2"/>
-                </a:solidFill>
-                <a:latin typeface="Arial"/>
-              </a:rPr>
-              <a:t>Zero radius is an excluded model endpoint</a:t>
+              <a:t>Wall speed from Eq. C1-E15 (log–log axes).</a:t>
             </a:r>
           </a:p>
         </p:txBody>

--- a/assets/figures-editable/c1-c2/c1-e15.pptx
+++ b/assets/figures-editable/c1-c2/c1-e15.pptx
@@ -3131,7 +3131,7 @@
                 </a:solidFill>
                 <a:latin typeface="Arial"/>
               </a:rPr>
-              <a:t>C1-E15 · Integrated speed with initial constant and branch</a:t>
+              <a:t>C1-E15 · Exact separation and nondimensionalization</a:t>
             </a:r>
           </a:p>
         </p:txBody>
@@ -3144,8 +3144,8 @@
         </p:nvCxnSpPr>
         <p:spPr>
           <a:xfrm>
-            <a:off x="1005840" y="5120640"/>
-            <a:ext cx="5852160" cy="0"/>
+            <a:off x="914400" y="5029200"/>
+            <a:ext cx="6035040" cy="0"/>
           </a:xfrm>
           <a:prstGeom prst="line">
             <a:avLst/>
@@ -3166,8 +3166,8 @@
         </p:nvCxnSpPr>
         <p:spPr>
           <a:xfrm>
-            <a:off x="1005840" y="1371600"/>
-            <a:ext cx="0" cy="3749040"/>
+            <a:off x="914400" y="1371600"/>
+            <a:ext cx="0" cy="3657600"/>
           </a:xfrm>
           <a:prstGeom prst="line">
             <a:avLst/>
@@ -3188,7 +3188,7 @@
         </p:nvCxnSpPr>
         <p:spPr>
           <a:xfrm>
-            <a:off x="1005840" y="5120640"/>
+            <a:off x="914400" y="5029200"/>
             <a:ext cx="0" cy="64008"/>
           </a:xfrm>
           <a:prstGeom prst="line">
@@ -3210,8 +3210,8 @@
         </p:nvCxnSpPr>
         <p:spPr>
           <a:xfrm>
-            <a:off x="1005840" y="1371600"/>
-            <a:ext cx="0" cy="3749040"/>
+            <a:off x="914400" y="1371600"/>
+            <a:ext cx="0" cy="3657600"/>
           </a:xfrm>
           <a:prstGeom prst="line">
             <a:avLst/>
@@ -3232,7 +3232,7 @@
         </p:nvSpPr>
         <p:spPr>
           <a:xfrm>
-            <a:off x="548640" y="5202936"/>
+            <a:off x="457200" y="5111496"/>
             <a:ext cx="914400" cy="208407"/>
           </a:xfrm>
           <a:prstGeom prst="rect">
@@ -3259,7 +3259,7 @@
                 </a:solidFill>
                 <a:latin typeface="Arial"/>
               </a:rPr>
-              <a:t>0.02</a:t>
+              <a:t>0.00</a:t>
             </a:r>
           </a:p>
         </p:txBody>
@@ -3272,7 +3272,7 @@
         </p:nvCxnSpPr>
         <p:spPr>
           <a:xfrm>
-            <a:off x="2376557" y="5120640"/>
+            <a:off x="2423160" y="5029200"/>
             <a:ext cx="0" cy="64008"/>
           </a:xfrm>
           <a:prstGeom prst="line">
@@ -3294,8 +3294,8 @@
         </p:nvCxnSpPr>
         <p:spPr>
           <a:xfrm>
-            <a:off x="2376557" y="1371600"/>
-            <a:ext cx="0" cy="3749040"/>
+            <a:off x="2423160" y="1371600"/>
+            <a:ext cx="0" cy="3657600"/>
           </a:xfrm>
           <a:prstGeom prst="line">
             <a:avLst/>
@@ -3316,7 +3316,7 @@
         </p:nvSpPr>
         <p:spPr>
           <a:xfrm>
-            <a:off x="1919357" y="5202936"/>
+            <a:off x="1965960" y="5111496"/>
             <a:ext cx="914400" cy="208407"/>
           </a:xfrm>
           <a:prstGeom prst="rect">
@@ -3343,7 +3343,7 @@
                 </a:solidFill>
                 <a:latin typeface="Arial"/>
               </a:rPr>
-              <a:t>0.05</a:t>
+              <a:t>0.25</a:t>
             </a:r>
           </a:p>
         </p:txBody>
@@ -3356,7 +3356,7 @@
         </p:nvCxnSpPr>
         <p:spPr>
           <a:xfrm>
-            <a:off x="3413465" y="5120640"/>
+            <a:off x="3931920" y="5029200"/>
             <a:ext cx="0" cy="64008"/>
           </a:xfrm>
           <a:prstGeom prst="line">
@@ -3378,8 +3378,8 @@
         </p:nvCxnSpPr>
         <p:spPr>
           <a:xfrm>
-            <a:off x="3413465" y="1371600"/>
-            <a:ext cx="0" cy="3749040"/>
+            <a:off x="3931920" y="1371600"/>
+            <a:ext cx="0" cy="3657600"/>
           </a:xfrm>
           <a:prstGeom prst="line">
             <a:avLst/>
@@ -3400,7 +3400,7 @@
         </p:nvSpPr>
         <p:spPr>
           <a:xfrm>
-            <a:off x="2956265" y="5202936"/>
+            <a:off x="3474720" y="5111496"/>
             <a:ext cx="914400" cy="208407"/>
           </a:xfrm>
           <a:prstGeom prst="rect">
@@ -3427,7 +3427,7 @@
                 </a:solidFill>
                 <a:latin typeface="Arial"/>
               </a:rPr>
-              <a:t>0.1</a:t>
+              <a:t>0.50</a:t>
             </a:r>
           </a:p>
         </p:txBody>
@@ -3440,7 +3440,7 @@
         </p:nvCxnSpPr>
         <p:spPr>
           <a:xfrm>
-            <a:off x="4450374" y="5120640"/>
+            <a:off x="5440679" y="5029200"/>
             <a:ext cx="0" cy="64008"/>
           </a:xfrm>
           <a:prstGeom prst="line">
@@ -3462,8 +3462,8 @@
         </p:nvCxnSpPr>
         <p:spPr>
           <a:xfrm>
-            <a:off x="4450374" y="1371600"/>
-            <a:ext cx="0" cy="3749040"/>
+            <a:off x="5440679" y="1371600"/>
+            <a:ext cx="0" cy="3657600"/>
           </a:xfrm>
           <a:prstGeom prst="line">
             <a:avLst/>
@@ -3484,7 +3484,7 @@
         </p:nvSpPr>
         <p:spPr>
           <a:xfrm>
-            <a:off x="3993174" y="5202936"/>
+            <a:off x="4983479" y="5111496"/>
             <a:ext cx="914400" cy="208407"/>
           </a:xfrm>
           <a:prstGeom prst="rect">
@@ -3511,7 +3511,7 @@
                 </a:solidFill>
                 <a:latin typeface="Arial"/>
               </a:rPr>
-              <a:t>0.2</a:t>
+              <a:t>0.75</a:t>
             </a:r>
           </a:p>
         </p:txBody>
@@ -3524,7 +3524,7 @@
         </p:nvCxnSpPr>
         <p:spPr>
           <a:xfrm>
-            <a:off x="5821091" y="5120640"/>
+            <a:off x="6949440" y="5029200"/>
             <a:ext cx="0" cy="64008"/>
           </a:xfrm>
           <a:prstGeom prst="line">
@@ -3546,8 +3546,8 @@
         </p:nvCxnSpPr>
         <p:spPr>
           <a:xfrm>
-            <a:off x="5821091" y="1371600"/>
-            <a:ext cx="0" cy="3749040"/>
+            <a:off x="6949440" y="1371600"/>
+            <a:ext cx="0" cy="3657600"/>
           </a:xfrm>
           <a:prstGeom prst="line">
             <a:avLst/>
@@ -3568,7 +3568,7 @@
         </p:nvSpPr>
         <p:spPr>
           <a:xfrm>
-            <a:off x="5363891" y="5202936"/>
+            <a:off x="6492240" y="5111496"/>
             <a:ext cx="914400" cy="208407"/>
           </a:xfrm>
           <a:prstGeom prst="rect">
@@ -3595,7 +3595,7 @@
                 </a:solidFill>
                 <a:latin typeface="Arial"/>
               </a:rPr>
-              <a:t>0.5</a:t>
+              <a:t>1.00</a:t>
             </a:r>
           </a:p>
         </p:txBody>
@@ -3608,8 +3608,8 @@
         </p:nvCxnSpPr>
         <p:spPr>
           <a:xfrm>
-            <a:off x="6858000" y="5120640"/>
-            <a:ext cx="0" cy="64008"/>
+            <a:off x="850392" y="5029200"/>
+            <a:ext cx="64008" cy="0"/>
           </a:xfrm>
           <a:prstGeom prst="line">
             <a:avLst/>
@@ -3630,69 +3630,7 @@
         </p:nvCxnSpPr>
         <p:spPr>
           <a:xfrm>
-            <a:off x="6858000" y="1371600"/>
-            <a:ext cx="0" cy="3749040"/>
-          </a:xfrm>
-          <a:prstGeom prst="line">
-            <a:avLst/>
-          </a:prstGeom>
-          <a:ln w="7620">
-            <a:solidFill>
-              <a:srgbClr val="2E4756"/>
-            </a:solidFill>
-          </a:ln>
-          <a:effectLst/>
-        </p:spPr>
-      </p:cxnSp>
-      <p:sp>
-        <p:nvSpPr>
-          <p:cNvPr id="22" name="C1-E15 text 20" descr="sci-ppt:o020"/>
-          <p:cNvSpPr txBox="1"/>
-          <p:nvPr/>
-        </p:nvSpPr>
-        <p:spPr>
-          <a:xfrm>
-            <a:off x="6400800" y="5202936"/>
-            <a:ext cx="914400" cy="208407"/>
-          </a:xfrm>
-          <a:prstGeom prst="rect">
-            <a:avLst/>
-          </a:prstGeom>
-          <a:noFill/>
-          <a:effectLst/>
-        </p:spPr>
-        <p:txBody>
-          <a:bodyPr wrap="none" lIns="18288" rIns="18288" tIns="18288" bIns="18288" anchor="t">
-            <a:spAutoFit/>
-          </a:bodyPr>
-          <a:lstStyle/>
-          <a:p>
-            <a:pPr algn="ctr">
-              <a:spcAft>
-                <a:spcPts val="0"/>
-              </a:spcAft>
-            </a:pPr>
-            <a:r>
-              <a:rPr sz="1050" b="0" i="0">
-                <a:solidFill>
-                  <a:srgbClr val="B4C7D2"/>
-                </a:solidFill>
-                <a:latin typeface="Arial"/>
-              </a:rPr>
-              <a:t>1</a:t>
-            </a:r>
-          </a:p>
-        </p:txBody>
-      </p:sp>
-      <p:cxnSp>
-        <p:nvCxnSpPr>
-          <p:cNvPr id="23" name="C1-E15 line 21" descr="sci-ppt:o021"/>
-          <p:cNvCxnSpPr/>
-          <p:nvPr/>
-        </p:nvCxnSpPr>
-        <p:spPr>
-          <a:xfrm>
-            <a:off x="941832" y="5120640"/>
+            <a:off x="850392" y="3810000"/>
             <a:ext cx="64008" cy="0"/>
           </a:xfrm>
           <a:prstGeom prst="line">
@@ -3708,13 +3646,75 @@
       </p:cxnSp>
       <p:cxnSp>
         <p:nvCxnSpPr>
+          <p:cNvPr id="22" name="C1-E15 line 20" descr="sci-ppt:o020"/>
+          <p:cNvCxnSpPr/>
+          <p:nvPr/>
+        </p:nvCxnSpPr>
+        <p:spPr>
+          <a:xfrm>
+            <a:off x="914400" y="3810000"/>
+            <a:ext cx="6035040" cy="0"/>
+          </a:xfrm>
+          <a:prstGeom prst="line">
+            <a:avLst/>
+          </a:prstGeom>
+          <a:ln w="7620">
+            <a:solidFill>
+              <a:srgbClr val="2E4756"/>
+            </a:solidFill>
+          </a:ln>
+          <a:effectLst/>
+        </p:spPr>
+      </p:cxnSp>
+      <p:sp>
+        <p:nvSpPr>
+          <p:cNvPr id="23" name="C1-E15 text 21" descr="sci-ppt:o021"/>
+          <p:cNvSpPr txBox="1"/>
+          <p:nvPr/>
+        </p:nvSpPr>
+        <p:spPr>
+          <a:xfrm>
+            <a:off x="45720" y="3727704"/>
+            <a:ext cx="777240" cy="208407"/>
+          </a:xfrm>
+          <a:prstGeom prst="rect">
+            <a:avLst/>
+          </a:prstGeom>
+          <a:noFill/>
+          <a:effectLst/>
+        </p:spPr>
+        <p:txBody>
+          <a:bodyPr wrap="none" lIns="18288" rIns="18288" tIns="18288" bIns="18288" anchor="t">
+            <a:spAutoFit/>
+          </a:bodyPr>
+          <a:lstStyle/>
+          <a:p>
+            <a:pPr algn="r">
+              <a:spcAft>
+                <a:spcPts val="0"/>
+              </a:spcAft>
+            </a:pPr>
+            <a:r>
+              <a:rPr sz="1050" b="0" i="0">
+                <a:solidFill>
+                  <a:srgbClr val="B4C7D2"/>
+                </a:solidFill>
+                <a:latin typeface="Arial"/>
+              </a:rPr>
+              <a:t>2</a:t>
+            </a:r>
+          </a:p>
+        </p:txBody>
+      </p:sp>
+      <p:cxnSp>
+        <p:nvCxnSpPr>
           <p:cNvPr id="24" name="C1-E15 line 22" descr="sci-ppt:o022"/>
           <p:cNvCxnSpPr/>
           <p:nvPr/>
         </p:nvCxnSpPr>
         <p:spPr>
           <a:xfrm>
-            <a:off x="941832" y="3870960"/>
+            <a:off x="850392" y="2590800"/>
             <a:ext cx="64008" cy="0"/>
           </a:xfrm>
           <a:prstGeom prst="line">
@@ -3736,8 +3736,8 @@
         </p:nvCxnSpPr>
         <p:spPr>
           <a:xfrm>
-            <a:off x="1005840" y="3870960"/>
-            <a:ext cx="5852160" cy="0"/>
+            <a:off x="914400" y="2590800"/>
+            <a:ext cx="6035040" cy="0"/>
           </a:xfrm>
           <a:prstGeom prst="line">
             <a:avLst/>
@@ -3758,7 +3758,7 @@
         </p:nvSpPr>
         <p:spPr>
           <a:xfrm>
-            <a:off x="137160" y="3788664"/>
+            <a:off x="45720" y="2508504"/>
             <a:ext cx="777240" cy="208407"/>
           </a:xfrm>
           <a:prstGeom prst="rect">
@@ -3785,7 +3785,7 @@
                 </a:solidFill>
                 <a:latin typeface="Arial"/>
               </a:rPr>
-              <a:t>10</a:t>
+              <a:t>4</a:t>
             </a:r>
           </a:p>
         </p:txBody>
@@ -3798,7 +3798,7 @@
         </p:nvCxnSpPr>
         <p:spPr>
           <a:xfrm>
-            <a:off x="941832" y="2621280"/>
+            <a:off x="850392" y="1371600"/>
             <a:ext cx="64008" cy="0"/>
           </a:xfrm>
           <a:prstGeom prst="line">
@@ -3820,8 +3820,8 @@
         </p:nvCxnSpPr>
         <p:spPr>
           <a:xfrm>
-            <a:off x="1005840" y="2621280"/>
-            <a:ext cx="5852160" cy="0"/>
+            <a:off x="914400" y="1371600"/>
+            <a:ext cx="6035040" cy="0"/>
           </a:xfrm>
           <a:prstGeom prst="line">
             <a:avLst/>
@@ -3842,7 +3842,7 @@
         </p:nvSpPr>
         <p:spPr>
           <a:xfrm>
-            <a:off x="137160" y="2538984"/>
+            <a:off x="45720" y="1289304"/>
             <a:ext cx="777240" cy="208407"/>
           </a:xfrm>
           <a:prstGeom prst="rect">
@@ -3869,65 +3869,21 @@
                 </a:solidFill>
                 <a:latin typeface="Arial"/>
               </a:rPr>
-              <a:t>100</a:t>
+              <a:t>6</a:t>
             </a:r>
           </a:p>
         </p:txBody>
       </p:sp>
-      <p:cxnSp>
-        <p:nvCxnSpPr>
-          <p:cNvPr id="30" name="C1-E15 line 28" descr="sci-ppt:o028"/>
-          <p:cNvCxnSpPr/>
-          <p:nvPr/>
-        </p:nvCxnSpPr>
-        <p:spPr>
-          <a:xfrm>
-            <a:off x="941832" y="1371600"/>
-            <a:ext cx="64008" cy="0"/>
-          </a:xfrm>
-          <a:prstGeom prst="line">
-            <a:avLst/>
-          </a:prstGeom>
-          <a:ln w="12700">
-            <a:solidFill>
-              <a:srgbClr val="B4C7D2"/>
-            </a:solidFill>
-          </a:ln>
-          <a:effectLst/>
-        </p:spPr>
-      </p:cxnSp>
-      <p:cxnSp>
-        <p:nvCxnSpPr>
-          <p:cNvPr id="31" name="C1-E15 line 29" descr="sci-ppt:o029"/>
-          <p:cNvCxnSpPr/>
-          <p:nvPr/>
-        </p:nvCxnSpPr>
-        <p:spPr>
-          <a:xfrm>
-            <a:off x="1005840" y="1371600"/>
-            <a:ext cx="5852160" cy="0"/>
-          </a:xfrm>
-          <a:prstGeom prst="line">
-            <a:avLst/>
-          </a:prstGeom>
-          <a:ln w="7620">
-            <a:solidFill>
-              <a:srgbClr val="2E4756"/>
-            </a:solidFill>
-          </a:ln>
-          <a:effectLst/>
-        </p:spPr>
-      </p:cxnSp>
       <p:sp>
         <p:nvSpPr>
-          <p:cNvPr id="32" name="C1-E15 text 30" descr="sci-ppt:o030"/>
+          <p:cNvPr id="30" name="C1-E15 text 28" descr="sci-ppt:o028"/>
           <p:cNvSpPr txBox="1"/>
           <p:nvPr/>
         </p:nvSpPr>
         <p:spPr>
           <a:xfrm>
-            <a:off x="137160" y="1289304"/>
-            <a:ext cx="777240" cy="208407"/>
+            <a:off x="914400" y="5312664"/>
+            <a:ext cx="6035040" cy="231648"/>
           </a:xfrm>
           <a:prstGeom prst="rect">
             <a:avLst/>
@@ -3941,33 +3897,33 @@
           </a:bodyPr>
           <a:lstStyle/>
           <a:p>
-            <a:pPr algn="r">
+            <a:pPr algn="ctr">
               <a:spcAft>
                 <a:spcPts val="0"/>
               </a:spcAft>
             </a:pPr>
             <a:r>
-              <a:rPr sz="1050" b="0" i="0">
+              <a:rPr sz="1200" b="0" i="0">
                 <a:solidFill>
-                  <a:srgbClr val="B4C7D2"/>
+                  <a:srgbClr val="E7F0F3"/>
                 </a:solidFill>
                 <a:latin typeface="Arial"/>
               </a:rPr>
-              <a:t>1000</a:t>
+              <a:t>x = R / Rₘₐₓ</a:t>
             </a:r>
           </a:p>
         </p:txBody>
       </p:sp>
       <p:sp>
         <p:nvSpPr>
-          <p:cNvPr id="33" name="C1-E15 text 31" descr="sci-ppt:o031"/>
+          <p:cNvPr id="31" name="C1-E15 text 29" descr="sci-ppt:o029"/>
           <p:cNvSpPr txBox="1"/>
           <p:nvPr/>
         </p:nvSpPr>
         <p:spPr>
           <a:xfrm>
-            <a:off x="1005840" y="5404103"/>
-            <a:ext cx="5852160" cy="231648"/>
+            <a:off x="365760" y="1024128"/>
+            <a:ext cx="6035040" cy="231648"/>
           </a:xfrm>
           <a:prstGeom prst="rect">
             <a:avLst/>
@@ -3981,46 +3937,6 @@
           </a:bodyPr>
           <a:lstStyle/>
           <a:p>
-            <a:pPr algn="ctr">
-              <a:spcAft>
-                <a:spcPts val="0"/>
-              </a:spcAft>
-            </a:pPr>
-            <a:r>
-              <a:rPr sz="1200" b="0" i="0">
-                <a:solidFill>
-                  <a:srgbClr val="E7F0F3"/>
-                </a:solidFill>
-                <a:latin typeface="Arial"/>
-              </a:rPr>
-              <a:t>R / Rₘₐₓ</a:t>
-            </a:r>
-          </a:p>
-        </p:txBody>
-      </p:sp>
-      <p:sp>
-        <p:nvSpPr>
-          <p:cNvPr id="34" name="C1-E15 text 32" descr="sci-ppt:o032"/>
-          <p:cNvSpPr txBox="1"/>
-          <p:nvPr/>
-        </p:nvSpPr>
-        <p:spPr>
-          <a:xfrm>
-            <a:off x="457200" y="1024128"/>
-            <a:ext cx="5852160" cy="231648"/>
-          </a:xfrm>
-          <a:prstGeom prst="rect">
-            <a:avLst/>
-          </a:prstGeom>
-          <a:noFill/>
-          <a:effectLst/>
-        </p:spPr>
-        <p:txBody>
-          <a:bodyPr wrap="none" lIns="18288" rIns="18288" tIns="18288" bIns="18288" anchor="t">
-            <a:spAutoFit/>
-          </a:bodyPr>
-          <a:lstStyle/>
-          <a:p>
             <a:pPr algn="l">
               <a:spcAft>
                 <a:spcPts val="0"/>
@@ -4033,21 +3949,21 @@
                 </a:solidFill>
                 <a:latin typeface="Arial"/>
               </a:rPr>
-              <a:t>|Ṙ|  (m/s)</a:t>
+              <a:t>x^(3/2) / √(1 − x³)</a:t>
             </a:r>
           </a:p>
         </p:txBody>
       </p:sp>
       <p:sp>
         <p:nvSpPr>
-          <p:cNvPr id="35" name="C1-E15 polygon 33" descr="sci-ppt:o033"/>
+          <p:cNvPr id="32" name="C1-E15 polygon 30" descr="sci-ppt:o030"/>
           <p:cNvSpPr/>
           <p:nvPr/>
         </p:nvSpPr>
         <p:spPr>
           <a:xfrm>
-            <a:off x="2099013" y="1391161"/>
-            <a:ext cx="4739402" cy="3462934"/>
+            <a:off x="914400" y="1371600"/>
+            <a:ext cx="6032022" cy="3657600"/>
           </a:xfrm>
           <a:custGeom>
             <a:avLst/>
@@ -4056,372 +3972,5328 @@
             <a:cxnLst/>
             <a:rect l="l" t="t" r="r" b="b"/>
             <a:pathLst>
-              <a:path w="4739402" h="3462934">
+              <a:path w="6032022" h="3657600">
                 <a:moveTo>
-                  <a:pt x="0" y="0"/>
+                  <a:pt x="0" y="3657600"/>
                 </a:moveTo>
                 <a:lnTo>
-                  <a:pt x="39168" y="21317"/>
-                </a:lnTo>
-                <a:lnTo>
-                  <a:pt x="78337" y="42634"/>
-                </a:lnTo>
-                <a:lnTo>
-                  <a:pt x="117506" y="63952"/>
-                </a:lnTo>
-                <a:lnTo>
-                  <a:pt x="156674" y="85270"/>
-                </a:lnTo>
-                <a:lnTo>
-                  <a:pt x="195843" y="106587"/>
-                </a:lnTo>
-                <a:lnTo>
-                  <a:pt x="235012" y="127905"/>
-                </a:lnTo>
-                <a:lnTo>
-                  <a:pt x="274180" y="149223"/>
-                </a:lnTo>
-                <a:lnTo>
-                  <a:pt x="313349" y="170542"/>
-                </a:lnTo>
-                <a:lnTo>
-                  <a:pt x="352517" y="191860"/>
-                </a:lnTo>
-                <a:lnTo>
-                  <a:pt x="391686" y="213179"/>
-                </a:lnTo>
-                <a:lnTo>
-                  <a:pt x="430855" y="234498"/>
-                </a:lnTo>
-                <a:lnTo>
-                  <a:pt x="470023" y="255818"/>
-                </a:lnTo>
-                <a:lnTo>
-                  <a:pt x="509192" y="277137"/>
-                </a:lnTo>
-                <a:lnTo>
-                  <a:pt x="548360" y="298457"/>
-                </a:lnTo>
-                <a:lnTo>
-                  <a:pt x="587529" y="319778"/>
-                </a:lnTo>
-                <a:lnTo>
-                  <a:pt x="626698" y="341099"/>
-                </a:lnTo>
-                <a:lnTo>
-                  <a:pt x="665866" y="362420"/>
-                </a:lnTo>
-                <a:lnTo>
-                  <a:pt x="705035" y="383741"/>
-                </a:lnTo>
-                <a:lnTo>
-                  <a:pt x="744204" y="405064"/>
-                </a:lnTo>
-                <a:lnTo>
-                  <a:pt x="783372" y="426386"/>
-                </a:lnTo>
-                <a:lnTo>
-                  <a:pt x="822541" y="447710"/>
-                </a:lnTo>
-                <a:lnTo>
-                  <a:pt x="861709" y="469033"/>
-                </a:lnTo>
-                <a:lnTo>
-                  <a:pt x="900878" y="490358"/>
-                </a:lnTo>
-                <a:lnTo>
-                  <a:pt x="940047" y="511683"/>
-                </a:lnTo>
-                <a:lnTo>
-                  <a:pt x="979215" y="533009"/>
-                </a:lnTo>
-                <a:lnTo>
-                  <a:pt x="1018384" y="554336"/>
-                </a:lnTo>
-                <a:lnTo>
-                  <a:pt x="1057552" y="575664"/>
-                </a:lnTo>
-                <a:lnTo>
-                  <a:pt x="1096721" y="596993"/>
-                </a:lnTo>
-                <a:lnTo>
-                  <a:pt x="1135890" y="618323"/>
-                </a:lnTo>
-                <a:lnTo>
-                  <a:pt x="1175058" y="639654"/>
-                </a:lnTo>
-                <a:lnTo>
-                  <a:pt x="1214227" y="660987"/>
-                </a:lnTo>
-                <a:lnTo>
-                  <a:pt x="1253396" y="682320"/>
-                </a:lnTo>
-                <a:lnTo>
-                  <a:pt x="1292564" y="703656"/>
-                </a:lnTo>
-                <a:lnTo>
-                  <a:pt x="1331733" y="724992"/>
-                </a:lnTo>
-                <a:lnTo>
-                  <a:pt x="1370901" y="746331"/>
-                </a:lnTo>
-                <a:lnTo>
-                  <a:pt x="1410070" y="767671"/>
-                </a:lnTo>
-                <a:lnTo>
-                  <a:pt x="1449239" y="789014"/>
-                </a:lnTo>
-                <a:lnTo>
-                  <a:pt x="1488407" y="810359"/>
-                </a:lnTo>
-                <a:lnTo>
-                  <a:pt x="1527576" y="831706"/>
-                </a:lnTo>
-                <a:lnTo>
-                  <a:pt x="1566744" y="853055"/>
-                </a:lnTo>
-                <a:lnTo>
-                  <a:pt x="1605913" y="874408"/>
-                </a:lnTo>
-                <a:lnTo>
-                  <a:pt x="1645082" y="895763"/>
-                </a:lnTo>
-                <a:lnTo>
-                  <a:pt x="1684250" y="917122"/>
-                </a:lnTo>
-                <a:lnTo>
-                  <a:pt x="1723419" y="938484"/>
-                </a:lnTo>
-                <a:lnTo>
-                  <a:pt x="1762587" y="959850"/>
-                </a:lnTo>
-                <a:lnTo>
-                  <a:pt x="1801756" y="981221"/>
-                </a:lnTo>
-                <a:lnTo>
-                  <a:pt x="1840925" y="1002595"/>
-                </a:lnTo>
-                <a:lnTo>
-                  <a:pt x="1880093" y="1023975"/>
-                </a:lnTo>
-                <a:lnTo>
-                  <a:pt x="1919262" y="1045360"/>
-                </a:lnTo>
-                <a:lnTo>
-                  <a:pt x="1958431" y="1066750"/>
-                </a:lnTo>
-                <a:lnTo>
-                  <a:pt x="1997599" y="1088147"/>
-                </a:lnTo>
-                <a:lnTo>
-                  <a:pt x="2036768" y="1109550"/>
-                </a:lnTo>
-                <a:lnTo>
-                  <a:pt x="2075936" y="1130960"/>
-                </a:lnTo>
-                <a:lnTo>
-                  <a:pt x="2115105" y="1152379"/>
-                </a:lnTo>
-                <a:lnTo>
-                  <a:pt x="2154274" y="1173805"/>
-                </a:lnTo>
-                <a:lnTo>
-                  <a:pt x="2193442" y="1195241"/>
-                </a:lnTo>
-                <a:lnTo>
-                  <a:pt x="2232611" y="1216687"/>
-                </a:lnTo>
-                <a:lnTo>
-                  <a:pt x="2271779" y="1238143"/>
-                </a:lnTo>
-                <a:lnTo>
-                  <a:pt x="2310948" y="1259611"/>
-                </a:lnTo>
-                <a:lnTo>
-                  <a:pt x="2350117" y="1281091"/>
-                </a:lnTo>
-                <a:lnTo>
-                  <a:pt x="2389285" y="1302585"/>
-                </a:lnTo>
-                <a:lnTo>
-                  <a:pt x="2428454" y="1324094"/>
-                </a:lnTo>
-                <a:lnTo>
-                  <a:pt x="2467623" y="1345619"/>
-                </a:lnTo>
-                <a:lnTo>
-                  <a:pt x="2506791" y="1367161"/>
-                </a:lnTo>
-                <a:lnTo>
-                  <a:pt x="2545960" y="1388722"/>
-                </a:lnTo>
-                <a:lnTo>
-                  <a:pt x="2585128" y="1410303"/>
-                </a:lnTo>
-                <a:lnTo>
-                  <a:pt x="2624297" y="1431906"/>
-                </a:lnTo>
-                <a:lnTo>
-                  <a:pt x="2663466" y="1453532"/>
-                </a:lnTo>
-                <a:lnTo>
-                  <a:pt x="2702634" y="1475185"/>
-                </a:lnTo>
-                <a:lnTo>
-                  <a:pt x="2741803" y="1496865"/>
-                </a:lnTo>
-                <a:lnTo>
-                  <a:pt x="2780971" y="1518576"/>
-                </a:lnTo>
-                <a:lnTo>
-                  <a:pt x="2820140" y="1540320"/>
-                </a:lnTo>
-                <a:lnTo>
-                  <a:pt x="2859309" y="1562100"/>
-                </a:lnTo>
-                <a:lnTo>
-                  <a:pt x="2898477" y="1583919"/>
-                </a:lnTo>
-                <a:lnTo>
-                  <a:pt x="2937646" y="1605779"/>
-                </a:lnTo>
-                <a:lnTo>
-                  <a:pt x="2976815" y="1627686"/>
-                </a:lnTo>
-                <a:lnTo>
-                  <a:pt x="3015983" y="1649642"/>
-                </a:lnTo>
-                <a:lnTo>
-                  <a:pt x="3055152" y="1671652"/>
-                </a:lnTo>
-                <a:lnTo>
-                  <a:pt x="3094320" y="1693721"/>
-                </a:lnTo>
-                <a:lnTo>
-                  <a:pt x="3133489" y="1715854"/>
-                </a:lnTo>
-                <a:lnTo>
-                  <a:pt x="3172658" y="1738056"/>
-                </a:lnTo>
-                <a:lnTo>
-                  <a:pt x="3211826" y="1760335"/>
-                </a:lnTo>
-                <a:lnTo>
-                  <a:pt x="3250995" y="1782695"/>
-                </a:lnTo>
-                <a:lnTo>
-                  <a:pt x="3290163" y="1805146"/>
-                </a:lnTo>
-                <a:lnTo>
-                  <a:pt x="3329332" y="1827695"/>
-                </a:lnTo>
-                <a:lnTo>
-                  <a:pt x="3368501" y="1850351"/>
-                </a:lnTo>
-                <a:lnTo>
-                  <a:pt x="3407669" y="1873124"/>
-                </a:lnTo>
-                <a:lnTo>
-                  <a:pt x="3446838" y="1896025"/>
-                </a:lnTo>
-                <a:lnTo>
-                  <a:pt x="3486007" y="1919066"/>
-                </a:lnTo>
-                <a:lnTo>
-                  <a:pt x="3525175" y="1942260"/>
-                </a:lnTo>
-                <a:lnTo>
-                  <a:pt x="3564344" y="1965623"/>
-                </a:lnTo>
-                <a:lnTo>
-                  <a:pt x="3603512" y="1989170"/>
-                </a:lnTo>
-                <a:lnTo>
-                  <a:pt x="3642681" y="2012921"/>
-                </a:lnTo>
-                <a:lnTo>
-                  <a:pt x="3681850" y="2036896"/>
-                </a:lnTo>
-                <a:lnTo>
-                  <a:pt x="3721018" y="2061117"/>
-                </a:lnTo>
-                <a:lnTo>
-                  <a:pt x="3760187" y="2085611"/>
-                </a:lnTo>
-                <a:lnTo>
-                  <a:pt x="3799355" y="2110408"/>
-                </a:lnTo>
-                <a:lnTo>
-                  <a:pt x="3838524" y="2135540"/>
-                </a:lnTo>
-                <a:lnTo>
-                  <a:pt x="3877693" y="2161045"/>
-                </a:lnTo>
-                <a:lnTo>
-                  <a:pt x="3916861" y="2186967"/>
-                </a:lnTo>
-                <a:lnTo>
-                  <a:pt x="3956030" y="2213354"/>
-                </a:lnTo>
-                <a:lnTo>
-                  <a:pt x="3995199" y="2240265"/>
-                </a:lnTo>
-                <a:lnTo>
-                  <a:pt x="4034367" y="2267766"/>
-                </a:lnTo>
-                <a:lnTo>
-                  <a:pt x="4073536" y="2295935"/>
-                </a:lnTo>
-                <a:lnTo>
-                  <a:pt x="4112704" y="2324864"/>
-                </a:lnTo>
-                <a:lnTo>
-                  <a:pt x="4151873" y="2354664"/>
-                </a:lnTo>
-                <a:lnTo>
-                  <a:pt x="4191042" y="2385465"/>
-                </a:lnTo>
-                <a:lnTo>
-                  <a:pt x="4230210" y="2417430"/>
-                </a:lnTo>
-                <a:lnTo>
-                  <a:pt x="4269379" y="2450755"/>
-                </a:lnTo>
-                <a:lnTo>
-                  <a:pt x="4308547" y="2485690"/>
-                </a:lnTo>
-                <a:lnTo>
-                  <a:pt x="4347716" y="2522550"/>
-                </a:lnTo>
-                <a:lnTo>
-                  <a:pt x="4386885" y="2561748"/>
-                </a:lnTo>
-                <a:lnTo>
-                  <a:pt x="4426053" y="2603834"/>
-                </a:lnTo>
-                <a:lnTo>
-                  <a:pt x="4465222" y="2649565"/>
-                </a:lnTo>
-                <a:lnTo>
-                  <a:pt x="4504391" y="2700027"/>
-                </a:lnTo>
-                <a:lnTo>
-                  <a:pt x="4543559" y="2756852"/>
-                </a:lnTo>
-                <a:lnTo>
-                  <a:pt x="4582728" y="2822660"/>
-                </a:lnTo>
-                <a:lnTo>
-                  <a:pt x="4621896" y="2902073"/>
-                </a:lnTo>
-                <a:lnTo>
-                  <a:pt x="4661065" y="3004456"/>
-                </a:lnTo>
-                <a:lnTo>
-                  <a:pt x="4700234" y="3154013"/>
-                </a:lnTo>
-                <a:lnTo>
-                  <a:pt x="4739402" y="3462934"/>
+                  <a:pt x="7549" y="3657573"/>
+                </a:lnTo>
+                <a:lnTo>
+                  <a:pt x="15098" y="3657523"/>
+                </a:lnTo>
+                <a:lnTo>
+                  <a:pt x="22648" y="3657459"/>
+                </a:lnTo>
+                <a:lnTo>
+                  <a:pt x="30197" y="3657384"/>
+                </a:lnTo>
+                <a:lnTo>
+                  <a:pt x="37747" y="3657298"/>
+                </a:lnTo>
+                <a:lnTo>
+                  <a:pt x="45296" y="3657203"/>
+                </a:lnTo>
+                <a:lnTo>
+                  <a:pt x="52846" y="3657100"/>
+                </a:lnTo>
+                <a:lnTo>
+                  <a:pt x="60395" y="3656989"/>
+                </a:lnTo>
+                <a:lnTo>
+                  <a:pt x="67945" y="3656871"/>
+                </a:lnTo>
+                <a:lnTo>
+                  <a:pt x="75494" y="3656747"/>
+                </a:lnTo>
+                <a:lnTo>
+                  <a:pt x="83044" y="3656616"/>
+                </a:lnTo>
+                <a:lnTo>
+                  <a:pt x="90593" y="3656478"/>
+                </a:lnTo>
+                <a:lnTo>
+                  <a:pt x="98143" y="3656335"/>
+                </a:lnTo>
+                <a:lnTo>
+                  <a:pt x="105692" y="3656187"/>
+                </a:lnTo>
+                <a:lnTo>
+                  <a:pt x="113241" y="3656033"/>
+                </a:lnTo>
+                <a:lnTo>
+                  <a:pt x="120791" y="3655873"/>
+                </a:lnTo>
+                <a:lnTo>
+                  <a:pt x="128340" y="3655709"/>
+                </a:lnTo>
+                <a:lnTo>
+                  <a:pt x="135890" y="3655540"/>
+                </a:lnTo>
+                <a:lnTo>
+                  <a:pt x="143439" y="3655366"/>
+                </a:lnTo>
+                <a:lnTo>
+                  <a:pt x="150989" y="3655187"/>
+                </a:lnTo>
+                <a:lnTo>
+                  <a:pt x="158538" y="3655004"/>
+                </a:lnTo>
+                <a:lnTo>
+                  <a:pt x="166088" y="3654816"/>
+                </a:lnTo>
+                <a:lnTo>
+                  <a:pt x="173637" y="3654624"/>
+                </a:lnTo>
+                <a:lnTo>
+                  <a:pt x="181187" y="3654428"/>
+                </a:lnTo>
+                <a:lnTo>
+                  <a:pt x="188736" y="3654228"/>
+                </a:lnTo>
+                <a:lnTo>
+                  <a:pt x="196286" y="3654024"/>
+                </a:lnTo>
+                <a:lnTo>
+                  <a:pt x="203835" y="3653815"/>
+                </a:lnTo>
+                <a:lnTo>
+                  <a:pt x="211385" y="3653603"/>
+                </a:lnTo>
+                <a:lnTo>
+                  <a:pt x="218934" y="3653387"/>
+                </a:lnTo>
+                <a:lnTo>
+                  <a:pt x="226483" y="3653168"/>
+                </a:lnTo>
+                <a:lnTo>
+                  <a:pt x="234033" y="3652944"/>
+                </a:lnTo>
+                <a:lnTo>
+                  <a:pt x="241582" y="3652717"/>
+                </a:lnTo>
+                <a:lnTo>
+                  <a:pt x="249132" y="3652486"/>
+                </a:lnTo>
+                <a:lnTo>
+                  <a:pt x="256681" y="3652252"/>
+                </a:lnTo>
+                <a:lnTo>
+                  <a:pt x="264231" y="3652015"/>
+                </a:lnTo>
+                <a:lnTo>
+                  <a:pt x="271780" y="3651773"/>
+                </a:lnTo>
+                <a:lnTo>
+                  <a:pt x="279330" y="3651529"/>
+                </a:lnTo>
+                <a:lnTo>
+                  <a:pt x="286879" y="3651281"/>
+                </a:lnTo>
+                <a:lnTo>
+                  <a:pt x="294429" y="3651030"/>
+                </a:lnTo>
+                <a:lnTo>
+                  <a:pt x="301978" y="3650776"/>
+                </a:lnTo>
+                <a:lnTo>
+                  <a:pt x="309528" y="3650518"/>
+                </a:lnTo>
+                <a:lnTo>
+                  <a:pt x="317077" y="3650258"/>
+                </a:lnTo>
+                <a:lnTo>
+                  <a:pt x="324626" y="3649994"/>
+                </a:lnTo>
+                <a:lnTo>
+                  <a:pt x="332176" y="3649727"/>
+                </a:lnTo>
+                <a:lnTo>
+                  <a:pt x="339725" y="3649457"/>
+                </a:lnTo>
+                <a:lnTo>
+                  <a:pt x="347275" y="3649184"/>
+                </a:lnTo>
+                <a:lnTo>
+                  <a:pt x="354824" y="3648908"/>
+                </a:lnTo>
+                <a:lnTo>
+                  <a:pt x="362374" y="3648629"/>
+                </a:lnTo>
+                <a:lnTo>
+                  <a:pt x="369923" y="3648347"/>
+                </a:lnTo>
+                <a:lnTo>
+                  <a:pt x="377473" y="3648063"/>
+                </a:lnTo>
+                <a:lnTo>
+                  <a:pt x="385022" y="3647775"/>
+                </a:lnTo>
+                <a:lnTo>
+                  <a:pt x="392572" y="3647485"/>
+                </a:lnTo>
+                <a:lnTo>
+                  <a:pt x="400121" y="3647191"/>
+                </a:lnTo>
+                <a:lnTo>
+                  <a:pt x="407671" y="3646895"/>
+                </a:lnTo>
+                <a:lnTo>
+                  <a:pt x="415220" y="3646596"/>
+                </a:lnTo>
+                <a:lnTo>
+                  <a:pt x="422770" y="3646295"/>
+                </a:lnTo>
+                <a:lnTo>
+                  <a:pt x="430319" y="3645991"/>
+                </a:lnTo>
+                <a:lnTo>
+                  <a:pt x="437868" y="3645684"/>
+                </a:lnTo>
+                <a:lnTo>
+                  <a:pt x="445418" y="3645374"/>
+                </a:lnTo>
+                <a:lnTo>
+                  <a:pt x="452967" y="3645062"/>
+                </a:lnTo>
+                <a:lnTo>
+                  <a:pt x="460517" y="3644747"/>
+                </a:lnTo>
+                <a:lnTo>
+                  <a:pt x="468066" y="3644429"/>
+                </a:lnTo>
+                <a:lnTo>
+                  <a:pt x="475616" y="3644109"/>
+                </a:lnTo>
+                <a:lnTo>
+                  <a:pt x="483165" y="3643787"/>
+                </a:lnTo>
+                <a:lnTo>
+                  <a:pt x="490715" y="3643462"/>
+                </a:lnTo>
+                <a:lnTo>
+                  <a:pt x="498264" y="3643134"/>
+                </a:lnTo>
+                <a:lnTo>
+                  <a:pt x="505814" y="3642804"/>
+                </a:lnTo>
+                <a:lnTo>
+                  <a:pt x="513363" y="3642471"/>
+                </a:lnTo>
+                <a:lnTo>
+                  <a:pt x="520913" y="3642136"/>
+                </a:lnTo>
+                <a:lnTo>
+                  <a:pt x="528462" y="3641798"/>
+                </a:lnTo>
+                <a:lnTo>
+                  <a:pt x="536012" y="3641458"/>
+                </a:lnTo>
+                <a:lnTo>
+                  <a:pt x="543561" y="3641116"/>
+                </a:lnTo>
+                <a:lnTo>
+                  <a:pt x="551110" y="3640771"/>
+                </a:lnTo>
+                <a:lnTo>
+                  <a:pt x="558660" y="3640424"/>
+                </a:lnTo>
+                <a:lnTo>
+                  <a:pt x="566209" y="3640074"/>
+                </a:lnTo>
+                <a:lnTo>
+                  <a:pt x="573759" y="3639722"/>
+                </a:lnTo>
+                <a:lnTo>
+                  <a:pt x="581308" y="3639368"/>
+                </a:lnTo>
+                <a:lnTo>
+                  <a:pt x="588858" y="3639011"/>
+                </a:lnTo>
+                <a:lnTo>
+                  <a:pt x="596407" y="3638652"/>
+                </a:lnTo>
+                <a:lnTo>
+                  <a:pt x="603957" y="3638291"/>
+                </a:lnTo>
+                <a:lnTo>
+                  <a:pt x="611506" y="3637927"/>
+                </a:lnTo>
+                <a:lnTo>
+                  <a:pt x="619056" y="3637562"/>
+                </a:lnTo>
+                <a:lnTo>
+                  <a:pt x="626605" y="3637193"/>
+                </a:lnTo>
+                <a:lnTo>
+                  <a:pt x="634155" y="3636823"/>
+                </a:lnTo>
+                <a:lnTo>
+                  <a:pt x="641704" y="3636451"/>
+                </a:lnTo>
+                <a:lnTo>
+                  <a:pt x="649253" y="3636076"/>
+                </a:lnTo>
+                <a:lnTo>
+                  <a:pt x="656803" y="3635699"/>
+                </a:lnTo>
+                <a:lnTo>
+                  <a:pt x="664352" y="3635320"/>
+                </a:lnTo>
+                <a:lnTo>
+                  <a:pt x="671902" y="3634938"/>
+                </a:lnTo>
+                <a:lnTo>
+                  <a:pt x="679451" y="3634555"/>
+                </a:lnTo>
+                <a:lnTo>
+                  <a:pt x="687001" y="3634169"/>
+                </a:lnTo>
+                <a:lnTo>
+                  <a:pt x="694550" y="3633781"/>
+                </a:lnTo>
+                <a:lnTo>
+                  <a:pt x="702100" y="3633391"/>
+                </a:lnTo>
+                <a:lnTo>
+                  <a:pt x="709649" y="3632999"/>
+                </a:lnTo>
+                <a:lnTo>
+                  <a:pt x="717199" y="3632605"/>
+                </a:lnTo>
+                <a:lnTo>
+                  <a:pt x="724748" y="3632208"/>
+                </a:lnTo>
+                <a:lnTo>
+                  <a:pt x="732298" y="3631810"/>
+                </a:lnTo>
+                <a:lnTo>
+                  <a:pt x="739847" y="3631409"/>
+                </a:lnTo>
+                <a:lnTo>
+                  <a:pt x="747397" y="3631007"/>
+                </a:lnTo>
+                <a:lnTo>
+                  <a:pt x="754946" y="3630602"/>
+                </a:lnTo>
+                <a:lnTo>
+                  <a:pt x="762495" y="3630195"/>
+                </a:lnTo>
+                <a:lnTo>
+                  <a:pt x="770045" y="3629786"/>
+                </a:lnTo>
+                <a:lnTo>
+                  <a:pt x="777594" y="3629375"/>
+                </a:lnTo>
+                <a:lnTo>
+                  <a:pt x="785144" y="3628962"/>
+                </a:lnTo>
+                <a:lnTo>
+                  <a:pt x="792693" y="3628548"/>
+                </a:lnTo>
+                <a:lnTo>
+                  <a:pt x="800243" y="3628131"/>
+                </a:lnTo>
+                <a:lnTo>
+                  <a:pt x="807792" y="3627712"/>
+                </a:lnTo>
+                <a:lnTo>
+                  <a:pt x="815342" y="3627291"/>
+                </a:lnTo>
+                <a:lnTo>
+                  <a:pt x="822891" y="3626868"/>
+                </a:lnTo>
+                <a:lnTo>
+                  <a:pt x="830441" y="3626443"/>
+                </a:lnTo>
+                <a:lnTo>
+                  <a:pt x="837990" y="3626016"/>
+                </a:lnTo>
+                <a:lnTo>
+                  <a:pt x="845540" y="3625587"/>
+                </a:lnTo>
+                <a:lnTo>
+                  <a:pt x="853089" y="3625156"/>
+                </a:lnTo>
+                <a:lnTo>
+                  <a:pt x="860639" y="3624723"/>
+                </a:lnTo>
+                <a:lnTo>
+                  <a:pt x="868188" y="3624288"/>
+                </a:lnTo>
+                <a:lnTo>
+                  <a:pt x="875737" y="3623851"/>
+                </a:lnTo>
+                <a:lnTo>
+                  <a:pt x="883287" y="3623413"/>
+                </a:lnTo>
+                <a:lnTo>
+                  <a:pt x="890836" y="3622972"/>
+                </a:lnTo>
+                <a:lnTo>
+                  <a:pt x="898386" y="3622529"/>
+                </a:lnTo>
+                <a:lnTo>
+                  <a:pt x="905935" y="3622085"/>
+                </a:lnTo>
+                <a:lnTo>
+                  <a:pt x="913485" y="3621639"/>
+                </a:lnTo>
+                <a:lnTo>
+                  <a:pt x="921034" y="3621190"/>
+                </a:lnTo>
+                <a:lnTo>
+                  <a:pt x="928584" y="3620740"/>
+                </a:lnTo>
+                <a:lnTo>
+                  <a:pt x="936133" y="3620288"/>
+                </a:lnTo>
+                <a:lnTo>
+                  <a:pt x="943683" y="3619834"/>
+                </a:lnTo>
+                <a:lnTo>
+                  <a:pt x="951232" y="3619378"/>
+                </a:lnTo>
+                <a:lnTo>
+                  <a:pt x="958782" y="3618920"/>
+                </a:lnTo>
+                <a:lnTo>
+                  <a:pt x="966331" y="3618461"/>
+                </a:lnTo>
+                <a:lnTo>
+                  <a:pt x="973880" y="3617999"/>
+                </a:lnTo>
+                <a:lnTo>
+                  <a:pt x="981430" y="3617536"/>
+                </a:lnTo>
+                <a:lnTo>
+                  <a:pt x="988979" y="3617071"/>
+                </a:lnTo>
+                <a:lnTo>
+                  <a:pt x="996529" y="3616604"/>
+                </a:lnTo>
+                <a:lnTo>
+                  <a:pt x="1004078" y="3616135"/>
+                </a:lnTo>
+                <a:lnTo>
+                  <a:pt x="1011628" y="3615664"/>
+                </a:lnTo>
+                <a:lnTo>
+                  <a:pt x="1019177" y="3615191"/>
+                </a:lnTo>
+                <a:lnTo>
+                  <a:pt x="1026727" y="3614717"/>
+                </a:lnTo>
+                <a:lnTo>
+                  <a:pt x="1034276" y="3614241"/>
+                </a:lnTo>
+                <a:lnTo>
+                  <a:pt x="1041826" y="3613763"/>
+                </a:lnTo>
+                <a:lnTo>
+                  <a:pt x="1049375" y="3613283"/>
+                </a:lnTo>
+                <a:lnTo>
+                  <a:pt x="1056925" y="3612801"/>
+                </a:lnTo>
+                <a:lnTo>
+                  <a:pt x="1064474" y="3612318"/>
+                </a:lnTo>
+                <a:lnTo>
+                  <a:pt x="1072024" y="3611833"/>
+                </a:lnTo>
+                <a:lnTo>
+                  <a:pt x="1079573" y="3611345"/>
+                </a:lnTo>
+                <a:lnTo>
+                  <a:pt x="1087122" y="3610857"/>
+                </a:lnTo>
+                <a:lnTo>
+                  <a:pt x="1094672" y="3610366"/>
+                </a:lnTo>
+                <a:lnTo>
+                  <a:pt x="1102221" y="3609873"/>
+                </a:lnTo>
+                <a:lnTo>
+                  <a:pt x="1109771" y="3609379"/>
+                </a:lnTo>
+                <a:lnTo>
+                  <a:pt x="1117320" y="3608883"/>
+                </a:lnTo>
+                <a:lnTo>
+                  <a:pt x="1124870" y="3608385"/>
+                </a:lnTo>
+                <a:lnTo>
+                  <a:pt x="1132419" y="3607886"/>
+                </a:lnTo>
+                <a:lnTo>
+                  <a:pt x="1139969" y="3607385"/>
+                </a:lnTo>
+                <a:lnTo>
+                  <a:pt x="1147518" y="3606881"/>
+                </a:lnTo>
+                <a:lnTo>
+                  <a:pt x="1155068" y="3606377"/>
+                </a:lnTo>
+                <a:lnTo>
+                  <a:pt x="1162617" y="3605870"/>
+                </a:lnTo>
+                <a:lnTo>
+                  <a:pt x="1170167" y="3605362"/>
+                </a:lnTo>
+                <a:lnTo>
+                  <a:pt x="1177716" y="3604852"/>
+                </a:lnTo>
+                <a:lnTo>
+                  <a:pt x="1185265" y="3604340"/>
+                </a:lnTo>
+                <a:lnTo>
+                  <a:pt x="1192815" y="3603826"/>
+                </a:lnTo>
+                <a:lnTo>
+                  <a:pt x="1200364" y="3603311"/>
+                </a:lnTo>
+                <a:lnTo>
+                  <a:pt x="1207914" y="3602794"/>
+                </a:lnTo>
+                <a:lnTo>
+                  <a:pt x="1215463" y="3602275"/>
+                </a:lnTo>
+                <a:lnTo>
+                  <a:pt x="1223013" y="3601754"/>
+                </a:lnTo>
+                <a:lnTo>
+                  <a:pt x="1230562" y="3601232"/>
+                </a:lnTo>
+                <a:lnTo>
+                  <a:pt x="1238112" y="3600708"/>
+                </a:lnTo>
+                <a:lnTo>
+                  <a:pt x="1245661" y="3600182"/>
+                </a:lnTo>
+                <a:lnTo>
+                  <a:pt x="1253211" y="3599655"/>
+                </a:lnTo>
+                <a:lnTo>
+                  <a:pt x="1260760" y="3599126"/>
+                </a:lnTo>
+                <a:lnTo>
+                  <a:pt x="1268310" y="3598595"/>
+                </a:lnTo>
+                <a:lnTo>
+                  <a:pt x="1275859" y="3598062"/>
+                </a:lnTo>
+                <a:lnTo>
+                  <a:pt x="1283409" y="3597528"/>
+                </a:lnTo>
+                <a:lnTo>
+                  <a:pt x="1290958" y="3596992"/>
+                </a:lnTo>
+                <a:lnTo>
+                  <a:pt x="1298507" y="3596454"/>
+                </a:lnTo>
+                <a:lnTo>
+                  <a:pt x="1306057" y="3595914"/>
+                </a:lnTo>
+                <a:lnTo>
+                  <a:pt x="1313606" y="3595373"/>
+                </a:lnTo>
+                <a:lnTo>
+                  <a:pt x="1321156" y="3594830"/>
+                </a:lnTo>
+                <a:lnTo>
+                  <a:pt x="1328705" y="3594286"/>
+                </a:lnTo>
+                <a:lnTo>
+                  <a:pt x="1336255" y="3593740"/>
+                </a:lnTo>
+                <a:lnTo>
+                  <a:pt x="1343804" y="3593192"/>
+                </a:lnTo>
+                <a:lnTo>
+                  <a:pt x="1351354" y="3592642"/>
+                </a:lnTo>
+                <a:lnTo>
+                  <a:pt x="1358903" y="3592090"/>
+                </a:lnTo>
+                <a:lnTo>
+                  <a:pt x="1366453" y="3591537"/>
+                </a:lnTo>
+                <a:lnTo>
+                  <a:pt x="1374002" y="3590983"/>
+                </a:lnTo>
+                <a:lnTo>
+                  <a:pt x="1381552" y="3590426"/>
+                </a:lnTo>
+                <a:lnTo>
+                  <a:pt x="1389101" y="3589868"/>
+                </a:lnTo>
+                <a:lnTo>
+                  <a:pt x="1396651" y="3589308"/>
+                </a:lnTo>
+                <a:lnTo>
+                  <a:pt x="1404200" y="3588747"/>
+                </a:lnTo>
+                <a:lnTo>
+                  <a:pt x="1411749" y="3588184"/>
+                </a:lnTo>
+                <a:lnTo>
+                  <a:pt x="1419299" y="3587619"/>
+                </a:lnTo>
+                <a:lnTo>
+                  <a:pt x="1426848" y="3587052"/>
+                </a:lnTo>
+                <a:lnTo>
+                  <a:pt x="1434398" y="3586484"/>
+                </a:lnTo>
+                <a:lnTo>
+                  <a:pt x="1441947" y="3585914"/>
+                </a:lnTo>
+                <a:lnTo>
+                  <a:pt x="1449497" y="3585342"/>
+                </a:lnTo>
+                <a:lnTo>
+                  <a:pt x="1457046" y="3584769"/>
+                </a:lnTo>
+                <a:lnTo>
+                  <a:pt x="1464596" y="3584194"/>
+                </a:lnTo>
+                <a:lnTo>
+                  <a:pt x="1472145" y="3583618"/>
+                </a:lnTo>
+                <a:lnTo>
+                  <a:pt x="1479695" y="3583039"/>
+                </a:lnTo>
+                <a:lnTo>
+                  <a:pt x="1487244" y="3582459"/>
+                </a:lnTo>
+                <a:lnTo>
+                  <a:pt x="1494794" y="3581878"/>
+                </a:lnTo>
+                <a:lnTo>
+                  <a:pt x="1502343" y="3581294"/>
+                </a:lnTo>
+                <a:lnTo>
+                  <a:pt x="1509892" y="3580709"/>
+                </a:lnTo>
+                <a:lnTo>
+                  <a:pt x="1517442" y="3580123"/>
+                </a:lnTo>
+                <a:lnTo>
+                  <a:pt x="1524991" y="3579534"/>
+                </a:lnTo>
+                <a:lnTo>
+                  <a:pt x="1532541" y="3578944"/>
+                </a:lnTo>
+                <a:lnTo>
+                  <a:pt x="1540090" y="3578352"/>
+                </a:lnTo>
+                <a:lnTo>
+                  <a:pt x="1547640" y="3577759"/>
+                </a:lnTo>
+                <a:lnTo>
+                  <a:pt x="1555189" y="3577164"/>
+                </a:lnTo>
+                <a:lnTo>
+                  <a:pt x="1562739" y="3576567"/>
+                </a:lnTo>
+                <a:lnTo>
+                  <a:pt x="1570288" y="3575969"/>
+                </a:lnTo>
+                <a:lnTo>
+                  <a:pt x="1577838" y="3575369"/>
+                </a:lnTo>
+                <a:lnTo>
+                  <a:pt x="1585387" y="3574767"/>
+                </a:lnTo>
+                <a:lnTo>
+                  <a:pt x="1592937" y="3574164"/>
+                </a:lnTo>
+                <a:lnTo>
+                  <a:pt x="1600486" y="3573559"/>
+                </a:lnTo>
+                <a:lnTo>
+                  <a:pt x="1608036" y="3572952"/>
+                </a:lnTo>
+                <a:lnTo>
+                  <a:pt x="1615585" y="3572343"/>
+                </a:lnTo>
+                <a:lnTo>
+                  <a:pt x="1623134" y="3571733"/>
+                </a:lnTo>
+                <a:lnTo>
+                  <a:pt x="1630684" y="3571121"/>
+                </a:lnTo>
+                <a:lnTo>
+                  <a:pt x="1638233" y="3570508"/>
+                </a:lnTo>
+                <a:lnTo>
+                  <a:pt x="1645783" y="3569893"/>
+                </a:lnTo>
+                <a:lnTo>
+                  <a:pt x="1653332" y="3569276"/>
+                </a:lnTo>
+                <a:lnTo>
+                  <a:pt x="1660882" y="3568657"/>
+                </a:lnTo>
+                <a:lnTo>
+                  <a:pt x="1668431" y="3568037"/>
+                </a:lnTo>
+                <a:lnTo>
+                  <a:pt x="1675981" y="3567415"/>
+                </a:lnTo>
+                <a:lnTo>
+                  <a:pt x="1683530" y="3566792"/>
+                </a:lnTo>
+                <a:lnTo>
+                  <a:pt x="1691080" y="3566167"/>
+                </a:lnTo>
+                <a:lnTo>
+                  <a:pt x="1698629" y="3565540"/>
+                </a:lnTo>
+                <a:lnTo>
+                  <a:pt x="1706179" y="3564911"/>
+                </a:lnTo>
+                <a:lnTo>
+                  <a:pt x="1713728" y="3564281"/>
+                </a:lnTo>
+                <a:lnTo>
+                  <a:pt x="1721278" y="3563649"/>
+                </a:lnTo>
+                <a:lnTo>
+                  <a:pt x="1728827" y="3563015"/>
+                </a:lnTo>
+                <a:lnTo>
+                  <a:pt x="1736376" y="3562380"/>
+                </a:lnTo>
+                <a:lnTo>
+                  <a:pt x="1743926" y="3561743"/>
+                </a:lnTo>
+                <a:lnTo>
+                  <a:pt x="1751475" y="3561104"/>
+                </a:lnTo>
+                <a:lnTo>
+                  <a:pt x="1759025" y="3560464"/>
+                </a:lnTo>
+                <a:lnTo>
+                  <a:pt x="1766574" y="3559822"/>
+                </a:lnTo>
+                <a:lnTo>
+                  <a:pt x="1774124" y="3559178"/>
+                </a:lnTo>
+                <a:lnTo>
+                  <a:pt x="1781673" y="3558533"/>
+                </a:lnTo>
+                <a:lnTo>
+                  <a:pt x="1789223" y="3557886"/>
+                </a:lnTo>
+                <a:lnTo>
+                  <a:pt x="1796772" y="3557237"/>
+                </a:lnTo>
+                <a:lnTo>
+                  <a:pt x="1804322" y="3556586"/>
+                </a:lnTo>
+                <a:lnTo>
+                  <a:pt x="1811871" y="3555934"/>
+                </a:lnTo>
+                <a:lnTo>
+                  <a:pt x="1819421" y="3555280"/>
+                </a:lnTo>
+                <a:lnTo>
+                  <a:pt x="1826970" y="3554625"/>
+                </a:lnTo>
+                <a:lnTo>
+                  <a:pt x="1834519" y="3553967"/>
+                </a:lnTo>
+                <a:lnTo>
+                  <a:pt x="1842069" y="3553308"/>
+                </a:lnTo>
+                <a:lnTo>
+                  <a:pt x="1849618" y="3552647"/>
+                </a:lnTo>
+                <a:lnTo>
+                  <a:pt x="1857168" y="3551985"/>
+                </a:lnTo>
+                <a:lnTo>
+                  <a:pt x="1864717" y="3551321"/>
+                </a:lnTo>
+                <a:lnTo>
+                  <a:pt x="1872267" y="3550655"/>
+                </a:lnTo>
+                <a:lnTo>
+                  <a:pt x="1879816" y="3549987"/>
+                </a:lnTo>
+                <a:lnTo>
+                  <a:pt x="1887366" y="3549318"/>
+                </a:lnTo>
+                <a:lnTo>
+                  <a:pt x="1894915" y="3548647"/>
+                </a:lnTo>
+                <a:lnTo>
+                  <a:pt x="1902465" y="3547974"/>
+                </a:lnTo>
+                <a:lnTo>
+                  <a:pt x="1910014" y="3547300"/>
+                </a:lnTo>
+                <a:lnTo>
+                  <a:pt x="1917564" y="3546623"/>
+                </a:lnTo>
+                <a:lnTo>
+                  <a:pt x="1925113" y="3545945"/>
+                </a:lnTo>
+                <a:lnTo>
+                  <a:pt x="1932663" y="3545266"/>
+                </a:lnTo>
+                <a:lnTo>
+                  <a:pt x="1940212" y="3544584"/>
+                </a:lnTo>
+                <a:lnTo>
+                  <a:pt x="1947761" y="3543901"/>
+                </a:lnTo>
+                <a:lnTo>
+                  <a:pt x="1955311" y="3543216"/>
+                </a:lnTo>
+                <a:lnTo>
+                  <a:pt x="1962860" y="3542530"/>
+                </a:lnTo>
+                <a:lnTo>
+                  <a:pt x="1970410" y="3541841"/>
+                </a:lnTo>
+                <a:lnTo>
+                  <a:pt x="1977959" y="3541151"/>
+                </a:lnTo>
+                <a:lnTo>
+                  <a:pt x="1985509" y="3540459"/>
+                </a:lnTo>
+                <a:lnTo>
+                  <a:pt x="1993058" y="3539766"/>
+                </a:lnTo>
+                <a:lnTo>
+                  <a:pt x="2000608" y="3539070"/>
+                </a:lnTo>
+                <a:lnTo>
+                  <a:pt x="2008157" y="3538373"/>
+                </a:lnTo>
+                <a:lnTo>
+                  <a:pt x="2015707" y="3537674"/>
+                </a:lnTo>
+                <a:lnTo>
+                  <a:pt x="2023256" y="3536973"/>
+                </a:lnTo>
+                <a:lnTo>
+                  <a:pt x="2030806" y="3536271"/>
+                </a:lnTo>
+                <a:lnTo>
+                  <a:pt x="2038355" y="3535567"/>
+                </a:lnTo>
+                <a:lnTo>
+                  <a:pt x="2045904" y="3534861"/>
+                </a:lnTo>
+                <a:lnTo>
+                  <a:pt x="2053454" y="3534153"/>
+                </a:lnTo>
+                <a:lnTo>
+                  <a:pt x="2061003" y="3533443"/>
+                </a:lnTo>
+                <a:lnTo>
+                  <a:pt x="2068553" y="3532732"/>
+                </a:lnTo>
+                <a:lnTo>
+                  <a:pt x="2076102" y="3532019"/>
+                </a:lnTo>
+                <a:lnTo>
+                  <a:pt x="2083652" y="3531304"/>
+                </a:lnTo>
+                <a:lnTo>
+                  <a:pt x="2091201" y="3530587"/>
+                </a:lnTo>
+                <a:lnTo>
+                  <a:pt x="2098751" y="3529868"/>
+                </a:lnTo>
+                <a:lnTo>
+                  <a:pt x="2106300" y="3529148"/>
+                </a:lnTo>
+                <a:lnTo>
+                  <a:pt x="2113850" y="3528426"/>
+                </a:lnTo>
+                <a:lnTo>
+                  <a:pt x="2121399" y="3527702"/>
+                </a:lnTo>
+                <a:lnTo>
+                  <a:pt x="2128949" y="3526976"/>
+                </a:lnTo>
+                <a:lnTo>
+                  <a:pt x="2136498" y="3526249"/>
+                </a:lnTo>
+                <a:lnTo>
+                  <a:pt x="2144048" y="3525519"/>
+                </a:lnTo>
+                <a:lnTo>
+                  <a:pt x="2151597" y="3524788"/>
+                </a:lnTo>
+                <a:lnTo>
+                  <a:pt x="2159146" y="3524055"/>
+                </a:lnTo>
+                <a:lnTo>
+                  <a:pt x="2166696" y="3523320"/>
+                </a:lnTo>
+                <a:lnTo>
+                  <a:pt x="2174245" y="3522583"/>
+                </a:lnTo>
+                <a:lnTo>
+                  <a:pt x="2181795" y="3521844"/>
+                </a:lnTo>
+                <a:lnTo>
+                  <a:pt x="2189344" y="3521104"/>
+                </a:lnTo>
+                <a:lnTo>
+                  <a:pt x="2196894" y="3520362"/>
+                </a:lnTo>
+                <a:lnTo>
+                  <a:pt x="2204443" y="3519617"/>
+                </a:lnTo>
+                <a:lnTo>
+                  <a:pt x="2211993" y="3518871"/>
+                </a:lnTo>
+                <a:lnTo>
+                  <a:pt x="2219542" y="3518123"/>
+                </a:lnTo>
+                <a:lnTo>
+                  <a:pt x="2227092" y="3517374"/>
+                </a:lnTo>
+                <a:lnTo>
+                  <a:pt x="2234641" y="3516622"/>
+                </a:lnTo>
+                <a:lnTo>
+                  <a:pt x="2242191" y="3515868"/>
+                </a:lnTo>
+                <a:lnTo>
+                  <a:pt x="2249740" y="3515113"/>
+                </a:lnTo>
+                <a:lnTo>
+                  <a:pt x="2257290" y="3514356"/>
+                </a:lnTo>
+                <a:lnTo>
+                  <a:pt x="2264839" y="3513596"/>
+                </a:lnTo>
+                <a:lnTo>
+                  <a:pt x="2272388" y="3512835"/>
+                </a:lnTo>
+                <a:lnTo>
+                  <a:pt x="2279938" y="3512072"/>
+                </a:lnTo>
+                <a:lnTo>
+                  <a:pt x="2287487" y="3511307"/>
+                </a:lnTo>
+                <a:lnTo>
+                  <a:pt x="2295037" y="3510540"/>
+                </a:lnTo>
+                <a:lnTo>
+                  <a:pt x="2302586" y="3509771"/>
+                </a:lnTo>
+                <a:lnTo>
+                  <a:pt x="2310136" y="3509001"/>
+                </a:lnTo>
+                <a:lnTo>
+                  <a:pt x="2317685" y="3508228"/>
+                </a:lnTo>
+                <a:lnTo>
+                  <a:pt x="2325235" y="3507453"/>
+                </a:lnTo>
+                <a:lnTo>
+                  <a:pt x="2332784" y="3506677"/>
+                </a:lnTo>
+                <a:lnTo>
+                  <a:pt x="2340334" y="3505898"/>
+                </a:lnTo>
+                <a:lnTo>
+                  <a:pt x="2347883" y="3505118"/>
+                </a:lnTo>
+                <a:lnTo>
+                  <a:pt x="2355433" y="3504335"/>
+                </a:lnTo>
+                <a:lnTo>
+                  <a:pt x="2362982" y="3503551"/>
+                </a:lnTo>
+                <a:lnTo>
+                  <a:pt x="2370531" y="3502765"/>
+                </a:lnTo>
+                <a:lnTo>
+                  <a:pt x="2378081" y="3501976"/>
+                </a:lnTo>
+                <a:lnTo>
+                  <a:pt x="2385630" y="3501186"/>
+                </a:lnTo>
+                <a:lnTo>
+                  <a:pt x="2393180" y="3500393"/>
+                </a:lnTo>
+                <a:lnTo>
+                  <a:pt x="2400729" y="3499599"/>
+                </a:lnTo>
+                <a:lnTo>
+                  <a:pt x="2408279" y="3498803"/>
+                </a:lnTo>
+                <a:lnTo>
+                  <a:pt x="2415828" y="3498004"/>
+                </a:lnTo>
+                <a:lnTo>
+                  <a:pt x="2423378" y="3497204"/>
+                </a:lnTo>
+                <a:lnTo>
+                  <a:pt x="2430927" y="3496402"/>
+                </a:lnTo>
+                <a:lnTo>
+                  <a:pt x="2438477" y="3495597"/>
+                </a:lnTo>
+                <a:lnTo>
+                  <a:pt x="2446026" y="3494791"/>
+                </a:lnTo>
+                <a:lnTo>
+                  <a:pt x="2453576" y="3493982"/>
+                </a:lnTo>
+                <a:lnTo>
+                  <a:pt x="2461125" y="3493172"/>
+                </a:lnTo>
+                <a:lnTo>
+                  <a:pt x="2468675" y="3492359"/>
+                </a:lnTo>
+                <a:lnTo>
+                  <a:pt x="2476224" y="3491544"/>
+                </a:lnTo>
+                <a:lnTo>
+                  <a:pt x="2483773" y="3490727"/>
+                </a:lnTo>
+                <a:lnTo>
+                  <a:pt x="2491323" y="3489909"/>
+                </a:lnTo>
+                <a:lnTo>
+                  <a:pt x="2498872" y="3489088"/>
+                </a:lnTo>
+                <a:lnTo>
+                  <a:pt x="2506422" y="3488265"/>
+                </a:lnTo>
+                <a:lnTo>
+                  <a:pt x="2513971" y="3487439"/>
+                </a:lnTo>
+                <a:lnTo>
+                  <a:pt x="2521521" y="3486612"/>
+                </a:lnTo>
+                <a:lnTo>
+                  <a:pt x="2529070" y="3485783"/>
+                </a:lnTo>
+                <a:lnTo>
+                  <a:pt x="2536620" y="3484951"/>
+                </a:lnTo>
+                <a:lnTo>
+                  <a:pt x="2544169" y="3484118"/>
+                </a:lnTo>
+                <a:lnTo>
+                  <a:pt x="2551719" y="3483282"/>
+                </a:lnTo>
+                <a:lnTo>
+                  <a:pt x="2559268" y="3482444"/>
+                </a:lnTo>
+                <a:lnTo>
+                  <a:pt x="2566818" y="3481604"/>
+                </a:lnTo>
+                <a:lnTo>
+                  <a:pt x="2574367" y="3480762"/>
+                </a:lnTo>
+                <a:lnTo>
+                  <a:pt x="2581917" y="3479917"/>
+                </a:lnTo>
+                <a:lnTo>
+                  <a:pt x="2589466" y="3479070"/>
+                </a:lnTo>
+                <a:lnTo>
+                  <a:pt x="2597015" y="3478222"/>
+                </a:lnTo>
+                <a:lnTo>
+                  <a:pt x="2604565" y="3477371"/>
+                </a:lnTo>
+                <a:lnTo>
+                  <a:pt x="2612114" y="3476518"/>
+                </a:lnTo>
+                <a:lnTo>
+                  <a:pt x="2619664" y="3475662"/>
+                </a:lnTo>
+                <a:lnTo>
+                  <a:pt x="2627213" y="3474804"/>
+                </a:lnTo>
+                <a:lnTo>
+                  <a:pt x="2634763" y="3473945"/>
+                </a:lnTo>
+                <a:lnTo>
+                  <a:pt x="2642312" y="3473082"/>
+                </a:lnTo>
+                <a:lnTo>
+                  <a:pt x="2649862" y="3472218"/>
+                </a:lnTo>
+                <a:lnTo>
+                  <a:pt x="2657411" y="3471351"/>
+                </a:lnTo>
+                <a:lnTo>
+                  <a:pt x="2664961" y="3470483"/>
+                </a:lnTo>
+                <a:lnTo>
+                  <a:pt x="2672510" y="3469611"/>
+                </a:lnTo>
+                <a:lnTo>
+                  <a:pt x="2680060" y="3468738"/>
+                </a:lnTo>
+                <a:lnTo>
+                  <a:pt x="2687609" y="3467862"/>
+                </a:lnTo>
+                <a:lnTo>
+                  <a:pt x="2695158" y="3466984"/>
+                </a:lnTo>
+                <a:lnTo>
+                  <a:pt x="2702708" y="3466104"/>
+                </a:lnTo>
+                <a:lnTo>
+                  <a:pt x="2710257" y="3465221"/>
+                </a:lnTo>
+                <a:lnTo>
+                  <a:pt x="2717807" y="3464336"/>
+                </a:lnTo>
+                <a:lnTo>
+                  <a:pt x="2725356" y="3463449"/>
+                </a:lnTo>
+                <a:lnTo>
+                  <a:pt x="2732906" y="3462559"/>
+                </a:lnTo>
+                <a:lnTo>
+                  <a:pt x="2740455" y="3461667"/>
+                </a:lnTo>
+                <a:lnTo>
+                  <a:pt x="2748005" y="3460772"/>
+                </a:lnTo>
+                <a:lnTo>
+                  <a:pt x="2755554" y="3459876"/>
+                </a:lnTo>
+                <a:lnTo>
+                  <a:pt x="2763104" y="3458976"/>
+                </a:lnTo>
+                <a:lnTo>
+                  <a:pt x="2770653" y="3458075"/>
+                </a:lnTo>
+                <a:lnTo>
+                  <a:pt x="2778203" y="3457171"/>
+                </a:lnTo>
+                <a:lnTo>
+                  <a:pt x="2785752" y="3456264"/>
+                </a:lnTo>
+                <a:lnTo>
+                  <a:pt x="2793302" y="3455355"/>
+                </a:lnTo>
+                <a:lnTo>
+                  <a:pt x="2800851" y="3454444"/>
+                </a:lnTo>
+                <a:lnTo>
+                  <a:pt x="2808400" y="3453530"/>
+                </a:lnTo>
+                <a:lnTo>
+                  <a:pt x="2815950" y="3452614"/>
+                </a:lnTo>
+                <a:lnTo>
+                  <a:pt x="2823499" y="3451695"/>
+                </a:lnTo>
+                <a:lnTo>
+                  <a:pt x="2831049" y="3450774"/>
+                </a:lnTo>
+                <a:lnTo>
+                  <a:pt x="2838598" y="3449850"/>
+                </a:lnTo>
+                <a:lnTo>
+                  <a:pt x="2846148" y="3448923"/>
+                </a:lnTo>
+                <a:lnTo>
+                  <a:pt x="2853697" y="3447995"/>
+                </a:lnTo>
+                <a:lnTo>
+                  <a:pt x="2861247" y="3447063"/>
+                </a:lnTo>
+                <a:lnTo>
+                  <a:pt x="2868796" y="3446129"/>
+                </a:lnTo>
+                <a:lnTo>
+                  <a:pt x="2876346" y="3445193"/>
+                </a:lnTo>
+                <a:lnTo>
+                  <a:pt x="2883895" y="3444254"/>
+                </a:lnTo>
+                <a:lnTo>
+                  <a:pt x="2891445" y="3443312"/>
+                </a:lnTo>
+                <a:lnTo>
+                  <a:pt x="2898994" y="3442368"/>
+                </a:lnTo>
+                <a:lnTo>
+                  <a:pt x="2906543" y="3441421"/>
+                </a:lnTo>
+                <a:lnTo>
+                  <a:pt x="2914093" y="3440471"/>
+                </a:lnTo>
+                <a:lnTo>
+                  <a:pt x="2921642" y="3439519"/>
+                </a:lnTo>
+                <a:lnTo>
+                  <a:pt x="2929192" y="3438565"/>
+                </a:lnTo>
+                <a:lnTo>
+                  <a:pt x="2936741" y="3437607"/>
+                </a:lnTo>
+                <a:lnTo>
+                  <a:pt x="2944291" y="3436647"/>
+                </a:lnTo>
+                <a:lnTo>
+                  <a:pt x="2951840" y="3435684"/>
+                </a:lnTo>
+                <a:lnTo>
+                  <a:pt x="2959390" y="3434719"/>
+                </a:lnTo>
+                <a:lnTo>
+                  <a:pt x="2966939" y="3433750"/>
+                </a:lnTo>
+                <a:lnTo>
+                  <a:pt x="2974489" y="3432779"/>
+                </a:lnTo>
+                <a:lnTo>
+                  <a:pt x="2982038" y="3431806"/>
+                </a:lnTo>
+                <a:lnTo>
+                  <a:pt x="2989588" y="3430829"/>
+                </a:lnTo>
+                <a:lnTo>
+                  <a:pt x="2997137" y="3429850"/>
+                </a:lnTo>
+                <a:lnTo>
+                  <a:pt x="3004687" y="3428868"/>
+                </a:lnTo>
+                <a:lnTo>
+                  <a:pt x="3012236" y="3427883"/>
+                </a:lnTo>
+                <a:lnTo>
+                  <a:pt x="3019785" y="3426896"/>
+                </a:lnTo>
+                <a:lnTo>
+                  <a:pt x="3027335" y="3425905"/>
+                </a:lnTo>
+                <a:lnTo>
+                  <a:pt x="3034884" y="3424912"/>
+                </a:lnTo>
+                <a:lnTo>
+                  <a:pt x="3042434" y="3423916"/>
+                </a:lnTo>
+                <a:lnTo>
+                  <a:pt x="3049983" y="3422917"/>
+                </a:lnTo>
+                <a:lnTo>
+                  <a:pt x="3057533" y="3421915"/>
+                </a:lnTo>
+                <a:lnTo>
+                  <a:pt x="3065082" y="3420910"/>
+                </a:lnTo>
+                <a:lnTo>
+                  <a:pt x="3072632" y="3419902"/>
+                </a:lnTo>
+                <a:lnTo>
+                  <a:pt x="3080181" y="3418891"/>
+                </a:lnTo>
+                <a:lnTo>
+                  <a:pt x="3087731" y="3417878"/>
+                </a:lnTo>
+                <a:lnTo>
+                  <a:pt x="3095280" y="3416861"/>
+                </a:lnTo>
+                <a:lnTo>
+                  <a:pt x="3102830" y="3415842"/>
+                </a:lnTo>
+                <a:lnTo>
+                  <a:pt x="3110379" y="3414819"/>
+                </a:lnTo>
+                <a:lnTo>
+                  <a:pt x="3117929" y="3413793"/>
+                </a:lnTo>
+                <a:lnTo>
+                  <a:pt x="3125478" y="3412765"/>
+                </a:lnTo>
+                <a:lnTo>
+                  <a:pt x="3133027" y="3411733"/>
+                </a:lnTo>
+                <a:lnTo>
+                  <a:pt x="3140577" y="3410698"/>
+                </a:lnTo>
+                <a:lnTo>
+                  <a:pt x="3148126" y="3409660"/>
+                </a:lnTo>
+                <a:lnTo>
+                  <a:pt x="3155676" y="3408619"/>
+                </a:lnTo>
+                <a:lnTo>
+                  <a:pt x="3163225" y="3407575"/>
+                </a:lnTo>
+                <a:lnTo>
+                  <a:pt x="3170775" y="3406528"/>
+                </a:lnTo>
+                <a:lnTo>
+                  <a:pt x="3178324" y="3405478"/>
+                </a:lnTo>
+                <a:lnTo>
+                  <a:pt x="3185874" y="3404424"/>
+                </a:lnTo>
+                <a:lnTo>
+                  <a:pt x="3193423" y="3403367"/>
+                </a:lnTo>
+                <a:lnTo>
+                  <a:pt x="3200973" y="3402307"/>
+                </a:lnTo>
+                <a:lnTo>
+                  <a:pt x="3208522" y="3401244"/>
+                </a:lnTo>
+                <a:lnTo>
+                  <a:pt x="3216072" y="3400178"/>
+                </a:lnTo>
+                <a:lnTo>
+                  <a:pt x="3223621" y="3399108"/>
+                </a:lnTo>
+                <a:lnTo>
+                  <a:pt x="3231170" y="3398035"/>
+                </a:lnTo>
+                <a:lnTo>
+                  <a:pt x="3238720" y="3396959"/>
+                </a:lnTo>
+                <a:lnTo>
+                  <a:pt x="3246269" y="3395879"/>
+                </a:lnTo>
+                <a:lnTo>
+                  <a:pt x="3253819" y="3394796"/>
+                </a:lnTo>
+                <a:lnTo>
+                  <a:pt x="3261368" y="3393710"/>
+                </a:lnTo>
+                <a:lnTo>
+                  <a:pt x="3268918" y="3392620"/>
+                </a:lnTo>
+                <a:lnTo>
+                  <a:pt x="3276467" y="3391527"/>
+                </a:lnTo>
+                <a:lnTo>
+                  <a:pt x="3284017" y="3390431"/>
+                </a:lnTo>
+                <a:lnTo>
+                  <a:pt x="3291566" y="3389331"/>
+                </a:lnTo>
+                <a:lnTo>
+                  <a:pt x="3299116" y="3388227"/>
+                </a:lnTo>
+                <a:lnTo>
+                  <a:pt x="3306665" y="3387121"/>
+                </a:lnTo>
+                <a:lnTo>
+                  <a:pt x="3314215" y="3386010"/>
+                </a:lnTo>
+                <a:lnTo>
+                  <a:pt x="3321764" y="3384896"/>
+                </a:lnTo>
+                <a:lnTo>
+                  <a:pt x="3329314" y="3383779"/>
+                </a:lnTo>
+                <a:lnTo>
+                  <a:pt x="3336863" y="3382658"/>
+                </a:lnTo>
+                <a:lnTo>
+                  <a:pt x="3344412" y="3381533"/>
+                </a:lnTo>
+                <a:lnTo>
+                  <a:pt x="3351962" y="3380405"/>
+                </a:lnTo>
+                <a:lnTo>
+                  <a:pt x="3359511" y="3379273"/>
+                </a:lnTo>
+                <a:lnTo>
+                  <a:pt x="3367061" y="3378137"/>
+                </a:lnTo>
+                <a:lnTo>
+                  <a:pt x="3374610" y="3376998"/>
+                </a:lnTo>
+                <a:lnTo>
+                  <a:pt x="3382160" y="3375855"/>
+                </a:lnTo>
+                <a:lnTo>
+                  <a:pt x="3389709" y="3374708"/>
+                </a:lnTo>
+                <a:lnTo>
+                  <a:pt x="3397259" y="3373558"/>
+                </a:lnTo>
+                <a:lnTo>
+                  <a:pt x="3404808" y="3372403"/>
+                </a:lnTo>
+                <a:lnTo>
+                  <a:pt x="3412358" y="3371245"/>
+                </a:lnTo>
+                <a:lnTo>
+                  <a:pt x="3419907" y="3370084"/>
+                </a:lnTo>
+                <a:lnTo>
+                  <a:pt x="3427457" y="3368918"/>
+                </a:lnTo>
+                <a:lnTo>
+                  <a:pt x="3435006" y="3367748"/>
+                </a:lnTo>
+                <a:lnTo>
+                  <a:pt x="3442556" y="3366575"/>
+                </a:lnTo>
+                <a:lnTo>
+                  <a:pt x="3450105" y="3365397"/>
+                </a:lnTo>
+                <a:lnTo>
+                  <a:pt x="3457654" y="3364216"/>
+                </a:lnTo>
+                <a:lnTo>
+                  <a:pt x="3465204" y="3363030"/>
+                </a:lnTo>
+                <a:lnTo>
+                  <a:pt x="3472753" y="3361841"/>
+                </a:lnTo>
+                <a:lnTo>
+                  <a:pt x="3480303" y="3360647"/>
+                </a:lnTo>
+                <a:lnTo>
+                  <a:pt x="3487852" y="3359450"/>
+                </a:lnTo>
+                <a:lnTo>
+                  <a:pt x="3495402" y="3358248"/>
+                </a:lnTo>
+                <a:lnTo>
+                  <a:pt x="3502951" y="3357042"/>
+                </a:lnTo>
+                <a:lnTo>
+                  <a:pt x="3510501" y="3355833"/>
+                </a:lnTo>
+                <a:lnTo>
+                  <a:pt x="3518050" y="3354618"/>
+                </a:lnTo>
+                <a:lnTo>
+                  <a:pt x="3525600" y="3353400"/>
+                </a:lnTo>
+                <a:lnTo>
+                  <a:pt x="3533149" y="3352178"/>
+                </a:lnTo>
+                <a:lnTo>
+                  <a:pt x="3540699" y="3350951"/>
+                </a:lnTo>
+                <a:lnTo>
+                  <a:pt x="3548248" y="3349720"/>
+                </a:lnTo>
+                <a:lnTo>
+                  <a:pt x="3555797" y="3348484"/>
+                </a:lnTo>
+                <a:lnTo>
+                  <a:pt x="3563347" y="3347245"/>
+                </a:lnTo>
+                <a:lnTo>
+                  <a:pt x="3570896" y="3346001"/>
+                </a:lnTo>
+                <a:lnTo>
+                  <a:pt x="3578446" y="3344752"/>
+                </a:lnTo>
+                <a:lnTo>
+                  <a:pt x="3585995" y="3343499"/>
+                </a:lnTo>
+                <a:lnTo>
+                  <a:pt x="3593545" y="3342241"/>
+                </a:lnTo>
+                <a:lnTo>
+                  <a:pt x="3601094" y="3340979"/>
+                </a:lnTo>
+                <a:lnTo>
+                  <a:pt x="3608644" y="3339713"/>
+                </a:lnTo>
+                <a:lnTo>
+                  <a:pt x="3616193" y="3338442"/>
+                </a:lnTo>
+                <a:lnTo>
+                  <a:pt x="3623743" y="3337166"/>
+                </a:lnTo>
+                <a:lnTo>
+                  <a:pt x="3631292" y="3335886"/>
+                </a:lnTo>
+                <a:lnTo>
+                  <a:pt x="3638842" y="3334601"/>
+                </a:lnTo>
+                <a:lnTo>
+                  <a:pt x="3646391" y="3333311"/>
+                </a:lnTo>
+                <a:lnTo>
+                  <a:pt x="3653941" y="3332017"/>
+                </a:lnTo>
+                <a:lnTo>
+                  <a:pt x="3661490" y="3330717"/>
+                </a:lnTo>
+                <a:lnTo>
+                  <a:pt x="3669039" y="3329413"/>
+                </a:lnTo>
+                <a:lnTo>
+                  <a:pt x="3676589" y="3328104"/>
+                </a:lnTo>
+                <a:lnTo>
+                  <a:pt x="3684138" y="3326790"/>
+                </a:lnTo>
+                <a:lnTo>
+                  <a:pt x="3691688" y="3325472"/>
+                </a:lnTo>
+                <a:lnTo>
+                  <a:pt x="3699237" y="3324148"/>
+                </a:lnTo>
+                <a:lnTo>
+                  <a:pt x="3706787" y="3322819"/>
+                </a:lnTo>
+                <a:lnTo>
+                  <a:pt x="3714336" y="3321486"/>
+                </a:lnTo>
+                <a:lnTo>
+                  <a:pt x="3721886" y="3320147"/>
+                </a:lnTo>
+                <a:lnTo>
+                  <a:pt x="3729435" y="3318803"/>
+                </a:lnTo>
+                <a:lnTo>
+                  <a:pt x="3736985" y="3317454"/>
+                </a:lnTo>
+                <a:lnTo>
+                  <a:pt x="3744534" y="3316099"/>
+                </a:lnTo>
+                <a:lnTo>
+                  <a:pt x="3752084" y="3314740"/>
+                </a:lnTo>
+                <a:lnTo>
+                  <a:pt x="3759633" y="3313375"/>
+                </a:lnTo>
+                <a:lnTo>
+                  <a:pt x="3767183" y="3312005"/>
+                </a:lnTo>
+                <a:lnTo>
+                  <a:pt x="3774732" y="3310630"/>
+                </a:lnTo>
+                <a:lnTo>
+                  <a:pt x="3782281" y="3309249"/>
+                </a:lnTo>
+                <a:lnTo>
+                  <a:pt x="3789831" y="3307863"/>
+                </a:lnTo>
+                <a:lnTo>
+                  <a:pt x="3797380" y="3306471"/>
+                </a:lnTo>
+                <a:lnTo>
+                  <a:pt x="3804930" y="3305074"/>
+                </a:lnTo>
+                <a:lnTo>
+                  <a:pt x="3812479" y="3303671"/>
+                </a:lnTo>
+                <a:lnTo>
+                  <a:pt x="3820029" y="3302262"/>
+                </a:lnTo>
+                <a:lnTo>
+                  <a:pt x="3827578" y="3300848"/>
+                </a:lnTo>
+                <a:lnTo>
+                  <a:pt x="3835128" y="3299428"/>
+                </a:lnTo>
+                <a:lnTo>
+                  <a:pt x="3842677" y="3298003"/>
+                </a:lnTo>
+                <a:lnTo>
+                  <a:pt x="3850227" y="3296571"/>
+                </a:lnTo>
+                <a:lnTo>
+                  <a:pt x="3857776" y="3295134"/>
+                </a:lnTo>
+                <a:lnTo>
+                  <a:pt x="3865326" y="3293691"/>
+                </a:lnTo>
+                <a:lnTo>
+                  <a:pt x="3872875" y="3292242"/>
+                </a:lnTo>
+                <a:lnTo>
+                  <a:pt x="3880424" y="3290787"/>
+                </a:lnTo>
+                <a:lnTo>
+                  <a:pt x="3887974" y="3289326"/>
+                </a:lnTo>
+                <a:lnTo>
+                  <a:pt x="3895523" y="3287859"/>
+                </a:lnTo>
+                <a:lnTo>
+                  <a:pt x="3903073" y="3286385"/>
+                </a:lnTo>
+                <a:lnTo>
+                  <a:pt x="3910622" y="3284906"/>
+                </a:lnTo>
+                <a:lnTo>
+                  <a:pt x="3918172" y="3283420"/>
+                </a:lnTo>
+                <a:lnTo>
+                  <a:pt x="3925721" y="3281928"/>
+                </a:lnTo>
+                <a:lnTo>
+                  <a:pt x="3933271" y="3280430"/>
+                </a:lnTo>
+                <a:lnTo>
+                  <a:pt x="3940820" y="3278925"/>
+                </a:lnTo>
+                <a:lnTo>
+                  <a:pt x="3948370" y="3277414"/>
+                </a:lnTo>
+                <a:lnTo>
+                  <a:pt x="3955919" y="3275896"/>
+                </a:lnTo>
+                <a:lnTo>
+                  <a:pt x="3963469" y="3274371"/>
+                </a:lnTo>
+                <a:lnTo>
+                  <a:pt x="3971018" y="3272840"/>
+                </a:lnTo>
+                <a:lnTo>
+                  <a:pt x="3978568" y="3271303"/>
+                </a:lnTo>
+                <a:lnTo>
+                  <a:pt x="3986117" y="3269758"/>
+                </a:lnTo>
+                <a:lnTo>
+                  <a:pt x="3993666" y="3268207"/>
+                </a:lnTo>
+                <a:lnTo>
+                  <a:pt x="4001216" y="3266649"/>
+                </a:lnTo>
+                <a:lnTo>
+                  <a:pt x="4008765" y="3265084"/>
+                </a:lnTo>
+                <a:lnTo>
+                  <a:pt x="4016315" y="3263512"/>
+                </a:lnTo>
+                <a:lnTo>
+                  <a:pt x="4023864" y="3261933"/>
+                </a:lnTo>
+                <a:lnTo>
+                  <a:pt x="4031414" y="3260347"/>
+                </a:lnTo>
+                <a:lnTo>
+                  <a:pt x="4038963" y="3258753"/>
+                </a:lnTo>
+                <a:lnTo>
+                  <a:pt x="4046513" y="3257153"/>
+                </a:lnTo>
+                <a:lnTo>
+                  <a:pt x="4054062" y="3255545"/>
+                </a:lnTo>
+                <a:lnTo>
+                  <a:pt x="4061612" y="3253930"/>
+                </a:lnTo>
+                <a:lnTo>
+                  <a:pt x="4069161" y="3252307"/>
+                </a:lnTo>
+                <a:lnTo>
+                  <a:pt x="4076711" y="3250677"/>
+                </a:lnTo>
+                <a:lnTo>
+                  <a:pt x="4084260" y="3249039"/>
+                </a:lnTo>
+                <a:lnTo>
+                  <a:pt x="4091809" y="3247393"/>
+                </a:lnTo>
+                <a:lnTo>
+                  <a:pt x="4099359" y="3245740"/>
+                </a:lnTo>
+                <a:lnTo>
+                  <a:pt x="4106908" y="3244079"/>
+                </a:lnTo>
+                <a:lnTo>
+                  <a:pt x="4114458" y="3242410"/>
+                </a:lnTo>
+                <a:lnTo>
+                  <a:pt x="4122007" y="3240734"/>
+                </a:lnTo>
+                <a:lnTo>
+                  <a:pt x="4129557" y="3239049"/>
+                </a:lnTo>
+                <a:lnTo>
+                  <a:pt x="4137106" y="3237356"/>
+                </a:lnTo>
+                <a:lnTo>
+                  <a:pt x="4144656" y="3235655"/>
+                </a:lnTo>
+                <a:lnTo>
+                  <a:pt x="4152205" y="3233946"/>
+                </a:lnTo>
+                <a:lnTo>
+                  <a:pt x="4159755" y="3232228"/>
+                </a:lnTo>
+                <a:lnTo>
+                  <a:pt x="4167304" y="3230502"/>
+                </a:lnTo>
+                <a:lnTo>
+                  <a:pt x="4174854" y="3228767"/>
+                </a:lnTo>
+                <a:lnTo>
+                  <a:pt x="4182403" y="3227024"/>
+                </a:lnTo>
+                <a:lnTo>
+                  <a:pt x="4189953" y="3225272"/>
+                </a:lnTo>
+                <a:lnTo>
+                  <a:pt x="4197502" y="3223512"/>
+                </a:lnTo>
+                <a:lnTo>
+                  <a:pt x="4205051" y="3221743"/>
+                </a:lnTo>
+                <a:lnTo>
+                  <a:pt x="4212601" y="3219964"/>
+                </a:lnTo>
+                <a:lnTo>
+                  <a:pt x="4220150" y="3218177"/>
+                </a:lnTo>
+                <a:lnTo>
+                  <a:pt x="4227700" y="3216381"/>
+                </a:lnTo>
+                <a:lnTo>
+                  <a:pt x="4235249" y="3214575"/>
+                </a:lnTo>
+                <a:lnTo>
+                  <a:pt x="4242799" y="3212760"/>
+                </a:lnTo>
+                <a:lnTo>
+                  <a:pt x="4250348" y="3210936"/>
+                </a:lnTo>
+                <a:lnTo>
+                  <a:pt x="4257898" y="3209102"/>
+                </a:lnTo>
+                <a:lnTo>
+                  <a:pt x="4265447" y="3207259"/>
+                </a:lnTo>
+                <a:lnTo>
+                  <a:pt x="4272997" y="3205406"/>
+                </a:lnTo>
+                <a:lnTo>
+                  <a:pt x="4280546" y="3203543"/>
+                </a:lnTo>
+                <a:lnTo>
+                  <a:pt x="4288096" y="3201671"/>
+                </a:lnTo>
+                <a:lnTo>
+                  <a:pt x="4295645" y="3199788"/>
+                </a:lnTo>
+                <a:lnTo>
+                  <a:pt x="4303195" y="3197896"/>
+                </a:lnTo>
+                <a:lnTo>
+                  <a:pt x="4310744" y="3195993"/>
+                </a:lnTo>
+                <a:lnTo>
+                  <a:pt x="4318293" y="3194080"/>
+                </a:lnTo>
+                <a:lnTo>
+                  <a:pt x="4325843" y="3192156"/>
+                </a:lnTo>
+                <a:lnTo>
+                  <a:pt x="4333392" y="3190222"/>
+                </a:lnTo>
+                <a:lnTo>
+                  <a:pt x="4340942" y="3188278"/>
+                </a:lnTo>
+                <a:lnTo>
+                  <a:pt x="4348491" y="3186322"/>
+                </a:lnTo>
+                <a:lnTo>
+                  <a:pt x="4356041" y="3184356"/>
+                </a:lnTo>
+                <a:lnTo>
+                  <a:pt x="4363590" y="3182379"/>
+                </a:lnTo>
+                <a:lnTo>
+                  <a:pt x="4371140" y="3180390"/>
+                </a:lnTo>
+                <a:lnTo>
+                  <a:pt x="4378689" y="3178391"/>
+                </a:lnTo>
+                <a:lnTo>
+                  <a:pt x="4386239" y="3176380"/>
+                </a:lnTo>
+                <a:lnTo>
+                  <a:pt x="4393788" y="3174358"/>
+                </a:lnTo>
+                <a:lnTo>
+                  <a:pt x="4401338" y="3172324"/>
+                </a:lnTo>
+                <a:lnTo>
+                  <a:pt x="4408887" y="3170278"/>
+                </a:lnTo>
+                <a:lnTo>
+                  <a:pt x="4416436" y="3168220"/>
+                </a:lnTo>
+                <a:lnTo>
+                  <a:pt x="4423986" y="3166151"/>
+                </a:lnTo>
+                <a:lnTo>
+                  <a:pt x="4431535" y="3164069"/>
+                </a:lnTo>
+                <a:lnTo>
+                  <a:pt x="4439085" y="3161975"/>
+                </a:lnTo>
+                <a:lnTo>
+                  <a:pt x="4446634" y="3159869"/>
+                </a:lnTo>
+                <a:lnTo>
+                  <a:pt x="4454184" y="3157750"/>
+                </a:lnTo>
+                <a:lnTo>
+                  <a:pt x="4461733" y="3155618"/>
+                </a:lnTo>
+                <a:lnTo>
+                  <a:pt x="4469283" y="3153474"/>
+                </a:lnTo>
+                <a:lnTo>
+                  <a:pt x="4476832" y="3151317"/>
+                </a:lnTo>
+                <a:lnTo>
+                  <a:pt x="4484382" y="3149146"/>
+                </a:lnTo>
+                <a:lnTo>
+                  <a:pt x="4491931" y="3146962"/>
+                </a:lnTo>
+                <a:lnTo>
+                  <a:pt x="4499481" y="3144765"/>
+                </a:lnTo>
+                <a:lnTo>
+                  <a:pt x="4507030" y="3142554"/>
+                </a:lnTo>
+                <a:lnTo>
+                  <a:pt x="4514580" y="3140329"/>
+                </a:lnTo>
+                <a:lnTo>
+                  <a:pt x="4522129" y="3138090"/>
+                </a:lnTo>
+                <a:lnTo>
+                  <a:pt x="4529678" y="3135837"/>
+                </a:lnTo>
+                <a:lnTo>
+                  <a:pt x="4537228" y="3133570"/>
+                </a:lnTo>
+                <a:lnTo>
+                  <a:pt x="4544777" y="3131289"/>
+                </a:lnTo>
+                <a:lnTo>
+                  <a:pt x="4552327" y="3128992"/>
+                </a:lnTo>
+                <a:lnTo>
+                  <a:pt x="4559876" y="3126681"/>
+                </a:lnTo>
+                <a:lnTo>
+                  <a:pt x="4567426" y="3124355"/>
+                </a:lnTo>
+                <a:lnTo>
+                  <a:pt x="4574975" y="3122014"/>
+                </a:lnTo>
+                <a:lnTo>
+                  <a:pt x="4582525" y="3119657"/>
+                </a:lnTo>
+                <a:lnTo>
+                  <a:pt x="4590074" y="3117284"/>
+                </a:lnTo>
+                <a:lnTo>
+                  <a:pt x="4597624" y="3114896"/>
+                </a:lnTo>
+                <a:lnTo>
+                  <a:pt x="4605173" y="3112492"/>
+                </a:lnTo>
+                <a:lnTo>
+                  <a:pt x="4612723" y="3110072"/>
+                </a:lnTo>
+                <a:lnTo>
+                  <a:pt x="4620272" y="3107635"/>
+                </a:lnTo>
+                <a:lnTo>
+                  <a:pt x="4627822" y="3105182"/>
+                </a:lnTo>
+                <a:lnTo>
+                  <a:pt x="4635371" y="3102711"/>
+                </a:lnTo>
+                <a:lnTo>
+                  <a:pt x="4642920" y="3100224"/>
+                </a:lnTo>
+                <a:lnTo>
+                  <a:pt x="4650470" y="3097719"/>
+                </a:lnTo>
+                <a:lnTo>
+                  <a:pt x="4658019" y="3095197"/>
+                </a:lnTo>
+                <a:lnTo>
+                  <a:pt x="4665569" y="3092657"/>
+                </a:lnTo>
+                <a:lnTo>
+                  <a:pt x="4673118" y="3090099"/>
+                </a:lnTo>
+                <a:lnTo>
+                  <a:pt x="4680668" y="3087523"/>
+                </a:lnTo>
+                <a:lnTo>
+                  <a:pt x="4688217" y="3084928"/>
+                </a:lnTo>
+                <a:lnTo>
+                  <a:pt x="4695767" y="3082315"/>
+                </a:lnTo>
+                <a:lnTo>
+                  <a:pt x="4703316" y="3079683"/>
+                </a:lnTo>
+                <a:lnTo>
+                  <a:pt x="4710866" y="3077031"/>
+                </a:lnTo>
+                <a:lnTo>
+                  <a:pt x="4718415" y="3074360"/>
+                </a:lnTo>
+                <a:lnTo>
+                  <a:pt x="4725965" y="3071669"/>
+                </a:lnTo>
+                <a:lnTo>
+                  <a:pt x="4733514" y="3068957"/>
+                </a:lnTo>
+                <a:lnTo>
+                  <a:pt x="4741063" y="3066226"/>
+                </a:lnTo>
+                <a:lnTo>
+                  <a:pt x="4748613" y="3063474"/>
+                </a:lnTo>
+                <a:lnTo>
+                  <a:pt x="4756162" y="3060700"/>
+                </a:lnTo>
+                <a:lnTo>
+                  <a:pt x="4763712" y="3057906"/>
+                </a:lnTo>
+                <a:lnTo>
+                  <a:pt x="4771261" y="3055090"/>
+                </a:lnTo>
+                <a:lnTo>
+                  <a:pt x="4778811" y="3052252"/>
+                </a:lnTo>
+                <a:lnTo>
+                  <a:pt x="4786360" y="3049392"/>
+                </a:lnTo>
+                <a:lnTo>
+                  <a:pt x="4793910" y="3046509"/>
+                </a:lnTo>
+                <a:lnTo>
+                  <a:pt x="4801459" y="3043603"/>
+                </a:lnTo>
+                <a:lnTo>
+                  <a:pt x="4809009" y="3040675"/>
+                </a:lnTo>
+                <a:lnTo>
+                  <a:pt x="4816558" y="3037722"/>
+                </a:lnTo>
+                <a:lnTo>
+                  <a:pt x="4824108" y="3034746"/>
+                </a:lnTo>
+                <a:lnTo>
+                  <a:pt x="4831657" y="3031745"/>
+                </a:lnTo>
+                <a:lnTo>
+                  <a:pt x="4839207" y="3028720"/>
+                </a:lnTo>
+                <a:lnTo>
+                  <a:pt x="4846756" y="3025669"/>
+                </a:lnTo>
+                <a:lnTo>
+                  <a:pt x="4854305" y="3022593"/>
+                </a:lnTo>
+                <a:lnTo>
+                  <a:pt x="4861855" y="3019492"/>
+                </a:lnTo>
+                <a:lnTo>
+                  <a:pt x="4869404" y="3016364"/>
+                </a:lnTo>
+                <a:lnTo>
+                  <a:pt x="4876954" y="3013209"/>
+                </a:lnTo>
+                <a:lnTo>
+                  <a:pt x="4884503" y="3010027"/>
+                </a:lnTo>
+                <a:lnTo>
+                  <a:pt x="4892053" y="3006818"/>
+                </a:lnTo>
+                <a:lnTo>
+                  <a:pt x="4899602" y="3003580"/>
+                </a:lnTo>
+                <a:lnTo>
+                  <a:pt x="4907152" y="3000315"/>
+                </a:lnTo>
+                <a:lnTo>
+                  <a:pt x="4914701" y="2997020"/>
+                </a:lnTo>
+                <a:lnTo>
+                  <a:pt x="4922251" y="2993696"/>
+                </a:lnTo>
+                <a:lnTo>
+                  <a:pt x="4929800" y="2990342"/>
+                </a:lnTo>
+                <a:lnTo>
+                  <a:pt x="4937350" y="2986957"/>
+                </a:lnTo>
+                <a:lnTo>
+                  <a:pt x="4944899" y="2983542"/>
+                </a:lnTo>
+                <a:lnTo>
+                  <a:pt x="4952448" y="2980095"/>
+                </a:lnTo>
+                <a:lnTo>
+                  <a:pt x="4959998" y="2976616"/>
+                </a:lnTo>
+                <a:lnTo>
+                  <a:pt x="4967547" y="2973105"/>
+                </a:lnTo>
+                <a:lnTo>
+                  <a:pt x="4975097" y="2969561"/>
+                </a:lnTo>
+                <a:lnTo>
+                  <a:pt x="4982646" y="2965983"/>
+                </a:lnTo>
+                <a:lnTo>
+                  <a:pt x="4990196" y="2962370"/>
+                </a:lnTo>
+                <a:lnTo>
+                  <a:pt x="4997745" y="2958723"/>
+                </a:lnTo>
+                <a:lnTo>
+                  <a:pt x="5005295" y="2955040"/>
+                </a:lnTo>
+                <a:lnTo>
+                  <a:pt x="5012844" y="2951321"/>
+                </a:lnTo>
+                <a:lnTo>
+                  <a:pt x="5020394" y="2947565"/>
+                </a:lnTo>
+                <a:lnTo>
+                  <a:pt x="5027943" y="2943772"/>
+                </a:lnTo>
+                <a:lnTo>
+                  <a:pt x="5035493" y="2939941"/>
+                </a:lnTo>
+                <a:lnTo>
+                  <a:pt x="5043042" y="2936071"/>
+                </a:lnTo>
+                <a:lnTo>
+                  <a:pt x="5050592" y="2932161"/>
+                </a:lnTo>
+                <a:lnTo>
+                  <a:pt x="5058141" y="2928210"/>
+                </a:lnTo>
+                <a:lnTo>
+                  <a:pt x="5065690" y="2924219"/>
+                </a:lnTo>
+                <a:lnTo>
+                  <a:pt x="5073240" y="2920185"/>
+                </a:lnTo>
+                <a:lnTo>
+                  <a:pt x="5080789" y="2916109"/>
+                </a:lnTo>
+                <a:lnTo>
+                  <a:pt x="5088339" y="2911990"/>
+                </a:lnTo>
+                <a:lnTo>
+                  <a:pt x="5095888" y="2907825"/>
+                </a:lnTo>
+                <a:lnTo>
+                  <a:pt x="5103438" y="2903616"/>
+                </a:lnTo>
+                <a:lnTo>
+                  <a:pt x="5110987" y="2899360"/>
+                </a:lnTo>
+                <a:lnTo>
+                  <a:pt x="5118537" y="2895057"/>
+                </a:lnTo>
+                <a:lnTo>
+                  <a:pt x="5126086" y="2890706"/>
+                </a:lnTo>
+                <a:lnTo>
+                  <a:pt x="5133636" y="2886306"/>
+                </a:lnTo>
+                <a:lnTo>
+                  <a:pt x="5141185" y="2881856"/>
+                </a:lnTo>
+                <a:lnTo>
+                  <a:pt x="5148735" y="2877354"/>
+                </a:lnTo>
+                <a:lnTo>
+                  <a:pt x="5156284" y="2872801"/>
+                </a:lnTo>
+                <a:lnTo>
+                  <a:pt x="5163834" y="2868194"/>
+                </a:lnTo>
+                <a:lnTo>
+                  <a:pt x="5171383" y="2863532"/>
+                </a:lnTo>
+                <a:lnTo>
+                  <a:pt x="5178932" y="2858815"/>
+                </a:lnTo>
+                <a:lnTo>
+                  <a:pt x="5186482" y="2854041"/>
+                </a:lnTo>
+                <a:lnTo>
+                  <a:pt x="5194031" y="2849208"/>
+                </a:lnTo>
+                <a:lnTo>
+                  <a:pt x="5201581" y="2844316"/>
+                </a:lnTo>
+                <a:lnTo>
+                  <a:pt x="5209130" y="2839364"/>
+                </a:lnTo>
+                <a:lnTo>
+                  <a:pt x="5216680" y="2834349"/>
+                </a:lnTo>
+                <a:lnTo>
+                  <a:pt x="5224229" y="2829271"/>
+                </a:lnTo>
+                <a:lnTo>
+                  <a:pt x="5231779" y="2824127"/>
+                </a:lnTo>
+                <a:lnTo>
+                  <a:pt x="5239328" y="2818917"/>
+                </a:lnTo>
+                <a:lnTo>
+                  <a:pt x="5246878" y="2813639"/>
+                </a:lnTo>
+                <a:lnTo>
+                  <a:pt x="5254427" y="2808291"/>
+                </a:lnTo>
+                <a:lnTo>
+                  <a:pt x="5261977" y="2802872"/>
+                </a:lnTo>
+                <a:lnTo>
+                  <a:pt x="5269526" y="2797379"/>
+                </a:lnTo>
+                <a:lnTo>
+                  <a:pt x="5277075" y="2791812"/>
+                </a:lnTo>
+                <a:lnTo>
+                  <a:pt x="5284625" y="2786167"/>
+                </a:lnTo>
+                <a:lnTo>
+                  <a:pt x="5292174" y="2780444"/>
+                </a:lnTo>
+                <a:lnTo>
+                  <a:pt x="5299724" y="2774641"/>
+                </a:lnTo>
+                <a:lnTo>
+                  <a:pt x="5307273" y="2768754"/>
+                </a:lnTo>
+                <a:lnTo>
+                  <a:pt x="5314823" y="2762783"/>
+                </a:lnTo>
+                <a:lnTo>
+                  <a:pt x="5322372" y="2756724"/>
+                </a:lnTo>
+                <a:lnTo>
+                  <a:pt x="5329922" y="2750576"/>
+                </a:lnTo>
+                <a:lnTo>
+                  <a:pt x="5337471" y="2744337"/>
+                </a:lnTo>
+                <a:lnTo>
+                  <a:pt x="5345021" y="2738003"/>
+                </a:lnTo>
+                <a:lnTo>
+                  <a:pt x="5352570" y="2731572"/>
+                </a:lnTo>
+                <a:lnTo>
+                  <a:pt x="5360120" y="2725042"/>
+                </a:lnTo>
+                <a:lnTo>
+                  <a:pt x="5367669" y="2718409"/>
+                </a:lnTo>
+                <a:lnTo>
+                  <a:pt x="5375219" y="2711671"/>
+                </a:lnTo>
+                <a:lnTo>
+                  <a:pt x="5382768" y="2704826"/>
+                </a:lnTo>
+                <a:lnTo>
+                  <a:pt x="5390317" y="2697869"/>
+                </a:lnTo>
+                <a:lnTo>
+                  <a:pt x="5397867" y="2690797"/>
+                </a:lnTo>
+                <a:lnTo>
+                  <a:pt x="5405416" y="2683608"/>
+                </a:lnTo>
+                <a:lnTo>
+                  <a:pt x="5412966" y="2676297"/>
+                </a:lnTo>
+                <a:lnTo>
+                  <a:pt x="5420515" y="2668861"/>
+                </a:lnTo>
+                <a:lnTo>
+                  <a:pt x="5428065" y="2661296"/>
+                </a:lnTo>
+                <a:lnTo>
+                  <a:pt x="5435614" y="2653599"/>
+                </a:lnTo>
+                <a:lnTo>
+                  <a:pt x="5443164" y="2645764"/>
+                </a:lnTo>
+                <a:lnTo>
+                  <a:pt x="5450713" y="2637788"/>
+                </a:lnTo>
+                <a:lnTo>
+                  <a:pt x="5458263" y="2629666"/>
+                </a:lnTo>
+                <a:lnTo>
+                  <a:pt x="5465812" y="2621393"/>
+                </a:lnTo>
+                <a:lnTo>
+                  <a:pt x="5473362" y="2612965"/>
+                </a:lnTo>
+                <a:lnTo>
+                  <a:pt x="5480911" y="2604375"/>
+                </a:lnTo>
+                <a:lnTo>
+                  <a:pt x="5488461" y="2595619"/>
+                </a:lnTo>
+                <a:lnTo>
+                  <a:pt x="5496010" y="2586691"/>
+                </a:lnTo>
+                <a:lnTo>
+                  <a:pt x="5503559" y="2577585"/>
+                </a:lnTo>
+                <a:lnTo>
+                  <a:pt x="5511109" y="2568294"/>
+                </a:lnTo>
+                <a:lnTo>
+                  <a:pt x="5518658" y="2558812"/>
+                </a:lnTo>
+                <a:lnTo>
+                  <a:pt x="5526208" y="2549131"/>
+                </a:lnTo>
+                <a:lnTo>
+                  <a:pt x="5533757" y="2539245"/>
+                </a:lnTo>
+                <a:lnTo>
+                  <a:pt x="5541307" y="2529146"/>
+                </a:lnTo>
+                <a:lnTo>
+                  <a:pt x="5548856" y="2518826"/>
+                </a:lnTo>
+                <a:lnTo>
+                  <a:pt x="5556406" y="2508275"/>
+                </a:lnTo>
+                <a:lnTo>
+                  <a:pt x="5563955" y="2497485"/>
+                </a:lnTo>
+                <a:lnTo>
+                  <a:pt x="5571505" y="2486447"/>
+                </a:lnTo>
+                <a:lnTo>
+                  <a:pt x="5579054" y="2475149"/>
+                </a:lnTo>
+                <a:lnTo>
+                  <a:pt x="5586604" y="2463582"/>
+                </a:lnTo>
+                <a:lnTo>
+                  <a:pt x="5594153" y="2451734"/>
+                </a:lnTo>
+                <a:lnTo>
+                  <a:pt x="5601702" y="2439593"/>
+                </a:lnTo>
+                <a:lnTo>
+                  <a:pt x="5609252" y="2427145"/>
+                </a:lnTo>
+                <a:lnTo>
+                  <a:pt x="5616801" y="2414378"/>
+                </a:lnTo>
+                <a:lnTo>
+                  <a:pt x="5624351" y="2401277"/>
+                </a:lnTo>
+                <a:lnTo>
+                  <a:pt x="5631900" y="2387827"/>
+                </a:lnTo>
+                <a:lnTo>
+                  <a:pt x="5639450" y="2374011"/>
+                </a:lnTo>
+                <a:lnTo>
+                  <a:pt x="5646999" y="2359811"/>
+                </a:lnTo>
+                <a:lnTo>
+                  <a:pt x="5654549" y="2345208"/>
+                </a:lnTo>
+                <a:lnTo>
+                  <a:pt x="5662098" y="2330184"/>
+                </a:lnTo>
+                <a:lnTo>
+                  <a:pt x="5669648" y="2314715"/>
+                </a:lnTo>
+                <a:lnTo>
+                  <a:pt x="5677197" y="2298779"/>
+                </a:lnTo>
+                <a:lnTo>
+                  <a:pt x="5684747" y="2282352"/>
+                </a:lnTo>
+                <a:lnTo>
+                  <a:pt x="5692296" y="2265405"/>
+                </a:lnTo>
+                <a:lnTo>
+                  <a:pt x="5699846" y="2247912"/>
+                </a:lnTo>
+                <a:lnTo>
+                  <a:pt x="5707395" y="2229839"/>
+                </a:lnTo>
+                <a:lnTo>
+                  <a:pt x="5714944" y="2211155"/>
+                </a:lnTo>
+                <a:lnTo>
+                  <a:pt x="5722494" y="2191821"/>
+                </a:lnTo>
+                <a:lnTo>
+                  <a:pt x="5730043" y="2171799"/>
+                </a:lnTo>
+                <a:lnTo>
+                  <a:pt x="5737593" y="2151046"/>
+                </a:lnTo>
+                <a:lnTo>
+                  <a:pt x="5745142" y="2129514"/>
+                </a:lnTo>
+                <a:lnTo>
+                  <a:pt x="5752692" y="2107152"/>
+                </a:lnTo>
+                <a:lnTo>
+                  <a:pt x="5760241" y="2083904"/>
+                </a:lnTo>
+                <a:lnTo>
+                  <a:pt x="5767791" y="2059707"/>
+                </a:lnTo>
+                <a:lnTo>
+                  <a:pt x="5775340" y="2034495"/>
+                </a:lnTo>
+                <a:lnTo>
+                  <a:pt x="5782890" y="2008192"/>
+                </a:lnTo>
+                <a:lnTo>
+                  <a:pt x="5790439" y="1980714"/>
+                </a:lnTo>
+                <a:lnTo>
+                  <a:pt x="5797989" y="1951970"/>
+                </a:lnTo>
+                <a:lnTo>
+                  <a:pt x="5805538" y="1921857"/>
+                </a:lnTo>
+                <a:lnTo>
+                  <a:pt x="5813087" y="1890260"/>
+                </a:lnTo>
+                <a:lnTo>
+                  <a:pt x="5820637" y="1857050"/>
+                </a:lnTo>
+                <a:lnTo>
+                  <a:pt x="5828186" y="1822081"/>
+                </a:lnTo>
+                <a:lnTo>
+                  <a:pt x="5835736" y="1785191"/>
+                </a:lnTo>
+                <a:lnTo>
+                  <a:pt x="5843285" y="1746191"/>
+                </a:lnTo>
+                <a:lnTo>
+                  <a:pt x="5850835" y="1704869"/>
+                </a:lnTo>
+                <a:lnTo>
+                  <a:pt x="5858384" y="1660981"/>
+                </a:lnTo>
+                <a:lnTo>
+                  <a:pt x="5865934" y="1614245"/>
+                </a:lnTo>
+                <a:lnTo>
+                  <a:pt x="5873483" y="1564332"/>
+                </a:lnTo>
+                <a:lnTo>
+                  <a:pt x="5881033" y="1510859"/>
+                </a:lnTo>
+                <a:lnTo>
+                  <a:pt x="5888582" y="1453375"/>
+                </a:lnTo>
+                <a:lnTo>
+                  <a:pt x="5896132" y="1391345"/>
+                </a:lnTo>
+                <a:lnTo>
+                  <a:pt x="5903681" y="1324124"/>
+                </a:lnTo>
+                <a:lnTo>
+                  <a:pt x="5911231" y="1250938"/>
+                </a:lnTo>
+                <a:lnTo>
+                  <a:pt x="5918780" y="1170834"/>
+                </a:lnTo>
+                <a:lnTo>
+                  <a:pt x="5926329" y="1082634"/>
+                </a:lnTo>
+                <a:lnTo>
+                  <a:pt x="5933879" y="984860"/>
+                </a:lnTo>
+                <a:lnTo>
+                  <a:pt x="5941428" y="875621"/>
+                </a:lnTo>
+                <a:lnTo>
+                  <a:pt x="5948978" y="752460"/>
+                </a:lnTo>
+                <a:lnTo>
+                  <a:pt x="5956527" y="612114"/>
+                </a:lnTo>
+                <a:lnTo>
+                  <a:pt x="5964077" y="450132"/>
+                </a:lnTo>
+                <a:lnTo>
+                  <a:pt x="5971626" y="260261"/>
+                </a:lnTo>
+                <a:lnTo>
+                  <a:pt x="5979176" y="33382"/>
+                </a:lnTo>
+                <a:lnTo>
+                  <a:pt x="5986725" y="0"/>
+                </a:lnTo>
+                <a:lnTo>
+                  <a:pt x="5994275" y="0"/>
+                </a:lnTo>
+                <a:lnTo>
+                  <a:pt x="6001824" y="0"/>
+                </a:lnTo>
+                <a:lnTo>
+                  <a:pt x="6009374" y="0"/>
+                </a:lnTo>
+                <a:lnTo>
+                  <a:pt x="6016923" y="0"/>
+                </a:lnTo>
+                <a:lnTo>
+                  <a:pt x="6024473" y="0"/>
+                </a:lnTo>
+                <a:lnTo>
+                  <a:pt x="6032022" y="0"/>
+                </a:lnTo>
+                <a:lnTo>
+                  <a:pt x="6032022" y="3657600"/>
+                </a:lnTo>
+                <a:lnTo>
+                  <a:pt x="6024473" y="3657600"/>
+                </a:lnTo>
+                <a:lnTo>
+                  <a:pt x="6016923" y="3657600"/>
+                </a:lnTo>
+                <a:lnTo>
+                  <a:pt x="6009374" y="3657600"/>
+                </a:lnTo>
+                <a:lnTo>
+                  <a:pt x="6001824" y="3657600"/>
+                </a:lnTo>
+                <a:lnTo>
+                  <a:pt x="5994275" y="3657600"/>
+                </a:lnTo>
+                <a:lnTo>
+                  <a:pt x="5986725" y="3657600"/>
+                </a:lnTo>
+                <a:lnTo>
+                  <a:pt x="5979176" y="3657600"/>
+                </a:lnTo>
+                <a:lnTo>
+                  <a:pt x="5971626" y="3657600"/>
+                </a:lnTo>
+                <a:lnTo>
+                  <a:pt x="5964077" y="3657600"/>
+                </a:lnTo>
+                <a:lnTo>
+                  <a:pt x="5956527" y="3657600"/>
+                </a:lnTo>
+                <a:lnTo>
+                  <a:pt x="5948978" y="3657600"/>
+                </a:lnTo>
+                <a:lnTo>
+                  <a:pt x="5941428" y="3657600"/>
+                </a:lnTo>
+                <a:lnTo>
+                  <a:pt x="5933879" y="3657600"/>
+                </a:lnTo>
+                <a:lnTo>
+                  <a:pt x="5926329" y="3657600"/>
+                </a:lnTo>
+                <a:lnTo>
+                  <a:pt x="5918780" y="3657600"/>
+                </a:lnTo>
+                <a:lnTo>
+                  <a:pt x="5911231" y="3657600"/>
+                </a:lnTo>
+                <a:lnTo>
+                  <a:pt x="5903681" y="3657600"/>
+                </a:lnTo>
+                <a:lnTo>
+                  <a:pt x="5896132" y="3657600"/>
+                </a:lnTo>
+                <a:lnTo>
+                  <a:pt x="5888582" y="3657600"/>
+                </a:lnTo>
+                <a:lnTo>
+                  <a:pt x="5881033" y="3657600"/>
+                </a:lnTo>
+                <a:lnTo>
+                  <a:pt x="5873483" y="3657600"/>
+                </a:lnTo>
+                <a:lnTo>
+                  <a:pt x="5865934" y="3657600"/>
+                </a:lnTo>
+                <a:lnTo>
+                  <a:pt x="5858384" y="3657600"/>
+                </a:lnTo>
+                <a:lnTo>
+                  <a:pt x="5850835" y="3657600"/>
+                </a:lnTo>
+                <a:lnTo>
+                  <a:pt x="5843285" y="3657600"/>
+                </a:lnTo>
+                <a:lnTo>
+                  <a:pt x="5835736" y="3657600"/>
+                </a:lnTo>
+                <a:lnTo>
+                  <a:pt x="5828186" y="3657600"/>
+                </a:lnTo>
+                <a:lnTo>
+                  <a:pt x="5820637" y="3657600"/>
+                </a:lnTo>
+                <a:lnTo>
+                  <a:pt x="5813087" y="3657600"/>
+                </a:lnTo>
+                <a:lnTo>
+                  <a:pt x="5805538" y="3657600"/>
+                </a:lnTo>
+                <a:lnTo>
+                  <a:pt x="5797989" y="3657600"/>
+                </a:lnTo>
+                <a:lnTo>
+                  <a:pt x="5790439" y="3657600"/>
+                </a:lnTo>
+                <a:lnTo>
+                  <a:pt x="5782890" y="3657600"/>
+                </a:lnTo>
+                <a:lnTo>
+                  <a:pt x="5775340" y="3657600"/>
+                </a:lnTo>
+                <a:lnTo>
+                  <a:pt x="5767791" y="3657600"/>
+                </a:lnTo>
+                <a:lnTo>
+                  <a:pt x="5760241" y="3657600"/>
+                </a:lnTo>
+                <a:lnTo>
+                  <a:pt x="5752692" y="3657600"/>
+                </a:lnTo>
+                <a:lnTo>
+                  <a:pt x="5745142" y="3657600"/>
+                </a:lnTo>
+                <a:lnTo>
+                  <a:pt x="5737593" y="3657600"/>
+                </a:lnTo>
+                <a:lnTo>
+                  <a:pt x="5730043" y="3657600"/>
+                </a:lnTo>
+                <a:lnTo>
+                  <a:pt x="5722494" y="3657600"/>
+                </a:lnTo>
+                <a:lnTo>
+                  <a:pt x="5714944" y="3657600"/>
+                </a:lnTo>
+                <a:lnTo>
+                  <a:pt x="5707395" y="3657600"/>
+                </a:lnTo>
+                <a:lnTo>
+                  <a:pt x="5699846" y="3657600"/>
+                </a:lnTo>
+                <a:lnTo>
+                  <a:pt x="5692296" y="3657600"/>
+                </a:lnTo>
+                <a:lnTo>
+                  <a:pt x="5684747" y="3657600"/>
+                </a:lnTo>
+                <a:lnTo>
+                  <a:pt x="5677197" y="3657600"/>
+                </a:lnTo>
+                <a:lnTo>
+                  <a:pt x="5669648" y="3657600"/>
+                </a:lnTo>
+                <a:lnTo>
+                  <a:pt x="5662098" y="3657600"/>
+                </a:lnTo>
+                <a:lnTo>
+                  <a:pt x="5654549" y="3657600"/>
+                </a:lnTo>
+                <a:lnTo>
+                  <a:pt x="5646999" y="3657600"/>
+                </a:lnTo>
+                <a:lnTo>
+                  <a:pt x="5639450" y="3657600"/>
+                </a:lnTo>
+                <a:lnTo>
+                  <a:pt x="5631900" y="3657600"/>
+                </a:lnTo>
+                <a:lnTo>
+                  <a:pt x="5624351" y="3657600"/>
+                </a:lnTo>
+                <a:lnTo>
+                  <a:pt x="5616801" y="3657600"/>
+                </a:lnTo>
+                <a:lnTo>
+                  <a:pt x="5609252" y="3657600"/>
+                </a:lnTo>
+                <a:lnTo>
+                  <a:pt x="5601702" y="3657600"/>
+                </a:lnTo>
+                <a:lnTo>
+                  <a:pt x="5594153" y="3657600"/>
+                </a:lnTo>
+                <a:lnTo>
+                  <a:pt x="5586604" y="3657600"/>
+                </a:lnTo>
+                <a:lnTo>
+                  <a:pt x="5579054" y="3657600"/>
+                </a:lnTo>
+                <a:lnTo>
+                  <a:pt x="5571505" y="3657600"/>
+                </a:lnTo>
+                <a:lnTo>
+                  <a:pt x="5563955" y="3657600"/>
+                </a:lnTo>
+                <a:lnTo>
+                  <a:pt x="5556406" y="3657600"/>
+                </a:lnTo>
+                <a:lnTo>
+                  <a:pt x="5548856" y="3657600"/>
+                </a:lnTo>
+                <a:lnTo>
+                  <a:pt x="5541307" y="3657600"/>
+                </a:lnTo>
+                <a:lnTo>
+                  <a:pt x="5533757" y="3657600"/>
+                </a:lnTo>
+                <a:lnTo>
+                  <a:pt x="5526208" y="3657600"/>
+                </a:lnTo>
+                <a:lnTo>
+                  <a:pt x="5518658" y="3657600"/>
+                </a:lnTo>
+                <a:lnTo>
+                  <a:pt x="5511109" y="3657600"/>
+                </a:lnTo>
+                <a:lnTo>
+                  <a:pt x="5503559" y="3657600"/>
+                </a:lnTo>
+                <a:lnTo>
+                  <a:pt x="5496010" y="3657600"/>
+                </a:lnTo>
+                <a:lnTo>
+                  <a:pt x="5488461" y="3657600"/>
+                </a:lnTo>
+                <a:lnTo>
+                  <a:pt x="5480911" y="3657600"/>
+                </a:lnTo>
+                <a:lnTo>
+                  <a:pt x="5473362" y="3657600"/>
+                </a:lnTo>
+                <a:lnTo>
+                  <a:pt x="5465812" y="3657600"/>
+                </a:lnTo>
+                <a:lnTo>
+                  <a:pt x="5458263" y="3657600"/>
+                </a:lnTo>
+                <a:lnTo>
+                  <a:pt x="5450713" y="3657600"/>
+                </a:lnTo>
+                <a:lnTo>
+                  <a:pt x="5443164" y="3657600"/>
+                </a:lnTo>
+                <a:lnTo>
+                  <a:pt x="5435614" y="3657600"/>
+                </a:lnTo>
+                <a:lnTo>
+                  <a:pt x="5428065" y="3657600"/>
+                </a:lnTo>
+                <a:lnTo>
+                  <a:pt x="5420515" y="3657600"/>
+                </a:lnTo>
+                <a:lnTo>
+                  <a:pt x="5412966" y="3657600"/>
+                </a:lnTo>
+                <a:lnTo>
+                  <a:pt x="5405416" y="3657600"/>
+                </a:lnTo>
+                <a:lnTo>
+                  <a:pt x="5397867" y="3657600"/>
+                </a:lnTo>
+                <a:lnTo>
+                  <a:pt x="5390317" y="3657600"/>
+                </a:lnTo>
+                <a:lnTo>
+                  <a:pt x="5382768" y="3657600"/>
+                </a:lnTo>
+                <a:lnTo>
+                  <a:pt x="5375219" y="3657600"/>
+                </a:lnTo>
+                <a:lnTo>
+                  <a:pt x="5367669" y="3657600"/>
+                </a:lnTo>
+                <a:lnTo>
+                  <a:pt x="5360120" y="3657600"/>
+                </a:lnTo>
+                <a:lnTo>
+                  <a:pt x="5352570" y="3657600"/>
+                </a:lnTo>
+                <a:lnTo>
+                  <a:pt x="5345021" y="3657600"/>
+                </a:lnTo>
+                <a:lnTo>
+                  <a:pt x="5337471" y="3657600"/>
+                </a:lnTo>
+                <a:lnTo>
+                  <a:pt x="5329922" y="3657600"/>
+                </a:lnTo>
+                <a:lnTo>
+                  <a:pt x="5322372" y="3657600"/>
+                </a:lnTo>
+                <a:lnTo>
+                  <a:pt x="5314823" y="3657600"/>
+                </a:lnTo>
+                <a:lnTo>
+                  <a:pt x="5307273" y="3657600"/>
+                </a:lnTo>
+                <a:lnTo>
+                  <a:pt x="5299724" y="3657600"/>
+                </a:lnTo>
+                <a:lnTo>
+                  <a:pt x="5292174" y="3657600"/>
+                </a:lnTo>
+                <a:lnTo>
+                  <a:pt x="5284625" y="3657600"/>
+                </a:lnTo>
+                <a:lnTo>
+                  <a:pt x="5277075" y="3657600"/>
+                </a:lnTo>
+                <a:lnTo>
+                  <a:pt x="5269526" y="3657600"/>
+                </a:lnTo>
+                <a:lnTo>
+                  <a:pt x="5261977" y="3657600"/>
+                </a:lnTo>
+                <a:lnTo>
+                  <a:pt x="5254427" y="3657600"/>
+                </a:lnTo>
+                <a:lnTo>
+                  <a:pt x="5246878" y="3657600"/>
+                </a:lnTo>
+                <a:lnTo>
+                  <a:pt x="5239328" y="3657600"/>
+                </a:lnTo>
+                <a:lnTo>
+                  <a:pt x="5231779" y="3657600"/>
+                </a:lnTo>
+                <a:lnTo>
+                  <a:pt x="5224229" y="3657600"/>
+                </a:lnTo>
+                <a:lnTo>
+                  <a:pt x="5216680" y="3657600"/>
+                </a:lnTo>
+                <a:lnTo>
+                  <a:pt x="5209130" y="3657600"/>
+                </a:lnTo>
+                <a:lnTo>
+                  <a:pt x="5201581" y="3657600"/>
+                </a:lnTo>
+                <a:lnTo>
+                  <a:pt x="5194031" y="3657600"/>
+                </a:lnTo>
+                <a:lnTo>
+                  <a:pt x="5186482" y="3657600"/>
+                </a:lnTo>
+                <a:lnTo>
+                  <a:pt x="5178932" y="3657600"/>
+                </a:lnTo>
+                <a:lnTo>
+                  <a:pt x="5171383" y="3657600"/>
+                </a:lnTo>
+                <a:lnTo>
+                  <a:pt x="5163834" y="3657600"/>
+                </a:lnTo>
+                <a:lnTo>
+                  <a:pt x="5156284" y="3657600"/>
+                </a:lnTo>
+                <a:lnTo>
+                  <a:pt x="5148735" y="3657600"/>
+                </a:lnTo>
+                <a:lnTo>
+                  <a:pt x="5141185" y="3657600"/>
+                </a:lnTo>
+                <a:lnTo>
+                  <a:pt x="5133636" y="3657600"/>
+                </a:lnTo>
+                <a:lnTo>
+                  <a:pt x="5126086" y="3657600"/>
+                </a:lnTo>
+                <a:lnTo>
+                  <a:pt x="5118537" y="3657600"/>
+                </a:lnTo>
+                <a:lnTo>
+                  <a:pt x="5110987" y="3657600"/>
+                </a:lnTo>
+                <a:lnTo>
+                  <a:pt x="5103438" y="3657600"/>
+                </a:lnTo>
+                <a:lnTo>
+                  <a:pt x="5095888" y="3657600"/>
+                </a:lnTo>
+                <a:lnTo>
+                  <a:pt x="5088339" y="3657600"/>
+                </a:lnTo>
+                <a:lnTo>
+                  <a:pt x="5080789" y="3657600"/>
+                </a:lnTo>
+                <a:lnTo>
+                  <a:pt x="5073240" y="3657600"/>
+                </a:lnTo>
+                <a:lnTo>
+                  <a:pt x="5065690" y="3657600"/>
+                </a:lnTo>
+                <a:lnTo>
+                  <a:pt x="5058141" y="3657600"/>
+                </a:lnTo>
+                <a:lnTo>
+                  <a:pt x="5050592" y="3657600"/>
+                </a:lnTo>
+                <a:lnTo>
+                  <a:pt x="5043042" y="3657600"/>
+                </a:lnTo>
+                <a:lnTo>
+                  <a:pt x="5035493" y="3657600"/>
+                </a:lnTo>
+                <a:lnTo>
+                  <a:pt x="5027943" y="3657600"/>
+                </a:lnTo>
+                <a:lnTo>
+                  <a:pt x="5020394" y="3657600"/>
+                </a:lnTo>
+                <a:lnTo>
+                  <a:pt x="5012844" y="3657600"/>
+                </a:lnTo>
+                <a:lnTo>
+                  <a:pt x="5005295" y="3657600"/>
+                </a:lnTo>
+                <a:lnTo>
+                  <a:pt x="4997745" y="3657600"/>
+                </a:lnTo>
+                <a:lnTo>
+                  <a:pt x="4990196" y="3657600"/>
+                </a:lnTo>
+                <a:lnTo>
+                  <a:pt x="4982646" y="3657600"/>
+                </a:lnTo>
+                <a:lnTo>
+                  <a:pt x="4975097" y="3657600"/>
+                </a:lnTo>
+                <a:lnTo>
+                  <a:pt x="4967547" y="3657600"/>
+                </a:lnTo>
+                <a:lnTo>
+                  <a:pt x="4959998" y="3657600"/>
+                </a:lnTo>
+                <a:lnTo>
+                  <a:pt x="4952448" y="3657600"/>
+                </a:lnTo>
+                <a:lnTo>
+                  <a:pt x="4944899" y="3657600"/>
+                </a:lnTo>
+                <a:lnTo>
+                  <a:pt x="4937350" y="3657600"/>
+                </a:lnTo>
+                <a:lnTo>
+                  <a:pt x="4929800" y="3657600"/>
+                </a:lnTo>
+                <a:lnTo>
+                  <a:pt x="4922251" y="3657600"/>
+                </a:lnTo>
+                <a:lnTo>
+                  <a:pt x="4914701" y="3657600"/>
+                </a:lnTo>
+                <a:lnTo>
+                  <a:pt x="4907152" y="3657600"/>
+                </a:lnTo>
+                <a:lnTo>
+                  <a:pt x="4899602" y="3657600"/>
+                </a:lnTo>
+                <a:lnTo>
+                  <a:pt x="4892053" y="3657600"/>
+                </a:lnTo>
+                <a:lnTo>
+                  <a:pt x="4884503" y="3657600"/>
+                </a:lnTo>
+                <a:lnTo>
+                  <a:pt x="4876954" y="3657600"/>
+                </a:lnTo>
+                <a:lnTo>
+                  <a:pt x="4869404" y="3657600"/>
+                </a:lnTo>
+                <a:lnTo>
+                  <a:pt x="4861855" y="3657600"/>
+                </a:lnTo>
+                <a:lnTo>
+                  <a:pt x="4854305" y="3657600"/>
+                </a:lnTo>
+                <a:lnTo>
+                  <a:pt x="4846756" y="3657600"/>
+                </a:lnTo>
+                <a:lnTo>
+                  <a:pt x="4839207" y="3657600"/>
+                </a:lnTo>
+                <a:lnTo>
+                  <a:pt x="4831657" y="3657600"/>
+                </a:lnTo>
+                <a:lnTo>
+                  <a:pt x="4824108" y="3657600"/>
+                </a:lnTo>
+                <a:lnTo>
+                  <a:pt x="4816558" y="3657600"/>
+                </a:lnTo>
+                <a:lnTo>
+                  <a:pt x="4809009" y="3657600"/>
+                </a:lnTo>
+                <a:lnTo>
+                  <a:pt x="4801459" y="3657600"/>
+                </a:lnTo>
+                <a:lnTo>
+                  <a:pt x="4793910" y="3657600"/>
+                </a:lnTo>
+                <a:lnTo>
+                  <a:pt x="4786360" y="3657600"/>
+                </a:lnTo>
+                <a:lnTo>
+                  <a:pt x="4778811" y="3657600"/>
+                </a:lnTo>
+                <a:lnTo>
+                  <a:pt x="4771261" y="3657600"/>
+                </a:lnTo>
+                <a:lnTo>
+                  <a:pt x="4763712" y="3657600"/>
+                </a:lnTo>
+                <a:lnTo>
+                  <a:pt x="4756162" y="3657600"/>
+                </a:lnTo>
+                <a:lnTo>
+                  <a:pt x="4748613" y="3657600"/>
+                </a:lnTo>
+                <a:lnTo>
+                  <a:pt x="4741063" y="3657600"/>
+                </a:lnTo>
+                <a:lnTo>
+                  <a:pt x="4733514" y="3657600"/>
+                </a:lnTo>
+                <a:lnTo>
+                  <a:pt x="4725965" y="3657600"/>
+                </a:lnTo>
+                <a:lnTo>
+                  <a:pt x="4718415" y="3657600"/>
+                </a:lnTo>
+                <a:lnTo>
+                  <a:pt x="4710866" y="3657600"/>
+                </a:lnTo>
+                <a:lnTo>
+                  <a:pt x="4703316" y="3657600"/>
+                </a:lnTo>
+                <a:lnTo>
+                  <a:pt x="4695767" y="3657600"/>
+                </a:lnTo>
+                <a:lnTo>
+                  <a:pt x="4688217" y="3657600"/>
+                </a:lnTo>
+                <a:lnTo>
+                  <a:pt x="4680668" y="3657600"/>
+                </a:lnTo>
+                <a:lnTo>
+                  <a:pt x="4673118" y="3657600"/>
+                </a:lnTo>
+                <a:lnTo>
+                  <a:pt x="4665569" y="3657600"/>
+                </a:lnTo>
+                <a:lnTo>
+                  <a:pt x="4658019" y="3657600"/>
+                </a:lnTo>
+                <a:lnTo>
+                  <a:pt x="4650470" y="3657600"/>
+                </a:lnTo>
+                <a:lnTo>
+                  <a:pt x="4642920" y="3657600"/>
+                </a:lnTo>
+                <a:lnTo>
+                  <a:pt x="4635371" y="3657600"/>
+                </a:lnTo>
+                <a:lnTo>
+                  <a:pt x="4627822" y="3657600"/>
+                </a:lnTo>
+                <a:lnTo>
+                  <a:pt x="4620272" y="3657600"/>
+                </a:lnTo>
+                <a:lnTo>
+                  <a:pt x="4612723" y="3657600"/>
+                </a:lnTo>
+                <a:lnTo>
+                  <a:pt x="4605173" y="3657600"/>
+                </a:lnTo>
+                <a:lnTo>
+                  <a:pt x="4597624" y="3657600"/>
+                </a:lnTo>
+                <a:lnTo>
+                  <a:pt x="4590074" y="3657600"/>
+                </a:lnTo>
+                <a:lnTo>
+                  <a:pt x="4582525" y="3657600"/>
+                </a:lnTo>
+                <a:lnTo>
+                  <a:pt x="4574975" y="3657600"/>
+                </a:lnTo>
+                <a:lnTo>
+                  <a:pt x="4567426" y="3657600"/>
+                </a:lnTo>
+                <a:lnTo>
+                  <a:pt x="4559876" y="3657600"/>
+                </a:lnTo>
+                <a:lnTo>
+                  <a:pt x="4552327" y="3657600"/>
+                </a:lnTo>
+                <a:lnTo>
+                  <a:pt x="4544777" y="3657600"/>
+                </a:lnTo>
+                <a:lnTo>
+                  <a:pt x="4537228" y="3657600"/>
+                </a:lnTo>
+                <a:lnTo>
+                  <a:pt x="4529678" y="3657600"/>
+                </a:lnTo>
+                <a:lnTo>
+                  <a:pt x="4522129" y="3657600"/>
+                </a:lnTo>
+                <a:lnTo>
+                  <a:pt x="4514580" y="3657600"/>
+                </a:lnTo>
+                <a:lnTo>
+                  <a:pt x="4507030" y="3657600"/>
+                </a:lnTo>
+                <a:lnTo>
+                  <a:pt x="4499481" y="3657600"/>
+                </a:lnTo>
+                <a:lnTo>
+                  <a:pt x="4491931" y="3657600"/>
+                </a:lnTo>
+                <a:lnTo>
+                  <a:pt x="4484382" y="3657600"/>
+                </a:lnTo>
+                <a:lnTo>
+                  <a:pt x="4476832" y="3657600"/>
+                </a:lnTo>
+                <a:lnTo>
+                  <a:pt x="4469283" y="3657600"/>
+                </a:lnTo>
+                <a:lnTo>
+                  <a:pt x="4461733" y="3657600"/>
+                </a:lnTo>
+                <a:lnTo>
+                  <a:pt x="4454184" y="3657600"/>
+                </a:lnTo>
+                <a:lnTo>
+                  <a:pt x="4446634" y="3657600"/>
+                </a:lnTo>
+                <a:lnTo>
+                  <a:pt x="4439085" y="3657600"/>
+                </a:lnTo>
+                <a:lnTo>
+                  <a:pt x="4431535" y="3657600"/>
+                </a:lnTo>
+                <a:lnTo>
+                  <a:pt x="4423986" y="3657600"/>
+                </a:lnTo>
+                <a:lnTo>
+                  <a:pt x="4416436" y="3657600"/>
+                </a:lnTo>
+                <a:lnTo>
+                  <a:pt x="4408887" y="3657600"/>
+                </a:lnTo>
+                <a:lnTo>
+                  <a:pt x="4401338" y="3657600"/>
+                </a:lnTo>
+                <a:lnTo>
+                  <a:pt x="4393788" y="3657600"/>
+                </a:lnTo>
+                <a:lnTo>
+                  <a:pt x="4386239" y="3657600"/>
+                </a:lnTo>
+                <a:lnTo>
+                  <a:pt x="4378689" y="3657600"/>
+                </a:lnTo>
+                <a:lnTo>
+                  <a:pt x="4371140" y="3657600"/>
+                </a:lnTo>
+                <a:lnTo>
+                  <a:pt x="4363590" y="3657600"/>
+                </a:lnTo>
+                <a:lnTo>
+                  <a:pt x="4356041" y="3657600"/>
+                </a:lnTo>
+                <a:lnTo>
+                  <a:pt x="4348491" y="3657600"/>
+                </a:lnTo>
+                <a:lnTo>
+                  <a:pt x="4340942" y="3657600"/>
+                </a:lnTo>
+                <a:lnTo>
+                  <a:pt x="4333392" y="3657600"/>
+                </a:lnTo>
+                <a:lnTo>
+                  <a:pt x="4325843" y="3657600"/>
+                </a:lnTo>
+                <a:lnTo>
+                  <a:pt x="4318293" y="3657600"/>
+                </a:lnTo>
+                <a:lnTo>
+                  <a:pt x="4310744" y="3657600"/>
+                </a:lnTo>
+                <a:lnTo>
+                  <a:pt x="4303195" y="3657600"/>
+                </a:lnTo>
+                <a:lnTo>
+                  <a:pt x="4295645" y="3657600"/>
+                </a:lnTo>
+                <a:lnTo>
+                  <a:pt x="4288096" y="3657600"/>
+                </a:lnTo>
+                <a:lnTo>
+                  <a:pt x="4280546" y="3657600"/>
+                </a:lnTo>
+                <a:lnTo>
+                  <a:pt x="4272997" y="3657600"/>
+                </a:lnTo>
+                <a:lnTo>
+                  <a:pt x="4265447" y="3657600"/>
+                </a:lnTo>
+                <a:lnTo>
+                  <a:pt x="4257898" y="3657600"/>
+                </a:lnTo>
+                <a:lnTo>
+                  <a:pt x="4250348" y="3657600"/>
+                </a:lnTo>
+                <a:lnTo>
+                  <a:pt x="4242799" y="3657600"/>
+                </a:lnTo>
+                <a:lnTo>
+                  <a:pt x="4235249" y="3657600"/>
+                </a:lnTo>
+                <a:lnTo>
+                  <a:pt x="4227700" y="3657600"/>
+                </a:lnTo>
+                <a:lnTo>
+                  <a:pt x="4220150" y="3657600"/>
+                </a:lnTo>
+                <a:lnTo>
+                  <a:pt x="4212601" y="3657600"/>
+                </a:lnTo>
+                <a:lnTo>
+                  <a:pt x="4205051" y="3657600"/>
+                </a:lnTo>
+                <a:lnTo>
+                  <a:pt x="4197502" y="3657600"/>
+                </a:lnTo>
+                <a:lnTo>
+                  <a:pt x="4189953" y="3657600"/>
+                </a:lnTo>
+                <a:lnTo>
+                  <a:pt x="4182403" y="3657600"/>
+                </a:lnTo>
+                <a:lnTo>
+                  <a:pt x="4174854" y="3657600"/>
+                </a:lnTo>
+                <a:lnTo>
+                  <a:pt x="4167304" y="3657600"/>
+                </a:lnTo>
+                <a:lnTo>
+                  <a:pt x="4159755" y="3657600"/>
+                </a:lnTo>
+                <a:lnTo>
+                  <a:pt x="4152205" y="3657600"/>
+                </a:lnTo>
+                <a:lnTo>
+                  <a:pt x="4144656" y="3657600"/>
+                </a:lnTo>
+                <a:lnTo>
+                  <a:pt x="4137106" y="3657600"/>
+                </a:lnTo>
+                <a:lnTo>
+                  <a:pt x="4129557" y="3657600"/>
+                </a:lnTo>
+                <a:lnTo>
+                  <a:pt x="4122007" y="3657600"/>
+                </a:lnTo>
+                <a:lnTo>
+                  <a:pt x="4114458" y="3657600"/>
+                </a:lnTo>
+                <a:lnTo>
+                  <a:pt x="4106908" y="3657600"/>
+                </a:lnTo>
+                <a:lnTo>
+                  <a:pt x="4099359" y="3657600"/>
+                </a:lnTo>
+                <a:lnTo>
+                  <a:pt x="4091809" y="3657600"/>
+                </a:lnTo>
+                <a:lnTo>
+                  <a:pt x="4084260" y="3657600"/>
+                </a:lnTo>
+                <a:lnTo>
+                  <a:pt x="4076711" y="3657600"/>
+                </a:lnTo>
+                <a:lnTo>
+                  <a:pt x="4069161" y="3657600"/>
+                </a:lnTo>
+                <a:lnTo>
+                  <a:pt x="4061612" y="3657600"/>
+                </a:lnTo>
+                <a:lnTo>
+                  <a:pt x="4054062" y="3657600"/>
+                </a:lnTo>
+                <a:lnTo>
+                  <a:pt x="4046513" y="3657600"/>
+                </a:lnTo>
+                <a:lnTo>
+                  <a:pt x="4038963" y="3657600"/>
+                </a:lnTo>
+                <a:lnTo>
+                  <a:pt x="4031414" y="3657600"/>
+                </a:lnTo>
+                <a:lnTo>
+                  <a:pt x="4023864" y="3657600"/>
+                </a:lnTo>
+                <a:lnTo>
+                  <a:pt x="4016315" y="3657600"/>
+                </a:lnTo>
+                <a:lnTo>
+                  <a:pt x="4008765" y="3657600"/>
+                </a:lnTo>
+                <a:lnTo>
+                  <a:pt x="4001216" y="3657600"/>
+                </a:lnTo>
+                <a:lnTo>
+                  <a:pt x="3993666" y="3657600"/>
+                </a:lnTo>
+                <a:lnTo>
+                  <a:pt x="3986117" y="3657600"/>
+                </a:lnTo>
+                <a:lnTo>
+                  <a:pt x="3978568" y="3657600"/>
+                </a:lnTo>
+                <a:lnTo>
+                  <a:pt x="3971018" y="3657600"/>
+                </a:lnTo>
+                <a:lnTo>
+                  <a:pt x="3963469" y="3657600"/>
+                </a:lnTo>
+                <a:lnTo>
+                  <a:pt x="3955919" y="3657600"/>
+                </a:lnTo>
+                <a:lnTo>
+                  <a:pt x="3948370" y="3657600"/>
+                </a:lnTo>
+                <a:lnTo>
+                  <a:pt x="3940820" y="3657600"/>
+                </a:lnTo>
+                <a:lnTo>
+                  <a:pt x="3933271" y="3657600"/>
+                </a:lnTo>
+                <a:lnTo>
+                  <a:pt x="3925721" y="3657600"/>
+                </a:lnTo>
+                <a:lnTo>
+                  <a:pt x="3918172" y="3657600"/>
+                </a:lnTo>
+                <a:lnTo>
+                  <a:pt x="3910622" y="3657600"/>
+                </a:lnTo>
+                <a:lnTo>
+                  <a:pt x="3903073" y="3657600"/>
+                </a:lnTo>
+                <a:lnTo>
+                  <a:pt x="3895523" y="3657600"/>
+                </a:lnTo>
+                <a:lnTo>
+                  <a:pt x="3887974" y="3657600"/>
+                </a:lnTo>
+                <a:lnTo>
+                  <a:pt x="3880424" y="3657600"/>
+                </a:lnTo>
+                <a:lnTo>
+                  <a:pt x="3872875" y="3657600"/>
+                </a:lnTo>
+                <a:lnTo>
+                  <a:pt x="3865326" y="3657600"/>
+                </a:lnTo>
+                <a:lnTo>
+                  <a:pt x="3857776" y="3657600"/>
+                </a:lnTo>
+                <a:lnTo>
+                  <a:pt x="3850227" y="3657600"/>
+                </a:lnTo>
+                <a:lnTo>
+                  <a:pt x="3842677" y="3657600"/>
+                </a:lnTo>
+                <a:lnTo>
+                  <a:pt x="3835128" y="3657600"/>
+                </a:lnTo>
+                <a:lnTo>
+                  <a:pt x="3827578" y="3657600"/>
+                </a:lnTo>
+                <a:lnTo>
+                  <a:pt x="3820029" y="3657600"/>
+                </a:lnTo>
+                <a:lnTo>
+                  <a:pt x="3812479" y="3657600"/>
+                </a:lnTo>
+                <a:lnTo>
+                  <a:pt x="3804930" y="3657600"/>
+                </a:lnTo>
+                <a:lnTo>
+                  <a:pt x="3797380" y="3657600"/>
+                </a:lnTo>
+                <a:lnTo>
+                  <a:pt x="3789831" y="3657600"/>
+                </a:lnTo>
+                <a:lnTo>
+                  <a:pt x="3782281" y="3657600"/>
+                </a:lnTo>
+                <a:lnTo>
+                  <a:pt x="3774732" y="3657600"/>
+                </a:lnTo>
+                <a:lnTo>
+                  <a:pt x="3767183" y="3657600"/>
+                </a:lnTo>
+                <a:lnTo>
+                  <a:pt x="3759633" y="3657600"/>
+                </a:lnTo>
+                <a:lnTo>
+                  <a:pt x="3752084" y="3657600"/>
+                </a:lnTo>
+                <a:lnTo>
+                  <a:pt x="3744534" y="3657600"/>
+                </a:lnTo>
+                <a:lnTo>
+                  <a:pt x="3736985" y="3657600"/>
+                </a:lnTo>
+                <a:lnTo>
+                  <a:pt x="3729435" y="3657600"/>
+                </a:lnTo>
+                <a:lnTo>
+                  <a:pt x="3721886" y="3657600"/>
+                </a:lnTo>
+                <a:lnTo>
+                  <a:pt x="3714336" y="3657600"/>
+                </a:lnTo>
+                <a:lnTo>
+                  <a:pt x="3706787" y="3657600"/>
+                </a:lnTo>
+                <a:lnTo>
+                  <a:pt x="3699237" y="3657600"/>
+                </a:lnTo>
+                <a:lnTo>
+                  <a:pt x="3691688" y="3657600"/>
+                </a:lnTo>
+                <a:lnTo>
+                  <a:pt x="3684138" y="3657600"/>
+                </a:lnTo>
+                <a:lnTo>
+                  <a:pt x="3676589" y="3657600"/>
+                </a:lnTo>
+                <a:lnTo>
+                  <a:pt x="3669039" y="3657600"/>
+                </a:lnTo>
+                <a:lnTo>
+                  <a:pt x="3661490" y="3657600"/>
+                </a:lnTo>
+                <a:lnTo>
+                  <a:pt x="3653941" y="3657600"/>
+                </a:lnTo>
+                <a:lnTo>
+                  <a:pt x="3646391" y="3657600"/>
+                </a:lnTo>
+                <a:lnTo>
+                  <a:pt x="3638842" y="3657600"/>
+                </a:lnTo>
+                <a:lnTo>
+                  <a:pt x="3631292" y="3657600"/>
+                </a:lnTo>
+                <a:lnTo>
+                  <a:pt x="3623743" y="3657600"/>
+                </a:lnTo>
+                <a:lnTo>
+                  <a:pt x="3616193" y="3657600"/>
+                </a:lnTo>
+                <a:lnTo>
+                  <a:pt x="3608644" y="3657600"/>
+                </a:lnTo>
+                <a:lnTo>
+                  <a:pt x="3601094" y="3657600"/>
+                </a:lnTo>
+                <a:lnTo>
+                  <a:pt x="3593545" y="3657600"/>
+                </a:lnTo>
+                <a:lnTo>
+                  <a:pt x="3585995" y="3657600"/>
+                </a:lnTo>
+                <a:lnTo>
+                  <a:pt x="3578446" y="3657600"/>
+                </a:lnTo>
+                <a:lnTo>
+                  <a:pt x="3570896" y="3657600"/>
+                </a:lnTo>
+                <a:lnTo>
+                  <a:pt x="3563347" y="3657600"/>
+                </a:lnTo>
+                <a:lnTo>
+                  <a:pt x="3555797" y="3657600"/>
+                </a:lnTo>
+                <a:lnTo>
+                  <a:pt x="3548248" y="3657600"/>
+                </a:lnTo>
+                <a:lnTo>
+                  <a:pt x="3540699" y="3657600"/>
+                </a:lnTo>
+                <a:lnTo>
+                  <a:pt x="3533149" y="3657600"/>
+                </a:lnTo>
+                <a:lnTo>
+                  <a:pt x="3525600" y="3657600"/>
+                </a:lnTo>
+                <a:lnTo>
+                  <a:pt x="3518050" y="3657600"/>
+                </a:lnTo>
+                <a:lnTo>
+                  <a:pt x="3510501" y="3657600"/>
+                </a:lnTo>
+                <a:lnTo>
+                  <a:pt x="3502951" y="3657600"/>
+                </a:lnTo>
+                <a:lnTo>
+                  <a:pt x="3495402" y="3657600"/>
+                </a:lnTo>
+                <a:lnTo>
+                  <a:pt x="3487852" y="3657600"/>
+                </a:lnTo>
+                <a:lnTo>
+                  <a:pt x="3480303" y="3657600"/>
+                </a:lnTo>
+                <a:lnTo>
+                  <a:pt x="3472753" y="3657600"/>
+                </a:lnTo>
+                <a:lnTo>
+                  <a:pt x="3465204" y="3657600"/>
+                </a:lnTo>
+                <a:lnTo>
+                  <a:pt x="3457654" y="3657600"/>
+                </a:lnTo>
+                <a:lnTo>
+                  <a:pt x="3450105" y="3657600"/>
+                </a:lnTo>
+                <a:lnTo>
+                  <a:pt x="3442556" y="3657600"/>
+                </a:lnTo>
+                <a:lnTo>
+                  <a:pt x="3435006" y="3657600"/>
+                </a:lnTo>
+                <a:lnTo>
+                  <a:pt x="3427457" y="3657600"/>
+                </a:lnTo>
+                <a:lnTo>
+                  <a:pt x="3419907" y="3657600"/>
+                </a:lnTo>
+                <a:lnTo>
+                  <a:pt x="3412358" y="3657600"/>
+                </a:lnTo>
+                <a:lnTo>
+                  <a:pt x="3404808" y="3657600"/>
+                </a:lnTo>
+                <a:lnTo>
+                  <a:pt x="3397259" y="3657600"/>
+                </a:lnTo>
+                <a:lnTo>
+                  <a:pt x="3389709" y="3657600"/>
+                </a:lnTo>
+                <a:lnTo>
+                  <a:pt x="3382160" y="3657600"/>
+                </a:lnTo>
+                <a:lnTo>
+                  <a:pt x="3374610" y="3657600"/>
+                </a:lnTo>
+                <a:lnTo>
+                  <a:pt x="3367061" y="3657600"/>
+                </a:lnTo>
+                <a:lnTo>
+                  <a:pt x="3359511" y="3657600"/>
+                </a:lnTo>
+                <a:lnTo>
+                  <a:pt x="3351962" y="3657600"/>
+                </a:lnTo>
+                <a:lnTo>
+                  <a:pt x="3344412" y="3657600"/>
+                </a:lnTo>
+                <a:lnTo>
+                  <a:pt x="3336863" y="3657600"/>
+                </a:lnTo>
+                <a:lnTo>
+                  <a:pt x="3329314" y="3657600"/>
+                </a:lnTo>
+                <a:lnTo>
+                  <a:pt x="3321764" y="3657600"/>
+                </a:lnTo>
+                <a:lnTo>
+                  <a:pt x="3314215" y="3657600"/>
+                </a:lnTo>
+                <a:lnTo>
+                  <a:pt x="3306665" y="3657600"/>
+                </a:lnTo>
+                <a:lnTo>
+                  <a:pt x="3299116" y="3657600"/>
+                </a:lnTo>
+                <a:lnTo>
+                  <a:pt x="3291566" y="3657600"/>
+                </a:lnTo>
+                <a:lnTo>
+                  <a:pt x="3284017" y="3657600"/>
+                </a:lnTo>
+                <a:lnTo>
+                  <a:pt x="3276467" y="3657600"/>
+                </a:lnTo>
+                <a:lnTo>
+                  <a:pt x="3268918" y="3657600"/>
+                </a:lnTo>
+                <a:lnTo>
+                  <a:pt x="3261368" y="3657600"/>
+                </a:lnTo>
+                <a:lnTo>
+                  <a:pt x="3253819" y="3657600"/>
+                </a:lnTo>
+                <a:lnTo>
+                  <a:pt x="3246269" y="3657600"/>
+                </a:lnTo>
+                <a:lnTo>
+                  <a:pt x="3238720" y="3657600"/>
+                </a:lnTo>
+                <a:lnTo>
+                  <a:pt x="3231170" y="3657600"/>
+                </a:lnTo>
+                <a:lnTo>
+                  <a:pt x="3223621" y="3657600"/>
+                </a:lnTo>
+                <a:lnTo>
+                  <a:pt x="3216072" y="3657600"/>
+                </a:lnTo>
+                <a:lnTo>
+                  <a:pt x="3208522" y="3657600"/>
+                </a:lnTo>
+                <a:lnTo>
+                  <a:pt x="3200973" y="3657600"/>
+                </a:lnTo>
+                <a:lnTo>
+                  <a:pt x="3193423" y="3657600"/>
+                </a:lnTo>
+                <a:lnTo>
+                  <a:pt x="3185874" y="3657600"/>
+                </a:lnTo>
+                <a:lnTo>
+                  <a:pt x="3178324" y="3657600"/>
+                </a:lnTo>
+                <a:lnTo>
+                  <a:pt x="3170775" y="3657600"/>
+                </a:lnTo>
+                <a:lnTo>
+                  <a:pt x="3163225" y="3657600"/>
+                </a:lnTo>
+                <a:lnTo>
+                  <a:pt x="3155676" y="3657600"/>
+                </a:lnTo>
+                <a:lnTo>
+                  <a:pt x="3148126" y="3657600"/>
+                </a:lnTo>
+                <a:lnTo>
+                  <a:pt x="3140577" y="3657600"/>
+                </a:lnTo>
+                <a:lnTo>
+                  <a:pt x="3133027" y="3657600"/>
+                </a:lnTo>
+                <a:lnTo>
+                  <a:pt x="3125478" y="3657600"/>
+                </a:lnTo>
+                <a:lnTo>
+                  <a:pt x="3117929" y="3657600"/>
+                </a:lnTo>
+                <a:lnTo>
+                  <a:pt x="3110379" y="3657600"/>
+                </a:lnTo>
+                <a:lnTo>
+                  <a:pt x="3102830" y="3657600"/>
+                </a:lnTo>
+                <a:lnTo>
+                  <a:pt x="3095280" y="3657600"/>
+                </a:lnTo>
+                <a:lnTo>
+                  <a:pt x="3087731" y="3657600"/>
+                </a:lnTo>
+                <a:lnTo>
+                  <a:pt x="3080181" y="3657600"/>
+                </a:lnTo>
+                <a:lnTo>
+                  <a:pt x="3072632" y="3657600"/>
+                </a:lnTo>
+                <a:lnTo>
+                  <a:pt x="3065082" y="3657600"/>
+                </a:lnTo>
+                <a:lnTo>
+                  <a:pt x="3057533" y="3657600"/>
+                </a:lnTo>
+                <a:lnTo>
+                  <a:pt x="3049983" y="3657600"/>
+                </a:lnTo>
+                <a:lnTo>
+                  <a:pt x="3042434" y="3657600"/>
+                </a:lnTo>
+                <a:lnTo>
+                  <a:pt x="3034884" y="3657600"/>
+                </a:lnTo>
+                <a:lnTo>
+                  <a:pt x="3027335" y="3657600"/>
+                </a:lnTo>
+                <a:lnTo>
+                  <a:pt x="3019785" y="3657600"/>
+                </a:lnTo>
+                <a:lnTo>
+                  <a:pt x="3012236" y="3657600"/>
+                </a:lnTo>
+                <a:lnTo>
+                  <a:pt x="3004687" y="3657600"/>
+                </a:lnTo>
+                <a:lnTo>
+                  <a:pt x="2997137" y="3657600"/>
+                </a:lnTo>
+                <a:lnTo>
+                  <a:pt x="2989588" y="3657600"/>
+                </a:lnTo>
+                <a:lnTo>
+                  <a:pt x="2982038" y="3657600"/>
+                </a:lnTo>
+                <a:lnTo>
+                  <a:pt x="2974489" y="3657600"/>
+                </a:lnTo>
+                <a:lnTo>
+                  <a:pt x="2966939" y="3657600"/>
+                </a:lnTo>
+                <a:lnTo>
+                  <a:pt x="2959390" y="3657600"/>
+                </a:lnTo>
+                <a:lnTo>
+                  <a:pt x="2951840" y="3657600"/>
+                </a:lnTo>
+                <a:lnTo>
+                  <a:pt x="2944291" y="3657600"/>
+                </a:lnTo>
+                <a:lnTo>
+                  <a:pt x="2936741" y="3657600"/>
+                </a:lnTo>
+                <a:lnTo>
+                  <a:pt x="2929192" y="3657600"/>
+                </a:lnTo>
+                <a:lnTo>
+                  <a:pt x="2921642" y="3657600"/>
+                </a:lnTo>
+                <a:lnTo>
+                  <a:pt x="2914093" y="3657600"/>
+                </a:lnTo>
+                <a:lnTo>
+                  <a:pt x="2906543" y="3657600"/>
+                </a:lnTo>
+                <a:lnTo>
+                  <a:pt x="2898994" y="3657600"/>
+                </a:lnTo>
+                <a:lnTo>
+                  <a:pt x="2891445" y="3657600"/>
+                </a:lnTo>
+                <a:lnTo>
+                  <a:pt x="2883895" y="3657600"/>
+                </a:lnTo>
+                <a:lnTo>
+                  <a:pt x="2876346" y="3657600"/>
+                </a:lnTo>
+                <a:lnTo>
+                  <a:pt x="2868796" y="3657600"/>
+                </a:lnTo>
+                <a:lnTo>
+                  <a:pt x="2861247" y="3657600"/>
+                </a:lnTo>
+                <a:lnTo>
+                  <a:pt x="2853697" y="3657600"/>
+                </a:lnTo>
+                <a:lnTo>
+                  <a:pt x="2846148" y="3657600"/>
+                </a:lnTo>
+                <a:lnTo>
+                  <a:pt x="2838598" y="3657600"/>
+                </a:lnTo>
+                <a:lnTo>
+                  <a:pt x="2831049" y="3657600"/>
+                </a:lnTo>
+                <a:lnTo>
+                  <a:pt x="2823499" y="3657600"/>
+                </a:lnTo>
+                <a:lnTo>
+                  <a:pt x="2815950" y="3657600"/>
+                </a:lnTo>
+                <a:lnTo>
+                  <a:pt x="2808400" y="3657600"/>
+                </a:lnTo>
+                <a:lnTo>
+                  <a:pt x="2800851" y="3657600"/>
+                </a:lnTo>
+                <a:lnTo>
+                  <a:pt x="2793302" y="3657600"/>
+                </a:lnTo>
+                <a:lnTo>
+                  <a:pt x="2785752" y="3657600"/>
+                </a:lnTo>
+                <a:lnTo>
+                  <a:pt x="2778203" y="3657600"/>
+                </a:lnTo>
+                <a:lnTo>
+                  <a:pt x="2770653" y="3657600"/>
+                </a:lnTo>
+                <a:lnTo>
+                  <a:pt x="2763104" y="3657600"/>
+                </a:lnTo>
+                <a:lnTo>
+                  <a:pt x="2755554" y="3657600"/>
+                </a:lnTo>
+                <a:lnTo>
+                  <a:pt x="2748005" y="3657600"/>
+                </a:lnTo>
+                <a:lnTo>
+                  <a:pt x="2740455" y="3657600"/>
+                </a:lnTo>
+                <a:lnTo>
+                  <a:pt x="2732906" y="3657600"/>
+                </a:lnTo>
+                <a:lnTo>
+                  <a:pt x="2725356" y="3657600"/>
+                </a:lnTo>
+                <a:lnTo>
+                  <a:pt x="2717807" y="3657600"/>
+                </a:lnTo>
+                <a:lnTo>
+                  <a:pt x="2710257" y="3657600"/>
+                </a:lnTo>
+                <a:lnTo>
+                  <a:pt x="2702708" y="3657600"/>
+                </a:lnTo>
+                <a:lnTo>
+                  <a:pt x="2695158" y="3657600"/>
+                </a:lnTo>
+                <a:lnTo>
+                  <a:pt x="2687609" y="3657600"/>
+                </a:lnTo>
+                <a:lnTo>
+                  <a:pt x="2680060" y="3657600"/>
+                </a:lnTo>
+                <a:lnTo>
+                  <a:pt x="2672510" y="3657600"/>
+                </a:lnTo>
+                <a:lnTo>
+                  <a:pt x="2664961" y="3657600"/>
+                </a:lnTo>
+                <a:lnTo>
+                  <a:pt x="2657411" y="3657600"/>
+                </a:lnTo>
+                <a:lnTo>
+                  <a:pt x="2649862" y="3657600"/>
+                </a:lnTo>
+                <a:lnTo>
+                  <a:pt x="2642312" y="3657600"/>
+                </a:lnTo>
+                <a:lnTo>
+                  <a:pt x="2634763" y="3657600"/>
+                </a:lnTo>
+                <a:lnTo>
+                  <a:pt x="2627213" y="3657600"/>
+                </a:lnTo>
+                <a:lnTo>
+                  <a:pt x="2619664" y="3657600"/>
+                </a:lnTo>
+                <a:lnTo>
+                  <a:pt x="2612114" y="3657600"/>
+                </a:lnTo>
+                <a:lnTo>
+                  <a:pt x="2604565" y="3657600"/>
+                </a:lnTo>
+                <a:lnTo>
+                  <a:pt x="2597015" y="3657600"/>
+                </a:lnTo>
+                <a:lnTo>
+                  <a:pt x="2589466" y="3657600"/>
+                </a:lnTo>
+                <a:lnTo>
+                  <a:pt x="2581917" y="3657600"/>
+                </a:lnTo>
+                <a:lnTo>
+                  <a:pt x="2574367" y="3657600"/>
+                </a:lnTo>
+                <a:lnTo>
+                  <a:pt x="2566818" y="3657600"/>
+                </a:lnTo>
+                <a:lnTo>
+                  <a:pt x="2559268" y="3657600"/>
+                </a:lnTo>
+                <a:lnTo>
+                  <a:pt x="2551719" y="3657600"/>
+                </a:lnTo>
+                <a:lnTo>
+                  <a:pt x="2544169" y="3657600"/>
+                </a:lnTo>
+                <a:lnTo>
+                  <a:pt x="2536620" y="3657600"/>
+                </a:lnTo>
+                <a:lnTo>
+                  <a:pt x="2529070" y="3657600"/>
+                </a:lnTo>
+                <a:lnTo>
+                  <a:pt x="2521521" y="3657600"/>
+                </a:lnTo>
+                <a:lnTo>
+                  <a:pt x="2513971" y="3657600"/>
+                </a:lnTo>
+                <a:lnTo>
+                  <a:pt x="2506422" y="3657600"/>
+                </a:lnTo>
+                <a:lnTo>
+                  <a:pt x="2498872" y="3657600"/>
+                </a:lnTo>
+                <a:lnTo>
+                  <a:pt x="2491323" y="3657600"/>
+                </a:lnTo>
+                <a:lnTo>
+                  <a:pt x="2483773" y="3657600"/>
+                </a:lnTo>
+                <a:lnTo>
+                  <a:pt x="2476224" y="3657600"/>
+                </a:lnTo>
+                <a:lnTo>
+                  <a:pt x="2468675" y="3657600"/>
+                </a:lnTo>
+                <a:lnTo>
+                  <a:pt x="2461125" y="3657600"/>
+                </a:lnTo>
+                <a:lnTo>
+                  <a:pt x="2453576" y="3657600"/>
+                </a:lnTo>
+                <a:lnTo>
+                  <a:pt x="2446026" y="3657600"/>
+                </a:lnTo>
+                <a:lnTo>
+                  <a:pt x="2438477" y="3657600"/>
+                </a:lnTo>
+                <a:lnTo>
+                  <a:pt x="2430927" y="3657600"/>
+                </a:lnTo>
+                <a:lnTo>
+                  <a:pt x="2423378" y="3657600"/>
+                </a:lnTo>
+                <a:lnTo>
+                  <a:pt x="2415828" y="3657600"/>
+                </a:lnTo>
+                <a:lnTo>
+                  <a:pt x="2408279" y="3657600"/>
+                </a:lnTo>
+                <a:lnTo>
+                  <a:pt x="2400729" y="3657600"/>
+                </a:lnTo>
+                <a:lnTo>
+                  <a:pt x="2393180" y="3657600"/>
+                </a:lnTo>
+                <a:lnTo>
+                  <a:pt x="2385630" y="3657600"/>
+                </a:lnTo>
+                <a:lnTo>
+                  <a:pt x="2378081" y="3657600"/>
+                </a:lnTo>
+                <a:lnTo>
+                  <a:pt x="2370531" y="3657600"/>
+                </a:lnTo>
+                <a:lnTo>
+                  <a:pt x="2362982" y="3657600"/>
+                </a:lnTo>
+                <a:lnTo>
+                  <a:pt x="2355433" y="3657600"/>
+                </a:lnTo>
+                <a:lnTo>
+                  <a:pt x="2347883" y="3657600"/>
+                </a:lnTo>
+                <a:lnTo>
+                  <a:pt x="2340334" y="3657600"/>
+                </a:lnTo>
+                <a:lnTo>
+                  <a:pt x="2332784" y="3657600"/>
+                </a:lnTo>
+                <a:lnTo>
+                  <a:pt x="2325235" y="3657600"/>
+                </a:lnTo>
+                <a:lnTo>
+                  <a:pt x="2317685" y="3657600"/>
+                </a:lnTo>
+                <a:lnTo>
+                  <a:pt x="2310136" y="3657600"/>
+                </a:lnTo>
+                <a:lnTo>
+                  <a:pt x="2302586" y="3657600"/>
+                </a:lnTo>
+                <a:lnTo>
+                  <a:pt x="2295037" y="3657600"/>
+                </a:lnTo>
+                <a:lnTo>
+                  <a:pt x="2287487" y="3657600"/>
+                </a:lnTo>
+                <a:lnTo>
+                  <a:pt x="2279938" y="3657600"/>
+                </a:lnTo>
+                <a:lnTo>
+                  <a:pt x="2272388" y="3657600"/>
+                </a:lnTo>
+                <a:lnTo>
+                  <a:pt x="2264839" y="3657600"/>
+                </a:lnTo>
+                <a:lnTo>
+                  <a:pt x="2257290" y="3657600"/>
+                </a:lnTo>
+                <a:lnTo>
+                  <a:pt x="2249740" y="3657600"/>
+                </a:lnTo>
+                <a:lnTo>
+                  <a:pt x="2242191" y="3657600"/>
+                </a:lnTo>
+                <a:lnTo>
+                  <a:pt x="2234641" y="3657600"/>
+                </a:lnTo>
+                <a:lnTo>
+                  <a:pt x="2227092" y="3657600"/>
+                </a:lnTo>
+                <a:lnTo>
+                  <a:pt x="2219542" y="3657600"/>
+                </a:lnTo>
+                <a:lnTo>
+                  <a:pt x="2211993" y="3657600"/>
+                </a:lnTo>
+                <a:lnTo>
+                  <a:pt x="2204443" y="3657600"/>
+                </a:lnTo>
+                <a:lnTo>
+                  <a:pt x="2196894" y="3657600"/>
+                </a:lnTo>
+                <a:lnTo>
+                  <a:pt x="2189344" y="3657600"/>
+                </a:lnTo>
+                <a:lnTo>
+                  <a:pt x="2181795" y="3657600"/>
+                </a:lnTo>
+                <a:lnTo>
+                  <a:pt x="2174245" y="3657600"/>
+                </a:lnTo>
+                <a:lnTo>
+                  <a:pt x="2166696" y="3657600"/>
+                </a:lnTo>
+                <a:lnTo>
+                  <a:pt x="2159146" y="3657600"/>
+                </a:lnTo>
+                <a:lnTo>
+                  <a:pt x="2151597" y="3657600"/>
+                </a:lnTo>
+                <a:lnTo>
+                  <a:pt x="2144048" y="3657600"/>
+                </a:lnTo>
+                <a:lnTo>
+                  <a:pt x="2136498" y="3657600"/>
+                </a:lnTo>
+                <a:lnTo>
+                  <a:pt x="2128949" y="3657600"/>
+                </a:lnTo>
+                <a:lnTo>
+                  <a:pt x="2121399" y="3657600"/>
+                </a:lnTo>
+                <a:lnTo>
+                  <a:pt x="2113850" y="3657600"/>
+                </a:lnTo>
+                <a:lnTo>
+                  <a:pt x="2106300" y="3657600"/>
+                </a:lnTo>
+                <a:lnTo>
+                  <a:pt x="2098751" y="3657600"/>
+                </a:lnTo>
+                <a:lnTo>
+                  <a:pt x="2091201" y="3657600"/>
+                </a:lnTo>
+                <a:lnTo>
+                  <a:pt x="2083652" y="3657600"/>
+                </a:lnTo>
+                <a:lnTo>
+                  <a:pt x="2076102" y="3657600"/>
+                </a:lnTo>
+                <a:lnTo>
+                  <a:pt x="2068553" y="3657600"/>
+                </a:lnTo>
+                <a:lnTo>
+                  <a:pt x="2061003" y="3657600"/>
+                </a:lnTo>
+                <a:lnTo>
+                  <a:pt x="2053454" y="3657600"/>
+                </a:lnTo>
+                <a:lnTo>
+                  <a:pt x="2045904" y="3657600"/>
+                </a:lnTo>
+                <a:lnTo>
+                  <a:pt x="2038355" y="3657600"/>
+                </a:lnTo>
+                <a:lnTo>
+                  <a:pt x="2030806" y="3657600"/>
+                </a:lnTo>
+                <a:lnTo>
+                  <a:pt x="2023256" y="3657600"/>
+                </a:lnTo>
+                <a:lnTo>
+                  <a:pt x="2015707" y="3657600"/>
+                </a:lnTo>
+                <a:lnTo>
+                  <a:pt x="2008157" y="3657600"/>
+                </a:lnTo>
+                <a:lnTo>
+                  <a:pt x="2000608" y="3657600"/>
+                </a:lnTo>
+                <a:lnTo>
+                  <a:pt x="1993058" y="3657600"/>
+                </a:lnTo>
+                <a:lnTo>
+                  <a:pt x="1985509" y="3657600"/>
+                </a:lnTo>
+                <a:lnTo>
+                  <a:pt x="1977959" y="3657600"/>
+                </a:lnTo>
+                <a:lnTo>
+                  <a:pt x="1970410" y="3657600"/>
+                </a:lnTo>
+                <a:lnTo>
+                  <a:pt x="1962860" y="3657600"/>
+                </a:lnTo>
+                <a:lnTo>
+                  <a:pt x="1955311" y="3657600"/>
+                </a:lnTo>
+                <a:lnTo>
+                  <a:pt x="1947761" y="3657600"/>
+                </a:lnTo>
+                <a:lnTo>
+                  <a:pt x="1940212" y="3657600"/>
+                </a:lnTo>
+                <a:lnTo>
+                  <a:pt x="1932663" y="3657600"/>
+                </a:lnTo>
+                <a:lnTo>
+                  <a:pt x="1925113" y="3657600"/>
+                </a:lnTo>
+                <a:lnTo>
+                  <a:pt x="1917564" y="3657600"/>
+                </a:lnTo>
+                <a:lnTo>
+                  <a:pt x="1910014" y="3657600"/>
+                </a:lnTo>
+                <a:lnTo>
+                  <a:pt x="1902465" y="3657600"/>
+                </a:lnTo>
+                <a:lnTo>
+                  <a:pt x="1894915" y="3657600"/>
+                </a:lnTo>
+                <a:lnTo>
+                  <a:pt x="1887366" y="3657600"/>
+                </a:lnTo>
+                <a:lnTo>
+                  <a:pt x="1879816" y="3657600"/>
+                </a:lnTo>
+                <a:lnTo>
+                  <a:pt x="1872267" y="3657600"/>
+                </a:lnTo>
+                <a:lnTo>
+                  <a:pt x="1864717" y="3657600"/>
+                </a:lnTo>
+                <a:lnTo>
+                  <a:pt x="1857168" y="3657600"/>
+                </a:lnTo>
+                <a:lnTo>
+                  <a:pt x="1849618" y="3657600"/>
+                </a:lnTo>
+                <a:lnTo>
+                  <a:pt x="1842069" y="3657600"/>
+                </a:lnTo>
+                <a:lnTo>
+                  <a:pt x="1834519" y="3657600"/>
+                </a:lnTo>
+                <a:lnTo>
+                  <a:pt x="1826970" y="3657600"/>
+                </a:lnTo>
+                <a:lnTo>
+                  <a:pt x="1819421" y="3657600"/>
+                </a:lnTo>
+                <a:lnTo>
+                  <a:pt x="1811871" y="3657600"/>
+                </a:lnTo>
+                <a:lnTo>
+                  <a:pt x="1804322" y="3657600"/>
+                </a:lnTo>
+                <a:lnTo>
+                  <a:pt x="1796772" y="3657600"/>
+                </a:lnTo>
+                <a:lnTo>
+                  <a:pt x="1789223" y="3657600"/>
+                </a:lnTo>
+                <a:lnTo>
+                  <a:pt x="1781673" y="3657600"/>
+                </a:lnTo>
+                <a:lnTo>
+                  <a:pt x="1774124" y="3657600"/>
+                </a:lnTo>
+                <a:lnTo>
+                  <a:pt x="1766574" y="3657600"/>
+                </a:lnTo>
+                <a:lnTo>
+                  <a:pt x="1759025" y="3657600"/>
+                </a:lnTo>
+                <a:lnTo>
+                  <a:pt x="1751475" y="3657600"/>
+                </a:lnTo>
+                <a:lnTo>
+                  <a:pt x="1743926" y="3657600"/>
+                </a:lnTo>
+                <a:lnTo>
+                  <a:pt x="1736376" y="3657600"/>
+                </a:lnTo>
+                <a:lnTo>
+                  <a:pt x="1728827" y="3657600"/>
+                </a:lnTo>
+                <a:lnTo>
+                  <a:pt x="1721278" y="3657600"/>
+                </a:lnTo>
+                <a:lnTo>
+                  <a:pt x="1713728" y="3657600"/>
+                </a:lnTo>
+                <a:lnTo>
+                  <a:pt x="1706179" y="3657600"/>
+                </a:lnTo>
+                <a:lnTo>
+                  <a:pt x="1698629" y="3657600"/>
+                </a:lnTo>
+                <a:lnTo>
+                  <a:pt x="1691080" y="3657600"/>
+                </a:lnTo>
+                <a:lnTo>
+                  <a:pt x="1683530" y="3657600"/>
+                </a:lnTo>
+                <a:lnTo>
+                  <a:pt x="1675981" y="3657600"/>
+                </a:lnTo>
+                <a:lnTo>
+                  <a:pt x="1668431" y="3657600"/>
+                </a:lnTo>
+                <a:lnTo>
+                  <a:pt x="1660882" y="3657600"/>
+                </a:lnTo>
+                <a:lnTo>
+                  <a:pt x="1653332" y="3657600"/>
+                </a:lnTo>
+                <a:lnTo>
+                  <a:pt x="1645783" y="3657600"/>
+                </a:lnTo>
+                <a:lnTo>
+                  <a:pt x="1638233" y="3657600"/>
+                </a:lnTo>
+                <a:lnTo>
+                  <a:pt x="1630684" y="3657600"/>
+                </a:lnTo>
+                <a:lnTo>
+                  <a:pt x="1623134" y="3657600"/>
+                </a:lnTo>
+                <a:lnTo>
+                  <a:pt x="1615585" y="3657600"/>
+                </a:lnTo>
+                <a:lnTo>
+                  <a:pt x="1608036" y="3657600"/>
+                </a:lnTo>
+                <a:lnTo>
+                  <a:pt x="1600486" y="3657600"/>
+                </a:lnTo>
+                <a:lnTo>
+                  <a:pt x="1592937" y="3657600"/>
+                </a:lnTo>
+                <a:lnTo>
+                  <a:pt x="1585387" y="3657600"/>
+                </a:lnTo>
+                <a:lnTo>
+                  <a:pt x="1577838" y="3657600"/>
+                </a:lnTo>
+                <a:lnTo>
+                  <a:pt x="1570288" y="3657600"/>
+                </a:lnTo>
+                <a:lnTo>
+                  <a:pt x="1562739" y="3657600"/>
+                </a:lnTo>
+                <a:lnTo>
+                  <a:pt x="1555189" y="3657600"/>
+                </a:lnTo>
+                <a:lnTo>
+                  <a:pt x="1547640" y="3657600"/>
+                </a:lnTo>
+                <a:lnTo>
+                  <a:pt x="1540090" y="3657600"/>
+                </a:lnTo>
+                <a:lnTo>
+                  <a:pt x="1532541" y="3657600"/>
+                </a:lnTo>
+                <a:lnTo>
+                  <a:pt x="1524991" y="3657600"/>
+                </a:lnTo>
+                <a:lnTo>
+                  <a:pt x="1517442" y="3657600"/>
+                </a:lnTo>
+                <a:lnTo>
+                  <a:pt x="1509892" y="3657600"/>
+                </a:lnTo>
+                <a:lnTo>
+                  <a:pt x="1502343" y="3657600"/>
+                </a:lnTo>
+                <a:lnTo>
+                  <a:pt x="1494794" y="3657600"/>
+                </a:lnTo>
+                <a:lnTo>
+                  <a:pt x="1487244" y="3657600"/>
+                </a:lnTo>
+                <a:lnTo>
+                  <a:pt x="1479695" y="3657600"/>
+                </a:lnTo>
+                <a:lnTo>
+                  <a:pt x="1472145" y="3657600"/>
+                </a:lnTo>
+                <a:lnTo>
+                  <a:pt x="1464596" y="3657600"/>
+                </a:lnTo>
+                <a:lnTo>
+                  <a:pt x="1457046" y="3657600"/>
+                </a:lnTo>
+                <a:lnTo>
+                  <a:pt x="1449497" y="3657600"/>
+                </a:lnTo>
+                <a:lnTo>
+                  <a:pt x="1441947" y="3657600"/>
+                </a:lnTo>
+                <a:lnTo>
+                  <a:pt x="1434398" y="3657600"/>
+                </a:lnTo>
+                <a:lnTo>
+                  <a:pt x="1426848" y="3657600"/>
+                </a:lnTo>
+                <a:lnTo>
+                  <a:pt x="1419299" y="3657600"/>
+                </a:lnTo>
+                <a:lnTo>
+                  <a:pt x="1411749" y="3657600"/>
+                </a:lnTo>
+                <a:lnTo>
+                  <a:pt x="1404200" y="3657600"/>
+                </a:lnTo>
+                <a:lnTo>
+                  <a:pt x="1396651" y="3657600"/>
+                </a:lnTo>
+                <a:lnTo>
+                  <a:pt x="1389101" y="3657600"/>
+                </a:lnTo>
+                <a:lnTo>
+                  <a:pt x="1381552" y="3657600"/>
+                </a:lnTo>
+                <a:lnTo>
+                  <a:pt x="1374002" y="3657600"/>
+                </a:lnTo>
+                <a:lnTo>
+                  <a:pt x="1366453" y="3657600"/>
+                </a:lnTo>
+                <a:lnTo>
+                  <a:pt x="1358903" y="3657600"/>
+                </a:lnTo>
+                <a:lnTo>
+                  <a:pt x="1351354" y="3657600"/>
+                </a:lnTo>
+                <a:lnTo>
+                  <a:pt x="1343804" y="3657600"/>
+                </a:lnTo>
+                <a:lnTo>
+                  <a:pt x="1336255" y="3657600"/>
+                </a:lnTo>
+                <a:lnTo>
+                  <a:pt x="1328705" y="3657600"/>
+                </a:lnTo>
+                <a:lnTo>
+                  <a:pt x="1321156" y="3657600"/>
+                </a:lnTo>
+                <a:lnTo>
+                  <a:pt x="1313606" y="3657600"/>
+                </a:lnTo>
+                <a:lnTo>
+                  <a:pt x="1306057" y="3657600"/>
+                </a:lnTo>
+                <a:lnTo>
+                  <a:pt x="1298507" y="3657600"/>
+                </a:lnTo>
+                <a:lnTo>
+                  <a:pt x="1290958" y="3657600"/>
+                </a:lnTo>
+                <a:lnTo>
+                  <a:pt x="1283409" y="3657600"/>
+                </a:lnTo>
+                <a:lnTo>
+                  <a:pt x="1275859" y="3657600"/>
+                </a:lnTo>
+                <a:lnTo>
+                  <a:pt x="1268310" y="3657600"/>
+                </a:lnTo>
+                <a:lnTo>
+                  <a:pt x="1260760" y="3657600"/>
+                </a:lnTo>
+                <a:lnTo>
+                  <a:pt x="1253211" y="3657600"/>
+                </a:lnTo>
+                <a:lnTo>
+                  <a:pt x="1245661" y="3657600"/>
+                </a:lnTo>
+                <a:lnTo>
+                  <a:pt x="1238112" y="3657600"/>
+                </a:lnTo>
+                <a:lnTo>
+                  <a:pt x="1230562" y="3657600"/>
+                </a:lnTo>
+                <a:lnTo>
+                  <a:pt x="1223013" y="3657600"/>
+                </a:lnTo>
+                <a:lnTo>
+                  <a:pt x="1215463" y="3657600"/>
+                </a:lnTo>
+                <a:lnTo>
+                  <a:pt x="1207914" y="3657600"/>
+                </a:lnTo>
+                <a:lnTo>
+                  <a:pt x="1200364" y="3657600"/>
+                </a:lnTo>
+                <a:lnTo>
+                  <a:pt x="1192815" y="3657600"/>
+                </a:lnTo>
+                <a:lnTo>
+                  <a:pt x="1185265" y="3657600"/>
+                </a:lnTo>
+                <a:lnTo>
+                  <a:pt x="1177716" y="3657600"/>
+                </a:lnTo>
+                <a:lnTo>
+                  <a:pt x="1170167" y="3657600"/>
+                </a:lnTo>
+                <a:lnTo>
+                  <a:pt x="1162617" y="3657600"/>
+                </a:lnTo>
+                <a:lnTo>
+                  <a:pt x="1155068" y="3657600"/>
+                </a:lnTo>
+                <a:lnTo>
+                  <a:pt x="1147518" y="3657600"/>
+                </a:lnTo>
+                <a:lnTo>
+                  <a:pt x="1139969" y="3657600"/>
+                </a:lnTo>
+                <a:lnTo>
+                  <a:pt x="1132419" y="3657600"/>
+                </a:lnTo>
+                <a:lnTo>
+                  <a:pt x="1124870" y="3657600"/>
+                </a:lnTo>
+                <a:lnTo>
+                  <a:pt x="1117320" y="3657600"/>
+                </a:lnTo>
+                <a:lnTo>
+                  <a:pt x="1109771" y="3657600"/>
+                </a:lnTo>
+                <a:lnTo>
+                  <a:pt x="1102221" y="3657600"/>
+                </a:lnTo>
+                <a:lnTo>
+                  <a:pt x="1094672" y="3657600"/>
+                </a:lnTo>
+                <a:lnTo>
+                  <a:pt x="1087122" y="3657600"/>
+                </a:lnTo>
+                <a:lnTo>
+                  <a:pt x="1079573" y="3657600"/>
+                </a:lnTo>
+                <a:lnTo>
+                  <a:pt x="1072024" y="3657600"/>
+                </a:lnTo>
+                <a:lnTo>
+                  <a:pt x="1064474" y="3657600"/>
+                </a:lnTo>
+                <a:lnTo>
+                  <a:pt x="1056925" y="3657600"/>
+                </a:lnTo>
+                <a:lnTo>
+                  <a:pt x="1049375" y="3657600"/>
+                </a:lnTo>
+                <a:lnTo>
+                  <a:pt x="1041826" y="3657600"/>
+                </a:lnTo>
+                <a:lnTo>
+                  <a:pt x="1034276" y="3657600"/>
+                </a:lnTo>
+                <a:lnTo>
+                  <a:pt x="1026727" y="3657600"/>
+                </a:lnTo>
+                <a:lnTo>
+                  <a:pt x="1019177" y="3657600"/>
+                </a:lnTo>
+                <a:lnTo>
+                  <a:pt x="1011628" y="3657600"/>
+                </a:lnTo>
+                <a:lnTo>
+                  <a:pt x="1004078" y="3657600"/>
+                </a:lnTo>
+                <a:lnTo>
+                  <a:pt x="996529" y="3657600"/>
+                </a:lnTo>
+                <a:lnTo>
+                  <a:pt x="988979" y="3657600"/>
+                </a:lnTo>
+                <a:lnTo>
+                  <a:pt x="981430" y="3657600"/>
+                </a:lnTo>
+                <a:lnTo>
+                  <a:pt x="973880" y="3657600"/>
+                </a:lnTo>
+                <a:lnTo>
+                  <a:pt x="966331" y="3657600"/>
+                </a:lnTo>
+                <a:lnTo>
+                  <a:pt x="958782" y="3657600"/>
+                </a:lnTo>
+                <a:lnTo>
+                  <a:pt x="951232" y="3657600"/>
+                </a:lnTo>
+                <a:lnTo>
+                  <a:pt x="943683" y="3657600"/>
+                </a:lnTo>
+                <a:lnTo>
+                  <a:pt x="936133" y="3657600"/>
+                </a:lnTo>
+                <a:lnTo>
+                  <a:pt x="928584" y="3657600"/>
+                </a:lnTo>
+                <a:lnTo>
+                  <a:pt x="921034" y="3657600"/>
+                </a:lnTo>
+                <a:lnTo>
+                  <a:pt x="913485" y="3657600"/>
+                </a:lnTo>
+                <a:lnTo>
+                  <a:pt x="905935" y="3657600"/>
+                </a:lnTo>
+                <a:lnTo>
+                  <a:pt x="898386" y="3657600"/>
+                </a:lnTo>
+                <a:lnTo>
+                  <a:pt x="890836" y="3657600"/>
+                </a:lnTo>
+                <a:lnTo>
+                  <a:pt x="883287" y="3657600"/>
+                </a:lnTo>
+                <a:lnTo>
+                  <a:pt x="875737" y="3657600"/>
+                </a:lnTo>
+                <a:lnTo>
+                  <a:pt x="868188" y="3657600"/>
+                </a:lnTo>
+                <a:lnTo>
+                  <a:pt x="860639" y="3657600"/>
+                </a:lnTo>
+                <a:lnTo>
+                  <a:pt x="853089" y="3657600"/>
+                </a:lnTo>
+                <a:lnTo>
+                  <a:pt x="845540" y="3657600"/>
+                </a:lnTo>
+                <a:lnTo>
+                  <a:pt x="837990" y="3657600"/>
+                </a:lnTo>
+                <a:lnTo>
+                  <a:pt x="830441" y="3657600"/>
+                </a:lnTo>
+                <a:lnTo>
+                  <a:pt x="822891" y="3657600"/>
+                </a:lnTo>
+                <a:lnTo>
+                  <a:pt x="815342" y="3657600"/>
+                </a:lnTo>
+                <a:lnTo>
+                  <a:pt x="807792" y="3657600"/>
+                </a:lnTo>
+                <a:lnTo>
+                  <a:pt x="800243" y="3657600"/>
+                </a:lnTo>
+                <a:lnTo>
+                  <a:pt x="792693" y="3657600"/>
+                </a:lnTo>
+                <a:lnTo>
+                  <a:pt x="785144" y="3657600"/>
+                </a:lnTo>
+                <a:lnTo>
+                  <a:pt x="777594" y="3657600"/>
+                </a:lnTo>
+                <a:lnTo>
+                  <a:pt x="770045" y="3657600"/>
+                </a:lnTo>
+                <a:lnTo>
+                  <a:pt x="762495" y="3657600"/>
+                </a:lnTo>
+                <a:lnTo>
+                  <a:pt x="754946" y="3657600"/>
+                </a:lnTo>
+                <a:lnTo>
+                  <a:pt x="747397" y="3657600"/>
+                </a:lnTo>
+                <a:lnTo>
+                  <a:pt x="739847" y="3657600"/>
+                </a:lnTo>
+                <a:lnTo>
+                  <a:pt x="732298" y="3657600"/>
+                </a:lnTo>
+                <a:lnTo>
+                  <a:pt x="724748" y="3657600"/>
+                </a:lnTo>
+                <a:lnTo>
+                  <a:pt x="717199" y="3657600"/>
+                </a:lnTo>
+                <a:lnTo>
+                  <a:pt x="709649" y="3657600"/>
+                </a:lnTo>
+                <a:lnTo>
+                  <a:pt x="702100" y="3657600"/>
+                </a:lnTo>
+                <a:lnTo>
+                  <a:pt x="694550" y="3657600"/>
+                </a:lnTo>
+                <a:lnTo>
+                  <a:pt x="687001" y="3657600"/>
+                </a:lnTo>
+                <a:lnTo>
+                  <a:pt x="679451" y="3657600"/>
+                </a:lnTo>
+                <a:lnTo>
+                  <a:pt x="671902" y="3657600"/>
+                </a:lnTo>
+                <a:lnTo>
+                  <a:pt x="664352" y="3657600"/>
+                </a:lnTo>
+                <a:lnTo>
+                  <a:pt x="656803" y="3657600"/>
+                </a:lnTo>
+                <a:lnTo>
+                  <a:pt x="649253" y="3657600"/>
+                </a:lnTo>
+                <a:lnTo>
+                  <a:pt x="641704" y="3657600"/>
+                </a:lnTo>
+                <a:lnTo>
+                  <a:pt x="634155" y="3657600"/>
+                </a:lnTo>
+                <a:lnTo>
+                  <a:pt x="626605" y="3657600"/>
+                </a:lnTo>
+                <a:lnTo>
+                  <a:pt x="619056" y="3657600"/>
+                </a:lnTo>
+                <a:lnTo>
+                  <a:pt x="611506" y="3657600"/>
+                </a:lnTo>
+                <a:lnTo>
+                  <a:pt x="603957" y="3657600"/>
+                </a:lnTo>
+                <a:lnTo>
+                  <a:pt x="596407" y="3657600"/>
+                </a:lnTo>
+                <a:lnTo>
+                  <a:pt x="588858" y="3657600"/>
+                </a:lnTo>
+                <a:lnTo>
+                  <a:pt x="581308" y="3657600"/>
+                </a:lnTo>
+                <a:lnTo>
+                  <a:pt x="573759" y="3657600"/>
+                </a:lnTo>
+                <a:lnTo>
+                  <a:pt x="566209" y="3657600"/>
+                </a:lnTo>
+                <a:lnTo>
+                  <a:pt x="558660" y="3657600"/>
+                </a:lnTo>
+                <a:lnTo>
+                  <a:pt x="551110" y="3657600"/>
+                </a:lnTo>
+                <a:lnTo>
+                  <a:pt x="543561" y="3657600"/>
+                </a:lnTo>
+                <a:lnTo>
+                  <a:pt x="536012" y="3657600"/>
+                </a:lnTo>
+                <a:lnTo>
+                  <a:pt x="528462" y="3657600"/>
+                </a:lnTo>
+                <a:lnTo>
+                  <a:pt x="520913" y="3657600"/>
+                </a:lnTo>
+                <a:lnTo>
+                  <a:pt x="513363" y="3657600"/>
+                </a:lnTo>
+                <a:lnTo>
+                  <a:pt x="505814" y="3657600"/>
+                </a:lnTo>
+                <a:lnTo>
+                  <a:pt x="498264" y="3657600"/>
+                </a:lnTo>
+                <a:lnTo>
+                  <a:pt x="490715" y="3657600"/>
+                </a:lnTo>
+                <a:lnTo>
+                  <a:pt x="483165" y="3657600"/>
+                </a:lnTo>
+                <a:lnTo>
+                  <a:pt x="475616" y="3657600"/>
+                </a:lnTo>
+                <a:lnTo>
+                  <a:pt x="468066" y="3657600"/>
+                </a:lnTo>
+                <a:lnTo>
+                  <a:pt x="460517" y="3657600"/>
+                </a:lnTo>
+                <a:lnTo>
+                  <a:pt x="452967" y="3657600"/>
+                </a:lnTo>
+                <a:lnTo>
+                  <a:pt x="445418" y="3657600"/>
+                </a:lnTo>
+                <a:lnTo>
+                  <a:pt x="437868" y="3657600"/>
+                </a:lnTo>
+                <a:lnTo>
+                  <a:pt x="430319" y="3657600"/>
+                </a:lnTo>
+                <a:lnTo>
+                  <a:pt x="422770" y="3657600"/>
+                </a:lnTo>
+                <a:lnTo>
+                  <a:pt x="415220" y="3657600"/>
+                </a:lnTo>
+                <a:lnTo>
+                  <a:pt x="407671" y="3657600"/>
+                </a:lnTo>
+                <a:lnTo>
+                  <a:pt x="400121" y="3657600"/>
+                </a:lnTo>
+                <a:lnTo>
+                  <a:pt x="392572" y="3657600"/>
+                </a:lnTo>
+                <a:lnTo>
+                  <a:pt x="385022" y="3657600"/>
+                </a:lnTo>
+                <a:lnTo>
+                  <a:pt x="377473" y="3657600"/>
+                </a:lnTo>
+                <a:lnTo>
+                  <a:pt x="369923" y="3657600"/>
+                </a:lnTo>
+                <a:lnTo>
+                  <a:pt x="362374" y="3657600"/>
+                </a:lnTo>
+                <a:lnTo>
+                  <a:pt x="354824" y="3657600"/>
+                </a:lnTo>
+                <a:lnTo>
+                  <a:pt x="347275" y="3657600"/>
+                </a:lnTo>
+                <a:lnTo>
+                  <a:pt x="339725" y="3657600"/>
+                </a:lnTo>
+                <a:lnTo>
+                  <a:pt x="332176" y="3657600"/>
+                </a:lnTo>
+                <a:lnTo>
+                  <a:pt x="324626" y="3657600"/>
+                </a:lnTo>
+                <a:lnTo>
+                  <a:pt x="317077" y="3657600"/>
+                </a:lnTo>
+                <a:lnTo>
+                  <a:pt x="309528" y="3657600"/>
+                </a:lnTo>
+                <a:lnTo>
+                  <a:pt x="301978" y="3657600"/>
+                </a:lnTo>
+                <a:lnTo>
+                  <a:pt x="294429" y="3657600"/>
+                </a:lnTo>
+                <a:lnTo>
+                  <a:pt x="286879" y="3657600"/>
+                </a:lnTo>
+                <a:lnTo>
+                  <a:pt x="279330" y="3657600"/>
+                </a:lnTo>
+                <a:lnTo>
+                  <a:pt x="271780" y="3657600"/>
+                </a:lnTo>
+                <a:lnTo>
+                  <a:pt x="264231" y="3657600"/>
+                </a:lnTo>
+                <a:lnTo>
+                  <a:pt x="256681" y="3657600"/>
+                </a:lnTo>
+                <a:lnTo>
+                  <a:pt x="249132" y="3657600"/>
+                </a:lnTo>
+                <a:lnTo>
+                  <a:pt x="241582" y="3657600"/>
+                </a:lnTo>
+                <a:lnTo>
+                  <a:pt x="234033" y="3657600"/>
+                </a:lnTo>
+                <a:lnTo>
+                  <a:pt x="226483" y="3657600"/>
+                </a:lnTo>
+                <a:lnTo>
+                  <a:pt x="218934" y="3657600"/>
+                </a:lnTo>
+                <a:lnTo>
+                  <a:pt x="211385" y="3657600"/>
+                </a:lnTo>
+                <a:lnTo>
+                  <a:pt x="203835" y="3657600"/>
+                </a:lnTo>
+                <a:lnTo>
+                  <a:pt x="196286" y="3657600"/>
+                </a:lnTo>
+                <a:lnTo>
+                  <a:pt x="188736" y="3657600"/>
+                </a:lnTo>
+                <a:lnTo>
+                  <a:pt x="181187" y="3657600"/>
+                </a:lnTo>
+                <a:lnTo>
+                  <a:pt x="173637" y="3657600"/>
+                </a:lnTo>
+                <a:lnTo>
+                  <a:pt x="166088" y="3657600"/>
+                </a:lnTo>
+                <a:lnTo>
+                  <a:pt x="158538" y="3657600"/>
+                </a:lnTo>
+                <a:lnTo>
+                  <a:pt x="150989" y="3657600"/>
+                </a:lnTo>
+                <a:lnTo>
+                  <a:pt x="143439" y="3657600"/>
+                </a:lnTo>
+                <a:lnTo>
+                  <a:pt x="135890" y="3657600"/>
+                </a:lnTo>
+                <a:lnTo>
+                  <a:pt x="128340" y="3657600"/>
+                </a:lnTo>
+                <a:lnTo>
+                  <a:pt x="120791" y="3657600"/>
+                </a:lnTo>
+                <a:lnTo>
+                  <a:pt x="113241" y="3657600"/>
+                </a:lnTo>
+                <a:lnTo>
+                  <a:pt x="105692" y="3657600"/>
+                </a:lnTo>
+                <a:lnTo>
+                  <a:pt x="98143" y="3657600"/>
+                </a:lnTo>
+                <a:lnTo>
+                  <a:pt x="90593" y="3657600"/>
+                </a:lnTo>
+                <a:lnTo>
+                  <a:pt x="83044" y="3657600"/>
+                </a:lnTo>
+                <a:lnTo>
+                  <a:pt x="75494" y="3657600"/>
+                </a:lnTo>
+                <a:lnTo>
+                  <a:pt x="67945" y="3657600"/>
+                </a:lnTo>
+                <a:lnTo>
+                  <a:pt x="60395" y="3657600"/>
+                </a:lnTo>
+                <a:lnTo>
+                  <a:pt x="52846" y="3657600"/>
+                </a:lnTo>
+                <a:lnTo>
+                  <a:pt x="45296" y="3657600"/>
+                </a:lnTo>
+                <a:lnTo>
+                  <a:pt x="37747" y="3657600"/>
+                </a:lnTo>
+                <a:lnTo>
+                  <a:pt x="30197" y="3657600"/>
+                </a:lnTo>
+                <a:lnTo>
+                  <a:pt x="22648" y="3657600"/>
+                </a:lnTo>
+                <a:lnTo>
+                  <a:pt x="15098" y="3657600"/>
+                </a:lnTo>
+                <a:lnTo>
+                  <a:pt x="7549" y="3657600"/>
+                </a:lnTo>
+                <a:lnTo>
+                  <a:pt x="0" y="3657600"/>
+                </a:lnTo>
+                <a:close/>
+              </a:path>
+            </a:pathLst>
+          </a:custGeom>
+          <a:solidFill>
+            <a:srgbClr val="8EDBD4">
+              <a:alpha val="30000"/>
+            </a:srgbClr>
+          </a:solidFill>
+          <a:ln w="10160">
+            <a:solidFill>
+              <a:srgbClr val="8EDBD4">
+                <a:alpha val="30000"/>
+              </a:srgbClr>
+            </a:solidFill>
+          </a:ln>
+          <a:effectLst/>
+        </p:spPr>
+        <p:txBody>
+          <a:bodyPr rtlCol="0" anchor="ctr"/>
+          <a:lstStyle/>
+          <a:p>
+            <a:pPr algn="ctr"/>
+          </a:p>
+        </p:txBody>
+      </p:sp>
+      <p:sp>
+        <p:nvSpPr>
+          <p:cNvPr id="33" name="C1-E15 polygon 31" descr="sci-ppt:o031"/>
+          <p:cNvSpPr/>
+          <p:nvPr/>
+        </p:nvSpPr>
+        <p:spPr>
+          <a:xfrm>
+            <a:off x="914400" y="1821732"/>
+            <a:ext cx="5964077" cy="3207468"/>
+          </a:xfrm>
+          <a:custGeom>
+            <a:avLst/>
+            <a:gdLst/>
+            <a:ahLst/>
+            <a:cxnLst/>
+            <a:rect l="l" t="t" r="r" b="b"/>
+            <a:pathLst>
+              <a:path w="5964077" h="3207468">
+                <a:moveTo>
+                  <a:pt x="0" y="3207468"/>
+                </a:moveTo>
+                <a:lnTo>
+                  <a:pt x="37747" y="3207166"/>
+                </a:lnTo>
+                <a:lnTo>
+                  <a:pt x="75494" y="3206615"/>
+                </a:lnTo>
+                <a:lnTo>
+                  <a:pt x="113241" y="3205901"/>
+                </a:lnTo>
+                <a:lnTo>
+                  <a:pt x="150989" y="3205055"/>
+                </a:lnTo>
+                <a:lnTo>
+                  <a:pt x="188736" y="3204096"/>
+                </a:lnTo>
+                <a:lnTo>
+                  <a:pt x="226483" y="3203036"/>
+                </a:lnTo>
+                <a:lnTo>
+                  <a:pt x="264231" y="3201883"/>
+                </a:lnTo>
+                <a:lnTo>
+                  <a:pt x="301978" y="3200644"/>
+                </a:lnTo>
+                <a:lnTo>
+                  <a:pt x="339725" y="3199325"/>
+                </a:lnTo>
+                <a:lnTo>
+                  <a:pt x="377473" y="3197931"/>
+                </a:lnTo>
+                <a:lnTo>
+                  <a:pt x="415220" y="3196464"/>
+                </a:lnTo>
+                <a:lnTo>
+                  <a:pt x="452967" y="3194930"/>
+                </a:lnTo>
+                <a:lnTo>
+                  <a:pt x="490715" y="3193330"/>
+                </a:lnTo>
+                <a:lnTo>
+                  <a:pt x="528462" y="3191666"/>
+                </a:lnTo>
+                <a:lnTo>
+                  <a:pt x="566209" y="3189942"/>
+                </a:lnTo>
+                <a:lnTo>
+                  <a:pt x="603957" y="3188159"/>
+                </a:lnTo>
+                <a:lnTo>
+                  <a:pt x="641704" y="3186319"/>
+                </a:lnTo>
+                <a:lnTo>
+                  <a:pt x="679451" y="3184423"/>
+                </a:lnTo>
+                <a:lnTo>
+                  <a:pt x="717199" y="3182473"/>
+                </a:lnTo>
+                <a:lnTo>
+                  <a:pt x="754946" y="3180470"/>
+                </a:lnTo>
+                <a:lnTo>
+                  <a:pt x="792693" y="3178416"/>
+                </a:lnTo>
+                <a:lnTo>
+                  <a:pt x="830441" y="3176311"/>
+                </a:lnTo>
+                <a:lnTo>
+                  <a:pt x="868188" y="3174156"/>
+                </a:lnTo>
+                <a:lnTo>
+                  <a:pt x="905935" y="3171953"/>
+                </a:lnTo>
+                <a:lnTo>
+                  <a:pt x="943683" y="3169702"/>
+                </a:lnTo>
+                <a:lnTo>
+                  <a:pt x="981430" y="3167404"/>
+                </a:lnTo>
+                <a:lnTo>
+                  <a:pt x="1019177" y="3165059"/>
+                </a:lnTo>
+                <a:lnTo>
+                  <a:pt x="1056925" y="3162669"/>
+                </a:lnTo>
+                <a:lnTo>
+                  <a:pt x="1094672" y="3160234"/>
+                </a:lnTo>
+                <a:lnTo>
+                  <a:pt x="1132419" y="3157754"/>
+                </a:lnTo>
+                <a:lnTo>
+                  <a:pt x="1170167" y="3155230"/>
+                </a:lnTo>
+                <a:lnTo>
+                  <a:pt x="1207914" y="3152662"/>
+                </a:lnTo>
+                <a:lnTo>
+                  <a:pt x="1245661" y="3150050"/>
+                </a:lnTo>
+                <a:lnTo>
+                  <a:pt x="1283409" y="3147396"/>
+                </a:lnTo>
+                <a:lnTo>
+                  <a:pt x="1321156" y="3144698"/>
+                </a:lnTo>
+                <a:lnTo>
+                  <a:pt x="1358903" y="3141958"/>
+                </a:lnTo>
+                <a:lnTo>
+                  <a:pt x="1396651" y="3139176"/>
+                </a:lnTo>
+                <a:lnTo>
+                  <a:pt x="1434398" y="3136352"/>
+                </a:lnTo>
+                <a:lnTo>
+                  <a:pt x="1472145" y="3133486"/>
+                </a:lnTo>
+                <a:lnTo>
+                  <a:pt x="1509892" y="3130577"/>
+                </a:lnTo>
+                <a:lnTo>
+                  <a:pt x="1547640" y="3127627"/>
+                </a:lnTo>
+                <a:lnTo>
+                  <a:pt x="1585387" y="3124635"/>
+                </a:lnTo>
+                <a:lnTo>
+                  <a:pt x="1623134" y="3121601"/>
+                </a:lnTo>
+                <a:lnTo>
+                  <a:pt x="1660882" y="3118525"/>
+                </a:lnTo>
+                <a:lnTo>
+                  <a:pt x="1698629" y="3115408"/>
+                </a:lnTo>
+                <a:lnTo>
+                  <a:pt x="1736376" y="3112248"/>
+                </a:lnTo>
+                <a:lnTo>
+                  <a:pt x="1774124" y="3109046"/>
+                </a:lnTo>
+                <a:lnTo>
+                  <a:pt x="1811871" y="3105802"/>
+                </a:lnTo>
+                <a:lnTo>
+                  <a:pt x="1849618" y="3102515"/>
+                </a:lnTo>
+                <a:lnTo>
+                  <a:pt x="1887366" y="3099186"/>
+                </a:lnTo>
+                <a:lnTo>
+                  <a:pt x="1925113" y="3095813"/>
+                </a:lnTo>
+                <a:lnTo>
+                  <a:pt x="1962860" y="3092398"/>
+                </a:lnTo>
+                <a:lnTo>
+                  <a:pt x="2000608" y="3088938"/>
+                </a:lnTo>
+                <a:lnTo>
+                  <a:pt x="2038355" y="3085435"/>
+                </a:lnTo>
+                <a:lnTo>
+                  <a:pt x="2076102" y="3081887"/>
+                </a:lnTo>
+                <a:lnTo>
+                  <a:pt x="2113850" y="3078294"/>
+                </a:lnTo>
+                <a:lnTo>
+                  <a:pt x="2151597" y="3074656"/>
+                </a:lnTo>
+                <a:lnTo>
+                  <a:pt x="2189344" y="3070972"/>
+                </a:lnTo>
+                <a:lnTo>
+                  <a:pt x="2227092" y="3067242"/>
+                </a:lnTo>
+                <a:lnTo>
+                  <a:pt x="2264839" y="3063464"/>
+                </a:lnTo>
+                <a:lnTo>
+                  <a:pt x="2302586" y="3059639"/>
+                </a:lnTo>
+                <a:lnTo>
+                  <a:pt x="2340334" y="3055766"/>
+                </a:lnTo>
+                <a:lnTo>
+                  <a:pt x="2378081" y="3051844"/>
+                </a:lnTo>
+                <a:lnTo>
+                  <a:pt x="2415828" y="3047872"/>
+                </a:lnTo>
+                <a:lnTo>
+                  <a:pt x="2453576" y="3043850"/>
+                </a:lnTo>
+                <a:lnTo>
+                  <a:pt x="2491323" y="3039777"/>
+                </a:lnTo>
+                <a:lnTo>
+                  <a:pt x="2529070" y="3035651"/>
+                </a:lnTo>
+                <a:lnTo>
+                  <a:pt x="2566818" y="3031472"/>
+                </a:lnTo>
+                <a:lnTo>
+                  <a:pt x="2604565" y="3027239"/>
+                </a:lnTo>
+                <a:lnTo>
+                  <a:pt x="2642312" y="3022950"/>
+                </a:lnTo>
+                <a:lnTo>
+                  <a:pt x="2680060" y="3018606"/>
+                </a:lnTo>
+                <a:lnTo>
+                  <a:pt x="2717807" y="3014204"/>
+                </a:lnTo>
+                <a:lnTo>
+                  <a:pt x="2755554" y="3009744"/>
+                </a:lnTo>
+                <a:lnTo>
+                  <a:pt x="2793302" y="3005223"/>
+                </a:lnTo>
+                <a:lnTo>
+                  <a:pt x="2831049" y="3000642"/>
+                </a:lnTo>
+                <a:lnTo>
+                  <a:pt x="2868796" y="2995997"/>
+                </a:lnTo>
+                <a:lnTo>
+                  <a:pt x="2906543" y="2991289"/>
+                </a:lnTo>
+                <a:lnTo>
+                  <a:pt x="2944291" y="2986515"/>
+                </a:lnTo>
+                <a:lnTo>
+                  <a:pt x="2982038" y="2981674"/>
+                </a:lnTo>
+                <a:lnTo>
+                  <a:pt x="3019785" y="2976764"/>
+                </a:lnTo>
+                <a:lnTo>
+                  <a:pt x="3057533" y="2971783"/>
+                </a:lnTo>
+                <a:lnTo>
+                  <a:pt x="3095280" y="2966729"/>
+                </a:lnTo>
+                <a:lnTo>
+                  <a:pt x="3133027" y="2961601"/>
+                </a:lnTo>
+                <a:lnTo>
+                  <a:pt x="3170775" y="2956396"/>
+                </a:lnTo>
+                <a:lnTo>
+                  <a:pt x="3208522" y="2951112"/>
+                </a:lnTo>
+                <a:lnTo>
+                  <a:pt x="3246269" y="2945747"/>
+                </a:lnTo>
+                <a:lnTo>
+                  <a:pt x="3284017" y="2940299"/>
+                </a:lnTo>
+                <a:lnTo>
+                  <a:pt x="3321764" y="2934764"/>
+                </a:lnTo>
+                <a:lnTo>
+                  <a:pt x="3359511" y="2929141"/>
+                </a:lnTo>
+                <a:lnTo>
+                  <a:pt x="3397259" y="2923426"/>
+                </a:lnTo>
+                <a:lnTo>
+                  <a:pt x="3435006" y="2917616"/>
+                </a:lnTo>
+                <a:lnTo>
+                  <a:pt x="3472753" y="2911709"/>
+                </a:lnTo>
+                <a:lnTo>
+                  <a:pt x="3510501" y="2905701"/>
+                </a:lnTo>
+                <a:lnTo>
+                  <a:pt x="3548248" y="2899588"/>
+                </a:lnTo>
+                <a:lnTo>
+                  <a:pt x="3585995" y="2893367"/>
+                </a:lnTo>
+                <a:lnTo>
+                  <a:pt x="3623743" y="2887034"/>
+                </a:lnTo>
+                <a:lnTo>
+                  <a:pt x="3661490" y="2880585"/>
+                </a:lnTo>
+                <a:lnTo>
+                  <a:pt x="3699237" y="2874016"/>
+                </a:lnTo>
+                <a:lnTo>
+                  <a:pt x="3736985" y="2867322"/>
+                </a:lnTo>
+                <a:lnTo>
+                  <a:pt x="3774732" y="2860498"/>
+                </a:lnTo>
+                <a:lnTo>
+                  <a:pt x="3812479" y="2853539"/>
+                </a:lnTo>
+                <a:lnTo>
+                  <a:pt x="3850227" y="2846439"/>
+                </a:lnTo>
+                <a:lnTo>
+                  <a:pt x="3887974" y="2839194"/>
+                </a:lnTo>
+                <a:lnTo>
+                  <a:pt x="3925721" y="2831796"/>
+                </a:lnTo>
+                <a:lnTo>
+                  <a:pt x="3963469" y="2824239"/>
+                </a:lnTo>
+                <a:lnTo>
+                  <a:pt x="4001216" y="2816517"/>
+                </a:lnTo>
+                <a:lnTo>
+                  <a:pt x="4038963" y="2808621"/>
+                </a:lnTo>
+                <a:lnTo>
+                  <a:pt x="4076711" y="2800545"/>
+                </a:lnTo>
+                <a:lnTo>
+                  <a:pt x="4114458" y="2792278"/>
+                </a:lnTo>
+                <a:lnTo>
+                  <a:pt x="4152205" y="2783814"/>
+                </a:lnTo>
+                <a:lnTo>
+                  <a:pt x="4189953" y="2775140"/>
+                </a:lnTo>
+                <a:lnTo>
+                  <a:pt x="4227700" y="2766249"/>
+                </a:lnTo>
+                <a:lnTo>
+                  <a:pt x="4265447" y="2757127"/>
+                </a:lnTo>
+                <a:lnTo>
+                  <a:pt x="4303195" y="2747764"/>
+                </a:lnTo>
+                <a:lnTo>
+                  <a:pt x="4340942" y="2738146"/>
+                </a:lnTo>
+                <a:lnTo>
+                  <a:pt x="4378689" y="2728259"/>
+                </a:lnTo>
+                <a:lnTo>
+                  <a:pt x="4416436" y="2718088"/>
+                </a:lnTo>
+                <a:lnTo>
+                  <a:pt x="4454184" y="2707618"/>
+                </a:lnTo>
+                <a:lnTo>
+                  <a:pt x="4491931" y="2696830"/>
+                </a:lnTo>
+                <a:lnTo>
+                  <a:pt x="4529678" y="2685705"/>
+                </a:lnTo>
+                <a:lnTo>
+                  <a:pt x="4567426" y="2674223"/>
+                </a:lnTo>
+                <a:lnTo>
+                  <a:pt x="4605173" y="2662360"/>
+                </a:lnTo>
+                <a:lnTo>
+                  <a:pt x="4642920" y="2650092"/>
+                </a:lnTo>
+                <a:lnTo>
+                  <a:pt x="4680668" y="2637391"/>
+                </a:lnTo>
+                <a:lnTo>
+                  <a:pt x="4718415" y="2624228"/>
+                </a:lnTo>
+                <a:lnTo>
+                  <a:pt x="4756162" y="2610568"/>
+                </a:lnTo>
+                <a:lnTo>
+                  <a:pt x="4793910" y="2596377"/>
+                </a:lnTo>
+                <a:lnTo>
+                  <a:pt x="4831657" y="2581613"/>
+                </a:lnTo>
+                <a:lnTo>
+                  <a:pt x="4869404" y="2566232"/>
+                </a:lnTo>
+                <a:lnTo>
+                  <a:pt x="4907152" y="2550183"/>
+                </a:lnTo>
+                <a:lnTo>
+                  <a:pt x="4944899" y="2533410"/>
+                </a:lnTo>
+                <a:lnTo>
+                  <a:pt x="4982646" y="2515851"/>
+                </a:lnTo>
+                <a:lnTo>
+                  <a:pt x="5020394" y="2497433"/>
+                </a:lnTo>
+                <a:lnTo>
+                  <a:pt x="5058141" y="2478078"/>
+                </a:lnTo>
+                <a:lnTo>
+                  <a:pt x="5095888" y="2457693"/>
+                </a:lnTo>
+                <a:lnTo>
+                  <a:pt x="5133636" y="2436174"/>
+                </a:lnTo>
+                <a:lnTo>
+                  <a:pt x="5171383" y="2413400"/>
+                </a:lnTo>
+                <a:lnTo>
+                  <a:pt x="5209130" y="2389232"/>
+                </a:lnTo>
+                <a:lnTo>
+                  <a:pt x="5246878" y="2363507"/>
+                </a:lnTo>
+                <a:lnTo>
+                  <a:pt x="5284625" y="2336035"/>
+                </a:lnTo>
+                <a:lnTo>
+                  <a:pt x="5322372" y="2306592"/>
+                </a:lnTo>
+                <a:lnTo>
+                  <a:pt x="5360120" y="2274910"/>
+                </a:lnTo>
+                <a:lnTo>
+                  <a:pt x="5397867" y="2240665"/>
+                </a:lnTo>
+                <a:lnTo>
+                  <a:pt x="5435614" y="2203467"/>
+                </a:lnTo>
+                <a:lnTo>
+                  <a:pt x="5473362" y="2162833"/>
+                </a:lnTo>
+                <a:lnTo>
+                  <a:pt x="5511109" y="2118162"/>
+                </a:lnTo>
+                <a:lnTo>
+                  <a:pt x="5548856" y="2068694"/>
+                </a:lnTo>
+                <a:lnTo>
+                  <a:pt x="5586604" y="2013450"/>
+                </a:lnTo>
+                <a:lnTo>
+                  <a:pt x="5624351" y="1951145"/>
+                </a:lnTo>
+                <a:lnTo>
+                  <a:pt x="5662098" y="1880052"/>
+                </a:lnTo>
+                <a:lnTo>
+                  <a:pt x="5699846" y="1797780"/>
+                </a:lnTo>
+                <a:lnTo>
+                  <a:pt x="5737593" y="1700914"/>
+                </a:lnTo>
+                <a:lnTo>
+                  <a:pt x="5775340" y="1584363"/>
+                </a:lnTo>
+                <a:lnTo>
+                  <a:pt x="5813087" y="1440128"/>
+                </a:lnTo>
+                <a:lnTo>
+                  <a:pt x="5850835" y="1254737"/>
+                </a:lnTo>
+                <a:lnTo>
+                  <a:pt x="5888582" y="1003243"/>
+                </a:lnTo>
+                <a:lnTo>
+                  <a:pt x="5926329" y="632502"/>
+                </a:lnTo>
+                <a:lnTo>
+                  <a:pt x="5964077" y="0"/>
                 </a:lnTo>
               </a:path>
             </a:pathLst>
@@ -4442,456 +9314,39 @@
           </a:p>
         </p:txBody>
       </p:sp>
-      <p:sp>
-        <p:nvSpPr>
-          <p:cNvPr id="36" name="C1-E15 polygon 34" descr="sci-ppt:o034"/>
-          <p:cNvSpPr/>
+      <p:cxnSp>
+        <p:nvCxnSpPr>
+          <p:cNvPr id="34" name="C1-E15 line 32" descr="sci-ppt:o032"/>
+          <p:cNvCxnSpPr/>
           <p:nvPr/>
-        </p:nvSpPr>
+        </p:nvCxnSpPr>
         <p:spPr>
           <a:xfrm>
-            <a:off x="2099013" y="1391141"/>
-            <a:ext cx="4758987" cy="2589847"/>
+            <a:off x="6949440" y="1371600"/>
+            <a:ext cx="0" cy="3657600"/>
           </a:xfrm>
-          <a:custGeom>
+          <a:prstGeom prst="line">
             <a:avLst/>
-            <a:gdLst/>
-            <a:ahLst/>
-            <a:cxnLst/>
-            <a:rect l="l" t="t" r="r" b="b"/>
-            <a:pathLst>
-              <a:path w="4758987" h="2589847">
-                <a:moveTo>
-                  <a:pt x="0" y="0"/>
-                </a:moveTo>
-                <a:lnTo>
-                  <a:pt x="39168" y="21316"/>
-                </a:lnTo>
-                <a:lnTo>
-                  <a:pt x="78337" y="42632"/>
-                </a:lnTo>
-                <a:lnTo>
-                  <a:pt x="117506" y="63947"/>
-                </a:lnTo>
-                <a:lnTo>
-                  <a:pt x="156674" y="85263"/>
-                </a:lnTo>
-                <a:lnTo>
-                  <a:pt x="195843" y="106579"/>
-                </a:lnTo>
-                <a:lnTo>
-                  <a:pt x="235012" y="127894"/>
-                </a:lnTo>
-                <a:lnTo>
-                  <a:pt x="274180" y="149210"/>
-                </a:lnTo>
-                <a:lnTo>
-                  <a:pt x="313349" y="170525"/>
-                </a:lnTo>
-                <a:lnTo>
-                  <a:pt x="352517" y="191841"/>
-                </a:lnTo>
-                <a:lnTo>
-                  <a:pt x="391686" y="213157"/>
-                </a:lnTo>
-                <a:lnTo>
-                  <a:pt x="430855" y="234472"/>
-                </a:lnTo>
-                <a:lnTo>
-                  <a:pt x="470023" y="255788"/>
-                </a:lnTo>
-                <a:lnTo>
-                  <a:pt x="509192" y="277103"/>
-                </a:lnTo>
-                <a:lnTo>
-                  <a:pt x="548360" y="298419"/>
-                </a:lnTo>
-                <a:lnTo>
-                  <a:pt x="587529" y="319735"/>
-                </a:lnTo>
-                <a:lnTo>
-                  <a:pt x="626698" y="341050"/>
-                </a:lnTo>
-                <a:lnTo>
-                  <a:pt x="665866" y="362366"/>
-                </a:lnTo>
-                <a:lnTo>
-                  <a:pt x="705035" y="383682"/>
-                </a:lnTo>
-                <a:lnTo>
-                  <a:pt x="744204" y="404997"/>
-                </a:lnTo>
-                <a:lnTo>
-                  <a:pt x="783372" y="426313"/>
-                </a:lnTo>
-                <a:lnTo>
-                  <a:pt x="822541" y="447628"/>
-                </a:lnTo>
-                <a:lnTo>
-                  <a:pt x="861709" y="468944"/>
-                </a:lnTo>
-                <a:lnTo>
-                  <a:pt x="900878" y="490260"/>
-                </a:lnTo>
-                <a:lnTo>
-                  <a:pt x="940047" y="511575"/>
-                </a:lnTo>
-                <a:lnTo>
-                  <a:pt x="979215" y="532891"/>
-                </a:lnTo>
-                <a:lnTo>
-                  <a:pt x="1018384" y="554206"/>
-                </a:lnTo>
-                <a:lnTo>
-                  <a:pt x="1057552" y="575522"/>
-                </a:lnTo>
-                <a:lnTo>
-                  <a:pt x="1096721" y="596838"/>
-                </a:lnTo>
-                <a:lnTo>
-                  <a:pt x="1135890" y="618153"/>
-                </a:lnTo>
-                <a:lnTo>
-                  <a:pt x="1175058" y="639469"/>
-                </a:lnTo>
-                <a:lnTo>
-                  <a:pt x="1214227" y="660784"/>
-                </a:lnTo>
-                <a:lnTo>
-                  <a:pt x="1253396" y="682100"/>
-                </a:lnTo>
-                <a:lnTo>
-                  <a:pt x="1292564" y="703416"/>
-                </a:lnTo>
-                <a:lnTo>
-                  <a:pt x="1331733" y="724731"/>
-                </a:lnTo>
-                <a:lnTo>
-                  <a:pt x="1370901" y="746047"/>
-                </a:lnTo>
-                <a:lnTo>
-                  <a:pt x="1410070" y="767363"/>
-                </a:lnTo>
-                <a:lnTo>
-                  <a:pt x="1449239" y="788678"/>
-                </a:lnTo>
-                <a:lnTo>
-                  <a:pt x="1488407" y="809994"/>
-                </a:lnTo>
-                <a:lnTo>
-                  <a:pt x="1527576" y="831309"/>
-                </a:lnTo>
-                <a:lnTo>
-                  <a:pt x="1566744" y="852625"/>
-                </a:lnTo>
-                <a:lnTo>
-                  <a:pt x="1605913" y="873941"/>
-                </a:lnTo>
-                <a:lnTo>
-                  <a:pt x="1645082" y="895256"/>
-                </a:lnTo>
-                <a:lnTo>
-                  <a:pt x="1684250" y="916572"/>
-                </a:lnTo>
-                <a:lnTo>
-                  <a:pt x="1723419" y="937887"/>
-                </a:lnTo>
-                <a:lnTo>
-                  <a:pt x="1762587" y="959203"/>
-                </a:lnTo>
-                <a:lnTo>
-                  <a:pt x="1801756" y="980519"/>
-                </a:lnTo>
-                <a:lnTo>
-                  <a:pt x="1840925" y="1001834"/>
-                </a:lnTo>
-                <a:lnTo>
-                  <a:pt x="1880093" y="1023150"/>
-                </a:lnTo>
-                <a:lnTo>
-                  <a:pt x="1919262" y="1044465"/>
-                </a:lnTo>
-                <a:lnTo>
-                  <a:pt x="1958431" y="1065781"/>
-                </a:lnTo>
-                <a:lnTo>
-                  <a:pt x="1997599" y="1087097"/>
-                </a:lnTo>
-                <a:lnTo>
-                  <a:pt x="2036768" y="1108412"/>
-                </a:lnTo>
-                <a:lnTo>
-                  <a:pt x="2075936" y="1129728"/>
-                </a:lnTo>
-                <a:lnTo>
-                  <a:pt x="2115105" y="1151044"/>
-                </a:lnTo>
-                <a:lnTo>
-                  <a:pt x="2154274" y="1172359"/>
-                </a:lnTo>
-                <a:lnTo>
-                  <a:pt x="2193442" y="1193675"/>
-                </a:lnTo>
-                <a:lnTo>
-                  <a:pt x="2232611" y="1214990"/>
-                </a:lnTo>
-                <a:lnTo>
-                  <a:pt x="2271779" y="1236306"/>
-                </a:lnTo>
-                <a:lnTo>
-                  <a:pt x="2310948" y="1257622"/>
-                </a:lnTo>
-                <a:lnTo>
-                  <a:pt x="2350117" y="1278937"/>
-                </a:lnTo>
-                <a:lnTo>
-                  <a:pt x="2389285" y="1300253"/>
-                </a:lnTo>
-                <a:lnTo>
-                  <a:pt x="2428454" y="1321568"/>
-                </a:lnTo>
-                <a:lnTo>
-                  <a:pt x="2467623" y="1342884"/>
-                </a:lnTo>
-                <a:lnTo>
-                  <a:pt x="2506791" y="1364200"/>
-                </a:lnTo>
-                <a:lnTo>
-                  <a:pt x="2545960" y="1385515"/>
-                </a:lnTo>
-                <a:lnTo>
-                  <a:pt x="2585128" y="1406831"/>
-                </a:lnTo>
-                <a:lnTo>
-                  <a:pt x="2624297" y="1428147"/>
-                </a:lnTo>
-                <a:lnTo>
-                  <a:pt x="2663466" y="1449462"/>
-                </a:lnTo>
-                <a:lnTo>
-                  <a:pt x="2702634" y="1470778"/>
-                </a:lnTo>
-                <a:lnTo>
-                  <a:pt x="2741803" y="1492093"/>
-                </a:lnTo>
-                <a:lnTo>
-                  <a:pt x="2780971" y="1513409"/>
-                </a:lnTo>
-                <a:lnTo>
-                  <a:pt x="2820140" y="1534725"/>
-                </a:lnTo>
-                <a:lnTo>
-                  <a:pt x="2859309" y="1556040"/>
-                </a:lnTo>
-                <a:lnTo>
-                  <a:pt x="2898477" y="1577356"/>
-                </a:lnTo>
-                <a:lnTo>
-                  <a:pt x="2937646" y="1598671"/>
-                </a:lnTo>
-                <a:lnTo>
-                  <a:pt x="2976815" y="1619987"/>
-                </a:lnTo>
-                <a:lnTo>
-                  <a:pt x="3015983" y="1641303"/>
-                </a:lnTo>
-                <a:lnTo>
-                  <a:pt x="3055152" y="1662618"/>
-                </a:lnTo>
-                <a:lnTo>
-                  <a:pt x="3094320" y="1683934"/>
-                </a:lnTo>
-                <a:lnTo>
-                  <a:pt x="3133489" y="1705249"/>
-                </a:lnTo>
-                <a:lnTo>
-                  <a:pt x="3172658" y="1726565"/>
-                </a:lnTo>
-                <a:lnTo>
-                  <a:pt x="3211826" y="1747881"/>
-                </a:lnTo>
-                <a:lnTo>
-                  <a:pt x="3250995" y="1769196"/>
-                </a:lnTo>
-                <a:lnTo>
-                  <a:pt x="3290163" y="1790512"/>
-                </a:lnTo>
-                <a:lnTo>
-                  <a:pt x="3329332" y="1811828"/>
-                </a:lnTo>
-                <a:lnTo>
-                  <a:pt x="3368501" y="1833143"/>
-                </a:lnTo>
-                <a:lnTo>
-                  <a:pt x="3407669" y="1854459"/>
-                </a:lnTo>
-                <a:lnTo>
-                  <a:pt x="3446838" y="1875774"/>
-                </a:lnTo>
-                <a:lnTo>
-                  <a:pt x="3486007" y="1897090"/>
-                </a:lnTo>
-                <a:lnTo>
-                  <a:pt x="3525175" y="1918406"/>
-                </a:lnTo>
-                <a:lnTo>
-                  <a:pt x="3564344" y="1939721"/>
-                </a:lnTo>
-                <a:lnTo>
-                  <a:pt x="3603512" y="1961037"/>
-                </a:lnTo>
-                <a:lnTo>
-                  <a:pt x="3642681" y="1982352"/>
-                </a:lnTo>
-                <a:lnTo>
-                  <a:pt x="3681850" y="2003668"/>
-                </a:lnTo>
-                <a:lnTo>
-                  <a:pt x="3721018" y="2024984"/>
-                </a:lnTo>
-                <a:lnTo>
-                  <a:pt x="3760187" y="2046299"/>
-                </a:lnTo>
-                <a:lnTo>
-                  <a:pt x="3799355" y="2067615"/>
-                </a:lnTo>
-                <a:lnTo>
-                  <a:pt x="3838524" y="2088930"/>
-                </a:lnTo>
-                <a:lnTo>
-                  <a:pt x="3877693" y="2110246"/>
-                </a:lnTo>
-                <a:lnTo>
-                  <a:pt x="3916861" y="2131562"/>
-                </a:lnTo>
-                <a:lnTo>
-                  <a:pt x="3956030" y="2152877"/>
-                </a:lnTo>
-                <a:lnTo>
-                  <a:pt x="3995199" y="2174193"/>
-                </a:lnTo>
-                <a:lnTo>
-                  <a:pt x="4034367" y="2195509"/>
-                </a:lnTo>
-                <a:lnTo>
-                  <a:pt x="4073536" y="2216824"/>
-                </a:lnTo>
-                <a:lnTo>
-                  <a:pt x="4112704" y="2238140"/>
-                </a:lnTo>
-                <a:lnTo>
-                  <a:pt x="4151873" y="2259455"/>
-                </a:lnTo>
-                <a:lnTo>
-                  <a:pt x="4191042" y="2280771"/>
-                </a:lnTo>
-                <a:lnTo>
-                  <a:pt x="4230210" y="2302087"/>
-                </a:lnTo>
-                <a:lnTo>
-                  <a:pt x="4269379" y="2323402"/>
-                </a:lnTo>
-                <a:lnTo>
-                  <a:pt x="4308547" y="2344718"/>
-                </a:lnTo>
-                <a:lnTo>
-                  <a:pt x="4347716" y="2366033"/>
-                </a:lnTo>
-                <a:lnTo>
-                  <a:pt x="4386885" y="2387349"/>
-                </a:lnTo>
-                <a:lnTo>
-                  <a:pt x="4426053" y="2408665"/>
-                </a:lnTo>
-                <a:lnTo>
-                  <a:pt x="4465222" y="2429980"/>
-                </a:lnTo>
-                <a:lnTo>
-                  <a:pt x="4504391" y="2451296"/>
-                </a:lnTo>
-                <a:lnTo>
-                  <a:pt x="4543559" y="2472611"/>
-                </a:lnTo>
-                <a:lnTo>
-                  <a:pt x="4582728" y="2493927"/>
-                </a:lnTo>
-                <a:lnTo>
-                  <a:pt x="4621896" y="2515243"/>
-                </a:lnTo>
-                <a:lnTo>
-                  <a:pt x="4661065" y="2536558"/>
-                </a:lnTo>
-                <a:lnTo>
-                  <a:pt x="4700234" y="2557874"/>
-                </a:lnTo>
-                <a:lnTo>
-                  <a:pt x="4739402" y="2579190"/>
-                </a:lnTo>
-                <a:lnTo>
-                  <a:pt x="4758987" y="2589847"/>
-                </a:lnTo>
-              </a:path>
-            </a:pathLst>
-          </a:custGeom>
-          <a:noFill/>
-          <a:ln w="22860">
+          </a:prstGeom>
+          <a:ln w="16510">
             <a:solidFill>
-              <a:srgbClr val="F2B880"/>
+              <a:srgbClr val="F28BA0"/>
             </a:solidFill>
             <a:prstDash val="dash"/>
           </a:ln>
           <a:effectLst/>
         </p:spPr>
-        <p:txBody>
-          <a:bodyPr rtlCol="0" anchor="ctr"/>
-          <a:lstStyle/>
-          <a:p>
-            <a:pPr algn="ctr"/>
-          </a:p>
-        </p:txBody>
-      </p:sp>
+      </p:cxnSp>
       <p:sp>
         <p:nvSpPr>
-          <p:cNvPr id="37" name="C1-E15 ellipse 35" descr="sci-ppt:o035"/>
-          <p:cNvSpPr/>
-          <p:nvPr/>
-        </p:nvSpPr>
-        <p:spPr>
-          <a:xfrm>
-            <a:off x="5747939" y="3379785"/>
-            <a:ext cx="146304" cy="146304"/>
-          </a:xfrm>
-          <a:prstGeom prst="ellipse">
-            <a:avLst/>
-          </a:prstGeom>
-          <a:solidFill>
-            <a:srgbClr val="F2B880"/>
-          </a:solidFill>
-          <a:ln w="12700">
-            <a:solidFill>
-              <a:srgbClr val="F2B880"/>
-            </a:solidFill>
-          </a:ln>
-          <a:effectLst/>
-        </p:spPr>
-        <p:txBody>
-          <a:bodyPr rtlCol="0" anchor="ctr"/>
-          <a:lstStyle/>
-          <a:p>
-            <a:pPr algn="ctr"/>
-          </a:p>
-        </p:txBody>
-      </p:sp>
-      <p:sp>
-        <p:nvSpPr>
-          <p:cNvPr id="38" name="C1-E15 text 36" descr="sci-ppt:o036"/>
+          <p:cNvPr id="35" name="C1-E15 text 33" descr="sci-ppt:o033"/>
           <p:cNvSpPr txBox="1"/>
           <p:nvPr/>
         </p:nvSpPr>
         <p:spPr>
           <a:xfrm>
-            <a:off x="3489371" y="3452999"/>
-            <a:ext cx="2194560" cy="231648"/>
+            <a:off x="4306824" y="1402080"/>
+            <a:ext cx="2926080" cy="603504"/>
           </a:xfrm>
           <a:prstGeom prst="rect">
             <a:avLst/>
@@ -4913,57 +9368,57 @@
             <a:r>
               <a:rPr sz="1200" b="0" i="0">
                 <a:solidFill>
-                  <a:srgbClr val="F2B880"/>
+                  <a:srgbClr val="F28BA0"/>
                 </a:solidFill>
                 <a:latin typeface="Arial"/>
               </a:rPr>
-              <a:t>21.6 m/s at R = Rₘₐₓ/2</a:t>
+              <a:t>integrand → ∞ like (1 − x)^(−1/2)</a:t>
+            </a:r>
+          </a:p>
+          <a:p>
+            <a:pPr algn="l">
+              <a:spcAft>
+                <a:spcPts val="0"/>
+              </a:spcAft>
+            </a:pPr>
+            <a:r>
+              <a:rPr sz="1200" b="0" i="0">
+                <a:solidFill>
+                  <a:srgbClr val="F28BA0"/>
+                </a:solidFill>
+                <a:latin typeface="Arial"/>
+              </a:rPr>
+              <a:t>at the endpoint: infinite height,</a:t>
+            </a:r>
+          </a:p>
+          <a:p>
+            <a:pPr algn="l">
+              <a:spcAft>
+                <a:spcPts val="0"/>
+              </a:spcAft>
+            </a:pPr>
+            <a:r>
+              <a:rPr sz="1200" b="0" i="0">
+                <a:solidFill>
+                  <a:srgbClr val="F28BA0"/>
+                </a:solidFill>
+                <a:latin typeface="Arial"/>
+              </a:rPr>
+              <a:t>finite area</a:t>
             </a:r>
           </a:p>
         </p:txBody>
       </p:sp>
       <p:sp>
         <p:nvSpPr>
-          <p:cNvPr id="39" name="C1-E15 ellipse 37" descr="sci-ppt:o037"/>
-          <p:cNvSpPr/>
-          <p:nvPr/>
-        </p:nvSpPr>
-        <p:spPr>
-          <a:xfrm>
-            <a:off x="3340313" y="2033588"/>
-            <a:ext cx="146304" cy="146304"/>
-          </a:xfrm>
-          <a:prstGeom prst="ellipse">
-            <a:avLst/>
-          </a:prstGeom>
-          <a:solidFill>
-            <a:srgbClr val="F28BA0"/>
-          </a:solidFill>
-          <a:ln w="12700">
-            <a:solidFill>
-              <a:srgbClr val="F28BA0"/>
-            </a:solidFill>
-          </a:ln>
-          <a:effectLst/>
-        </p:spPr>
-        <p:txBody>
-          <a:bodyPr rtlCol="0" anchor="ctr"/>
-          <a:lstStyle/>
-          <a:p>
-            <a:pPr algn="ctr"/>
-          </a:p>
-        </p:txBody>
-      </p:sp>
-      <p:sp>
-        <p:nvSpPr>
-          <p:cNvPr id="40" name="C1-E15 text 38" descr="sci-ppt:o038"/>
+          <p:cNvPr id="36" name="C1-E15 text 34" descr="sci-ppt:o034"/>
           <p:cNvSpPr txBox="1"/>
           <p:nvPr/>
         </p:nvSpPr>
         <p:spPr>
           <a:xfrm>
-            <a:off x="3550625" y="2015447"/>
-            <a:ext cx="2377440" cy="231648"/>
+            <a:off x="1591056" y="3962400"/>
+            <a:ext cx="2926080" cy="239395"/>
           </a:xfrm>
           <a:prstGeom prst="rect">
             <a:avLst/>
@@ -4983,67 +9438,27 @@
               </a:spcAft>
             </a:pPr>
             <a:r>
-              <a:rPr sz="1200" b="0" i="0">
+              <a:rPr sz="1250" b="0" i="0">
                 <a:solidFill>
-                  <a:srgbClr val="F28BA0"/>
+                  <a:srgbClr val="8EDBD4"/>
                 </a:solidFill>
                 <a:latin typeface="Arial"/>
               </a:rPr>
-              <a:t>258 m/s at R = Rₘₐₓ/10</a:t>
+              <a:t>shaded area ∫ = 0.7468</a:t>
             </a:r>
           </a:p>
         </p:txBody>
       </p:sp>
       <p:sp>
         <p:nvSpPr>
-          <p:cNvPr id="41" name="C1-E15 text 39" descr="sci-ppt:o039"/>
-          <p:cNvSpPr txBox="1"/>
-          <p:nvPr/>
-        </p:nvSpPr>
-        <p:spPr>
-          <a:xfrm>
-            <a:off x="1221570" y="3779520"/>
-            <a:ext cx="3108960" cy="223900"/>
-          </a:xfrm>
-          <a:prstGeom prst="rect">
-            <a:avLst/>
-          </a:prstGeom>
-          <a:noFill/>
-          <a:effectLst/>
-        </p:spPr>
-        <p:txBody>
-          <a:bodyPr wrap="none" lIns="18288" rIns="18288" tIns="18288" bIns="18288" anchor="t">
-            <a:spAutoFit/>
-          </a:bodyPr>
-          <a:lstStyle/>
-          <a:p>
-            <a:pPr algn="l">
-              <a:spcAft>
-                <a:spcPts val="0"/>
-              </a:spcAft>
-            </a:pPr>
-            <a:r>
-              <a:rPr sz="1150" b="0" i="0">
-                <a:solidFill>
-                  <a:srgbClr val="F2B880"/>
-                </a:solidFill>
-                <a:latin typeface="Arial"/>
-              </a:rPr>
-              <a:t>dashed: ∝ R^(−3/2) as R → 0</a:t>
-            </a:r>
-          </a:p>
-        </p:txBody>
-      </p:sp>
-      <p:sp>
-        <p:nvSpPr>
-          <p:cNvPr id="42" name="C1-E15 round_rect 40" descr="sci-ppt:o040"/>
+          <p:cNvPr id="37" name="C1-E15 round_rect 35" descr="sci-ppt:o035"/>
           <p:cNvSpPr/>
           <p:nvPr/>
         </p:nvSpPr>
         <p:spPr>
           <a:xfrm>
             <a:off x="7223760" y="1371600"/>
-            <a:ext cx="4617720" cy="3749039"/>
+            <a:ext cx="4617720" cy="3657600"/>
           </a:xfrm>
           <a:prstGeom prst="roundRect">
             <a:avLst/>
@@ -5068,7 +9483,7 @@
       </p:sp>
       <p:sp>
         <p:nvSpPr>
-          <p:cNvPr id="43" name="C1-E15 text 41" descr="sci-ppt:o041"/>
+          <p:cNvPr id="38" name="C1-E15 text 36" descr="sci-ppt:o036"/>
           <p:cNvSpPr txBox="1"/>
           <p:nvPr/>
         </p:nvSpPr>
@@ -5101,20 +9516,76 @@
                 </a:solidFill>
                 <a:latin typeface="Arial"/>
               </a:rPr>
-              <a:t>Reading the solution</a:t>
+              <a:t>Collapse time in dimensionless form</a:t>
             </a:r>
           </a:p>
         </p:txBody>
       </p:sp>
       <p:sp>
         <p:nvSpPr>
-          <p:cNvPr id="44" name="C1-E15 text 42" descr="sci-ppt:o042"/>
+          <p:cNvPr id="39" name="C1-E15 text 37" descr="sci-ppt:o037"/>
           <p:cNvSpPr txBox="1"/>
           <p:nvPr/>
         </p:nvSpPr>
         <p:spPr>
           <a:xfrm>
             <a:off x="7360920" y="1828800"/>
+            <a:ext cx="4389120" cy="448563"/>
+          </a:xfrm>
+          <a:prstGeom prst="rect">
+            <a:avLst/>
+          </a:prstGeom>
+          <a:noFill/>
+          <a:effectLst/>
+        </p:spPr>
+        <p:txBody>
+          <a:bodyPr wrap="none" lIns="18288" rIns="18288" tIns="18288" bIns="18288" anchor="t">
+            <a:spAutoFit/>
+          </a:bodyPr>
+          <a:lstStyle/>
+          <a:p>
+            <a:pPr algn="l">
+              <a:spcAft>
+                <a:spcPts val="0"/>
+              </a:spcAft>
+            </a:pPr>
+            <a:r>
+              <a:rPr sz="1300" b="1" i="0">
+                <a:solidFill>
+                  <a:srgbClr val="E7F0F3"/>
+                </a:solidFill>
+                <a:latin typeface="Arial"/>
+              </a:rPr>
+              <a:t>t_c = ∫ dR / |Ṙ|</a:t>
+            </a:r>
+          </a:p>
+          <a:p>
+            <a:pPr algn="l">
+              <a:spcAft>
+                <a:spcPts val="0"/>
+              </a:spcAft>
+            </a:pPr>
+            <a:r>
+              <a:rPr sz="1300" b="1" i="0">
+                <a:solidFill>
+                  <a:srgbClr val="E7F0F3"/>
+                </a:solidFill>
+                <a:latin typeface="Arial"/>
+              </a:rPr>
+              <a:t>= Rₘₐₓ √(ρ/Δp_c) · Cₜ</a:t>
+            </a:r>
+          </a:p>
+        </p:txBody>
+      </p:sp>
+      <p:sp>
+        <p:nvSpPr>
+          <p:cNvPr id="40" name="C1-E15 text 38" descr="sci-ppt:o038"/>
+          <p:cNvSpPr txBox="1"/>
+          <p:nvPr/>
+        </p:nvSpPr>
+        <p:spPr>
+          <a:xfrm>
+            <a:off x="7360920" y="2743200"/>
             <a:ext cx="4389120" cy="247142"/>
           </a:xfrm>
           <a:prstGeom prst="rect">
@@ -5137,25 +9608,25 @@
             <a:r>
               <a:rPr sz="1300" b="1" i="0">
                 <a:solidFill>
-                  <a:srgbClr val="E7F0F3"/>
+                  <a:srgbClr val="F2B880"/>
                 </a:solidFill>
                 <a:latin typeface="Arial"/>
               </a:rPr>
-              <a:t>Ṙ = −√{ (2Δp_c/3ρ) [ (Rₘₐₓ/R)³ − 1 ] }</a:t>
+              <a:t>Cₜ = √(3/2) ∫₀¹ x^(3/2) / √(1 − x³) dx</a:t>
             </a:r>
           </a:p>
         </p:txBody>
       </p:sp>
       <p:sp>
         <p:nvSpPr>
-          <p:cNvPr id="45" name="C1-E15 text 43" descr="sci-ppt:o043"/>
+          <p:cNvPr id="41" name="C1-E15 text 39" descr="sci-ppt:o039"/>
           <p:cNvSpPr txBox="1"/>
           <p:nvPr/>
         </p:nvSpPr>
         <p:spPr>
           <a:xfrm>
-            <a:off x="7562088" y="2514600"/>
-            <a:ext cx="4187952" cy="433070"/>
+            <a:off x="7360920" y="3337560"/>
+            <a:ext cx="4389120" cy="247142"/>
           </a:xfrm>
           <a:prstGeom prst="rect">
             <a:avLst/>
@@ -5175,75 +9646,27 @@
               </a:spcAft>
             </a:pPr>
             <a:r>
-              <a:rPr sz="1250" b="0" i="0">
+              <a:rPr sz="1300" b="0" i="0">
                 <a:solidFill>
                   <a:srgbClr val="E7F0F3"/>
                 </a:solidFill>
                 <a:latin typeface="Arial"/>
               </a:rPr>
-              <a:t>The start R = Rₘₐₓ at rest fixes the constant: Ṙ</a:t>
-            </a:r>
-          </a:p>
-          <a:p>
-            <a:pPr algn="l">
-              <a:spcAft>
-                <a:spcPts val="0"/>
-              </a:spcAft>
-            </a:pPr>
-            <a:r>
-              <a:rPr sz="1250" b="0" i="0">
-                <a:solidFill>
-                  <a:srgbClr val="E7F0F3"/>
-                </a:solidFill>
-                <a:latin typeface="Arial"/>
-              </a:rPr>
-              <a:t>= 0 there.</a:t>
+              <a:t>= √(3/2) × 0.7468 = 0.914681</a:t>
             </a:r>
           </a:p>
         </p:txBody>
       </p:sp>
       <p:sp>
         <p:nvSpPr>
-          <p:cNvPr id="46" name="C1-E15 ellipse 44" descr="sci-ppt:o044"/>
-          <p:cNvSpPr/>
-          <p:nvPr/>
-        </p:nvSpPr>
-        <p:spPr>
-          <a:xfrm>
-            <a:off x="7392924" y="2571877"/>
-            <a:ext cx="82296" cy="82296"/>
-          </a:xfrm>
-          <a:prstGeom prst="ellipse">
-            <a:avLst/>
-          </a:prstGeom>
-          <a:solidFill>
-            <a:srgbClr val="8EDBD4"/>
-          </a:solidFill>
-          <a:ln w="12700">
-            <a:solidFill>
-              <a:srgbClr val="8EDBD4"/>
-            </a:solidFill>
-          </a:ln>
-          <a:effectLst/>
-        </p:spPr>
-        <p:txBody>
-          <a:bodyPr rtlCol="0" anchor="ctr"/>
-          <a:lstStyle/>
-          <a:p>
-            <a:pPr algn="ctr"/>
-          </a:p>
-        </p:txBody>
-      </p:sp>
-      <p:sp>
-        <p:nvSpPr>
-          <p:cNvPr id="47" name="C1-E15 text 45" descr="sci-ppt:o045"/>
+          <p:cNvPr id="42" name="C1-E15 text 40" descr="sci-ppt:o040"/>
           <p:cNvSpPr txBox="1"/>
           <p:nvPr/>
         </p:nvSpPr>
         <p:spPr>
           <a:xfrm>
-            <a:off x="7562088" y="2993389"/>
-            <a:ext cx="4187952" cy="433070"/>
+            <a:off x="7360920" y="3931920"/>
+            <a:ext cx="4389120" cy="417576"/>
           </a:xfrm>
           <a:prstGeom prst="rect">
             <a:avLst/>
@@ -5263,13 +9686,13 @@
               </a:spcAft>
             </a:pPr>
             <a:r>
-              <a:rPr sz="1250" b="0" i="0">
+              <a:rPr sz="1200" b="0" i="0">
                 <a:solidFill>
-                  <a:srgbClr val="E7F0F3"/>
+                  <a:srgbClr val="B4C7D2"/>
                 </a:solidFill>
                 <a:latin typeface="Arial"/>
               </a:rPr>
-              <a:t>The minus sign selects the inward branch</a:t>
+              <a:t>The substitution x = R/Rₘₐₓ and dR = Rₘₐₓ dx moves all</a:t>
             </a:r>
           </a:p>
           <a:p>
@@ -5279,59 +9702,27 @@
               </a:spcAft>
             </a:pPr>
             <a:r>
-              <a:rPr sz="1250" b="0" i="0">
+              <a:rPr sz="1200" b="0" i="0">
                 <a:solidFill>
-                  <a:srgbClr val="E7F0F3"/>
+                  <a:srgbClr val="B4C7D2"/>
                 </a:solidFill>
                 <a:latin typeface="Arial"/>
               </a:rPr>
-              <a:t>(collapse).</a:t>
+              <a:t>dimensions into the prefactor.</a:t>
             </a:r>
           </a:p>
         </p:txBody>
       </p:sp>
       <p:sp>
         <p:nvSpPr>
-          <p:cNvPr id="48" name="C1-E15 ellipse 46" descr="sci-ppt:o046"/>
-          <p:cNvSpPr/>
-          <p:nvPr/>
-        </p:nvSpPr>
-        <p:spPr>
-          <a:xfrm>
-            <a:off x="7392924" y="3050666"/>
-            <a:ext cx="82296" cy="82296"/>
-          </a:xfrm>
-          <a:prstGeom prst="ellipse">
-            <a:avLst/>
-          </a:prstGeom>
-          <a:solidFill>
-            <a:srgbClr val="8EDBD4"/>
-          </a:solidFill>
-          <a:ln w="12700">
-            <a:solidFill>
-              <a:srgbClr val="8EDBD4"/>
-            </a:solidFill>
-          </a:ln>
-          <a:effectLst/>
-        </p:spPr>
-        <p:txBody>
-          <a:bodyPr rtlCol="0" anchor="ctr"/>
-          <a:lstStyle/>
-          <a:p>
-            <a:pPr algn="ctr"/>
-          </a:p>
-        </p:txBody>
-      </p:sp>
-      <p:sp>
-        <p:nvSpPr>
-          <p:cNvPr id="49" name="C1-E15 text 47" descr="sci-ppt:o047"/>
+          <p:cNvPr id="43" name="C1-E15 text 41" descr="sci-ppt:o041"/>
           <p:cNvSpPr txBox="1"/>
           <p:nvPr/>
         </p:nvSpPr>
         <p:spPr>
           <a:xfrm>
-            <a:off x="7562088" y="3472179"/>
-            <a:ext cx="4187952" cy="433070"/>
+            <a:off x="914400" y="5733288"/>
+            <a:ext cx="10972800" cy="247142"/>
           </a:xfrm>
           <a:prstGeom prst="rect">
             <a:avLst/>
@@ -5351,196 +9742,20 @@
               </a:spcAft>
             </a:pPr>
             <a:r>
-              <a:rPr sz="1250" b="0" i="0">
+              <a:rPr sz="1300" b="0" i="0">
                 <a:solidFill>
                   <a:srgbClr val="E7F0F3"/>
                 </a:solidFill>
                 <a:latin typeface="Arial"/>
               </a:rPr>
-              <a:t>As R → 0, |Ṙ| grows without bound: this is the</a:t>
-            </a:r>
-          </a:p>
-          <a:p>
-            <a:pPr algn="l">
-              <a:spcAft>
-                <a:spcPts val="0"/>
-              </a:spcAft>
-            </a:pPr>
-            <a:r>
-              <a:rPr sz="1250" b="0" i="0">
-                <a:solidFill>
-                  <a:srgbClr val="E7F0F3"/>
-                </a:solidFill>
-                <a:latin typeface="Arial"/>
-              </a:rPr>
-              <a:t>model's singularity, not a physical speed limit.</a:t>
+              <a:t>The endpoint singularity is integrable, so the ideal collapse takes a finite time, 0.91468 Rₘₐₓ √(ρ/Δp_c).</a:t>
             </a:r>
           </a:p>
         </p:txBody>
       </p:sp>
       <p:sp>
         <p:nvSpPr>
-          <p:cNvPr id="50" name="C1-E15 ellipse 48" descr="sci-ppt:o048"/>
-          <p:cNvSpPr/>
-          <p:nvPr/>
-        </p:nvSpPr>
-        <p:spPr>
-          <a:xfrm>
-            <a:off x="7392924" y="3529456"/>
-            <a:ext cx="82296" cy="82296"/>
-          </a:xfrm>
-          <a:prstGeom prst="ellipse">
-            <a:avLst/>
-          </a:prstGeom>
-          <a:solidFill>
-            <a:srgbClr val="8EDBD4"/>
-          </a:solidFill>
-          <a:ln w="12700">
-            <a:solidFill>
-              <a:srgbClr val="8EDBD4"/>
-            </a:solidFill>
-          </a:ln>
-          <a:effectLst/>
-        </p:spPr>
-        <p:txBody>
-          <a:bodyPr rtlCol="0" anchor="ctr"/>
-          <a:lstStyle/>
-          <a:p>
-            <a:pPr algn="ctr"/>
-          </a:p>
-        </p:txBody>
-      </p:sp>
-      <p:sp>
-        <p:nvSpPr>
-          <p:cNvPr id="51" name="C1-E15 text 49" descr="sci-ppt:o049"/>
-          <p:cNvSpPr txBox="1"/>
-          <p:nvPr/>
-        </p:nvSpPr>
-        <p:spPr>
-          <a:xfrm>
-            <a:off x="7562088" y="3950969"/>
-            <a:ext cx="4187952" cy="433070"/>
-          </a:xfrm>
-          <a:prstGeom prst="rect">
-            <a:avLst/>
-          </a:prstGeom>
-          <a:noFill/>
-          <a:effectLst/>
-        </p:spPr>
-        <p:txBody>
-          <a:bodyPr wrap="none" lIns="18288" rIns="18288" tIns="18288" bIns="18288" anchor="t">
-            <a:spAutoFit/>
-          </a:bodyPr>
-          <a:lstStyle/>
-          <a:p>
-            <a:pPr algn="l">
-              <a:spcAft>
-                <a:spcPts val="0"/>
-              </a:spcAft>
-            </a:pPr>
-            <a:r>
-              <a:rPr sz="1250" b="0" i="0">
-                <a:solidFill>
-                  <a:srgbClr val="E7F0F3"/>
-                </a:solidFill>
-                <a:latin typeface="Arial"/>
-              </a:rPr>
-              <a:t>Real collapse is stopped by gas, viscosity,</a:t>
-            </a:r>
-          </a:p>
-          <a:p>
-            <a:pPr algn="l">
-              <a:spcAft>
-                <a:spcPts val="0"/>
-              </a:spcAft>
-            </a:pPr>
-            <a:r>
-              <a:rPr sz="1250" b="0" i="0">
-                <a:solidFill>
-                  <a:srgbClr val="E7F0F3"/>
-                </a:solidFill>
-                <a:latin typeface="Arial"/>
-              </a:rPr>
-              <a:t>tension and compressibility long before.</a:t>
-            </a:r>
-          </a:p>
-        </p:txBody>
-      </p:sp>
-      <p:sp>
-        <p:nvSpPr>
-          <p:cNvPr id="52" name="C1-E15 ellipse 50" descr="sci-ppt:o050"/>
-          <p:cNvSpPr/>
-          <p:nvPr/>
-        </p:nvSpPr>
-        <p:spPr>
-          <a:xfrm>
-            <a:off x="7392924" y="4008247"/>
-            <a:ext cx="82296" cy="82296"/>
-          </a:xfrm>
-          <a:prstGeom prst="ellipse">
-            <a:avLst/>
-          </a:prstGeom>
-          <a:solidFill>
-            <a:srgbClr val="8EDBD4"/>
-          </a:solidFill>
-          <a:ln w="12700">
-            <a:solidFill>
-              <a:srgbClr val="8EDBD4"/>
-            </a:solidFill>
-          </a:ln>
-          <a:effectLst/>
-        </p:spPr>
-        <p:txBody>
-          <a:bodyPr rtlCol="0" anchor="ctr"/>
-          <a:lstStyle/>
-          <a:p>
-            <a:pPr algn="ctr"/>
-          </a:p>
-        </p:txBody>
-      </p:sp>
-      <p:sp>
-        <p:nvSpPr>
-          <p:cNvPr id="53" name="C1-E15 text 51" descr="sci-ppt:o051"/>
-          <p:cNvSpPr txBox="1"/>
-          <p:nvPr/>
-        </p:nvSpPr>
-        <p:spPr>
-          <a:xfrm>
-            <a:off x="1005840" y="5733288"/>
-            <a:ext cx="10972800" cy="239395"/>
-          </a:xfrm>
-          <a:prstGeom prst="rect">
-            <a:avLst/>
-          </a:prstGeom>
-          <a:noFill/>
-          <a:effectLst/>
-        </p:spPr>
-        <p:txBody>
-          <a:bodyPr wrap="none" lIns="18288" rIns="18288" tIns="18288" bIns="18288" anchor="t">
-            <a:spAutoFit/>
-          </a:bodyPr>
-          <a:lstStyle/>
-          <a:p>
-            <a:pPr algn="l">
-              <a:spcAft>
-                <a:spcPts val="0"/>
-              </a:spcAft>
-            </a:pPr>
-            <a:r>
-              <a:rPr sz="1250" b="0" i="0">
-                <a:solidFill>
-                  <a:srgbClr val="B4C7D2"/>
-                </a:solidFill>
-                <a:latin typeface="Arial"/>
-              </a:rPr>
-              <a:t>Teaching inputs: Rₘₐₓ = 30 µm, ρ = 1000 kg/m³, Δp_c = 100 kPa.</a:t>
-            </a:r>
-          </a:p>
-        </p:txBody>
-      </p:sp>
-      <p:sp>
-        <p:nvSpPr>
-          <p:cNvPr id="54" name="C1-E15 text 52" descr="sci-ppt:o052"/>
+          <p:cNvPr id="44" name="C1-E15 text 42" descr="sci-ppt:o042"/>
           <p:cNvSpPr txBox="1"/>
           <p:nvPr/>
         </p:nvSpPr>
@@ -5573,7 +9788,7 @@
                 </a:solidFill>
                 <a:latin typeface="Arial"/>
               </a:rPr>
-              <a:t>Wall speed from Eq. C1-E15 (log–log axes).</a:t>
+              <a:t>Integrand from Eq. C1-E15; area by numerical quadrature.</a:t>
             </a:r>
           </a:p>
         </p:txBody>
